--- a/TDK_CLI_Competitive_Positioning.pptx
+++ b/TDK_CLI_Competitive_Positioning.pptx
@@ -3101,14 +3101,100 @@
       <p:grpSpPr/>
       <p:sp>
         <p:nvSpPr>
-          <p:cNvPr id="2" name="TextBox 1"/>
+          <p:cNvPr id="2" name="Rectangle 1"/>
+          <p:cNvSpPr/>
+          <p:nvPr/>
+        </p:nvSpPr>
+        <p:spPr>
+          <a:xfrm>
+            <a:off x="0" y="0"/>
+            <a:ext cx="12191695" cy="6858000"/>
+          </a:xfrm>
+          <a:prstGeom prst="rect">
+            <a:avLst/>
+          </a:prstGeom>
+          <a:solidFill>
+            <a:srgbClr val="F8F9FA"/>
+          </a:solidFill>
+          <a:ln>
+            <a:noFill/>
+          </a:ln>
+        </p:spPr>
+        <p:style>
+          <a:lnRef idx="1">
+            <a:schemeClr val="accent1"/>
+          </a:lnRef>
+          <a:fillRef idx="3">
+            <a:schemeClr val="accent1"/>
+          </a:fillRef>
+          <a:effectRef idx="2">
+            <a:schemeClr val="accent1"/>
+          </a:effectRef>
+          <a:fontRef idx="minor">
+            <a:schemeClr val="lt1"/>
+          </a:fontRef>
+        </p:style>
+        <p:txBody>
+          <a:bodyPr rtlCol="0" anchor="ctr"/>
+          <a:lstStyle/>
+          <a:p>
+            <a:pPr algn="ctr"/>
+          </a:p>
+        </p:txBody>
+      </p:sp>
+      <p:sp>
+        <p:nvSpPr>
+          <p:cNvPr id="3" name="Rectangle 2"/>
+          <p:cNvSpPr/>
+          <p:nvPr/>
+        </p:nvSpPr>
+        <p:spPr>
+          <a:xfrm>
+            <a:off x="0" y="0"/>
+            <a:ext cx="12191695" cy="137160"/>
+          </a:xfrm>
+          <a:prstGeom prst="rect">
+            <a:avLst/>
+          </a:prstGeom>
+          <a:solidFill>
+            <a:srgbClr val="7C4DFF"/>
+          </a:solidFill>
+          <a:ln>
+            <a:noFill/>
+          </a:ln>
+        </p:spPr>
+        <p:style>
+          <a:lnRef idx="1">
+            <a:schemeClr val="accent1"/>
+          </a:lnRef>
+          <a:fillRef idx="3">
+            <a:schemeClr val="accent1"/>
+          </a:fillRef>
+          <a:effectRef idx="2">
+            <a:schemeClr val="accent1"/>
+          </a:effectRef>
+          <a:fontRef idx="minor">
+            <a:schemeClr val="lt1"/>
+          </a:fontRef>
+        </p:style>
+        <p:txBody>
+          <a:bodyPr rtlCol="0" anchor="ctr"/>
+          <a:lstStyle/>
+          <a:p>
+            <a:pPr algn="ctr"/>
+          </a:p>
+        </p:txBody>
+      </p:sp>
+      <p:sp>
+        <p:nvSpPr>
+          <p:cNvPr id="4" name="TextBox 3"/>
           <p:cNvSpPr txBox="1"/>
           <p:nvPr/>
         </p:nvSpPr>
         <p:spPr>
           <a:xfrm>
-            <a:off x="457200" y="1828800"/>
-            <a:ext cx="11277295" cy="1371600"/>
+            <a:off x="731520" y="2011680"/>
+            <a:ext cx="10728655" cy="1097280"/>
           </a:xfrm>
           <a:prstGeom prst="rect">
             <a:avLst/>
@@ -3122,10 +3208,11 @@
           <a:lstStyle/>
           <a:p>
             <a:pPr algn="ctr">
-              <a:defRPr sz="5400" b="1">
+              <a:defRPr sz="5600" b="1">
                 <a:solidFill>
                   <a:srgbClr val="212529"/>
                 </a:solidFill>
+                <a:latin typeface="Segoe UI"/>
               </a:defRPr>
             </a:pPr>
             <a:r>
@@ -3134,15 +3221,62 @@
           </a:p>
           <a:p>
             <a:pPr algn="ctr">
+              <a:spcBef>
+                <a:spcPts val="2000"/>
+              </a:spcBef>
               <a:defRPr sz="2800">
                 <a:solidFill>
                   <a:srgbClr val="6C757D"/>
                 </a:solidFill>
+                <a:latin typeface="Segoe UI"/>
               </a:defRPr>
             </a:pPr>
             <a:r>
               <a:t>The Kubernetes-Free Alternative for Local Microservice Development</a:t>
             </a:r>
+          </a:p>
+        </p:txBody>
+      </p:sp>
+      <p:sp>
+        <p:nvSpPr>
+          <p:cNvPr id="5" name="Oval 4"/>
+          <p:cNvSpPr/>
+          <p:nvPr/>
+        </p:nvSpPr>
+        <p:spPr>
+          <a:xfrm>
+            <a:off x="10058400" y="5029200"/>
+            <a:ext cx="1371600" cy="1371600"/>
+          </a:xfrm>
+          <a:prstGeom prst="ellipse">
+            <a:avLst/>
+          </a:prstGeom>
+          <a:solidFill>
+            <a:srgbClr val="7C4DFF"/>
+          </a:solidFill>
+          <a:ln>
+            <a:noFill/>
+          </a:ln>
+        </p:spPr>
+        <p:style>
+          <a:lnRef idx="1">
+            <a:schemeClr val="accent1"/>
+          </a:lnRef>
+          <a:fillRef idx="3">
+            <a:schemeClr val="accent1"/>
+          </a:fillRef>
+          <a:effectRef idx="2">
+            <a:schemeClr val="accent1"/>
+          </a:effectRef>
+          <a:fontRef idx="minor">
+            <a:schemeClr val="lt1"/>
+          </a:fontRef>
+        </p:style>
+        <p:txBody>
+          <a:bodyPr rtlCol="0" anchor="ctr"/>
+          <a:lstStyle/>
+          <a:p>
+            <a:pPr algn="ctr"/>
           </a:p>
         </p:txBody>
       </p:sp>
@@ -3166,14 +3300,100 @@
       <p:grpSpPr/>
       <p:sp>
         <p:nvSpPr>
-          <p:cNvPr id="2" name="TextBox 1"/>
+          <p:cNvPr id="2" name="Rectangle 1"/>
+          <p:cNvSpPr/>
+          <p:nvPr/>
+        </p:nvSpPr>
+        <p:spPr>
+          <a:xfrm>
+            <a:off x="0" y="0"/>
+            <a:ext cx="12191695" cy="6858000"/>
+          </a:xfrm>
+          <a:prstGeom prst="rect">
+            <a:avLst/>
+          </a:prstGeom>
+          <a:solidFill>
+            <a:srgbClr val="FFFFFF"/>
+          </a:solidFill>
+          <a:ln>
+            <a:noFill/>
+          </a:ln>
+        </p:spPr>
+        <p:style>
+          <a:lnRef idx="1">
+            <a:schemeClr val="accent1"/>
+          </a:lnRef>
+          <a:fillRef idx="3">
+            <a:schemeClr val="accent1"/>
+          </a:fillRef>
+          <a:effectRef idx="2">
+            <a:schemeClr val="accent1"/>
+          </a:effectRef>
+          <a:fontRef idx="minor">
+            <a:schemeClr val="lt1"/>
+          </a:fontRef>
+        </p:style>
+        <p:txBody>
+          <a:bodyPr rtlCol="0" anchor="ctr"/>
+          <a:lstStyle/>
+          <a:p>
+            <a:pPr algn="ctr"/>
+          </a:p>
+        </p:txBody>
+      </p:sp>
+      <p:sp>
+        <p:nvSpPr>
+          <p:cNvPr id="3" name="Rectangle 2"/>
+          <p:cNvSpPr/>
+          <p:nvPr/>
+        </p:nvSpPr>
+        <p:spPr>
+          <a:xfrm>
+            <a:off x="0" y="0"/>
+            <a:ext cx="137160" cy="6858000"/>
+          </a:xfrm>
+          <a:prstGeom prst="rect">
+            <a:avLst/>
+          </a:prstGeom>
+          <a:solidFill>
+            <a:srgbClr val="7C4DFF"/>
+          </a:solidFill>
+          <a:ln>
+            <a:noFill/>
+          </a:ln>
+        </p:spPr>
+        <p:style>
+          <a:lnRef idx="1">
+            <a:schemeClr val="accent1"/>
+          </a:lnRef>
+          <a:fillRef idx="3">
+            <a:schemeClr val="accent1"/>
+          </a:fillRef>
+          <a:effectRef idx="2">
+            <a:schemeClr val="accent1"/>
+          </a:effectRef>
+          <a:fontRef idx="minor">
+            <a:schemeClr val="lt1"/>
+          </a:fontRef>
+        </p:style>
+        <p:txBody>
+          <a:bodyPr rtlCol="0" anchor="ctr"/>
+          <a:lstStyle/>
+          <a:p>
+            <a:pPr algn="ctr"/>
+          </a:p>
+        </p:txBody>
+      </p:sp>
+      <p:sp>
+        <p:nvSpPr>
+          <p:cNvPr id="4" name="TextBox 3"/>
           <p:cNvSpPr txBox="1"/>
           <p:nvPr/>
         </p:nvSpPr>
         <p:spPr>
           <a:xfrm>
-            <a:off x="457200" y="274320"/>
-            <a:ext cx="11277295" cy="914400"/>
+            <a:off x="731520" y="365760"/>
+            <a:ext cx="10728655" cy="914400"/>
           </a:xfrm>
           <a:prstGeom prst="rect">
             <a:avLst/>
@@ -3189,8 +3409,9 @@
             <a:pPr>
               <a:defRPr sz="4000" b="1">
                 <a:solidFill>
-                  <a:srgbClr val="FFC107"/>
-                </a:solidFill>
+                  <a:srgbClr val="7C4DFF"/>
+                </a:solidFill>
+                <a:latin typeface="Segoe UI"/>
               </a:defRPr>
             </a:pPr>
             <a:r>
@@ -3201,14 +3422,57 @@
       </p:sp>
       <p:sp>
         <p:nvSpPr>
-          <p:cNvPr id="3" name="TextBox 2"/>
+          <p:cNvPr id="5" name="Rectangle 4"/>
+          <p:cNvSpPr/>
+          <p:nvPr/>
+        </p:nvSpPr>
+        <p:spPr>
+          <a:xfrm>
+            <a:off x="731520" y="1188720"/>
+            <a:ext cx="1371600" cy="45720"/>
+          </a:xfrm>
+          <a:prstGeom prst="rect">
+            <a:avLst/>
+          </a:prstGeom>
+          <a:solidFill>
+            <a:srgbClr val="7C4DFF"/>
+          </a:solidFill>
+          <a:ln>
+            <a:noFill/>
+          </a:ln>
+        </p:spPr>
+        <p:style>
+          <a:lnRef idx="1">
+            <a:schemeClr val="accent1"/>
+          </a:lnRef>
+          <a:fillRef idx="3">
+            <a:schemeClr val="accent1"/>
+          </a:fillRef>
+          <a:effectRef idx="2">
+            <a:schemeClr val="accent1"/>
+          </a:effectRef>
+          <a:fontRef idx="minor">
+            <a:schemeClr val="lt1"/>
+          </a:fontRef>
+        </p:style>
+        <p:txBody>
+          <a:bodyPr rtlCol="0" anchor="ctr"/>
+          <a:lstStyle/>
+          <a:p>
+            <a:pPr algn="ctr"/>
+          </a:p>
+        </p:txBody>
+      </p:sp>
+      <p:sp>
+        <p:nvSpPr>
+          <p:cNvPr id="6" name="TextBox 5"/>
           <p:cNvSpPr txBox="1"/>
           <p:nvPr/>
         </p:nvSpPr>
         <p:spPr>
           <a:xfrm>
-            <a:off x="457200" y="1280160"/>
-            <a:ext cx="11277295" cy="5029200"/>
+            <a:off x="731520" y="1463040"/>
+            <a:ext cx="10728655" cy="5029200"/>
           </a:xfrm>
           <a:prstGeom prst="rect">
             <a:avLst/>
@@ -3223,12 +3487,13 @@
           <a:p>
             <a:pPr>
               <a:spcBef>
-                <a:spcPts val="2000"/>
+                <a:spcPts val="1600"/>
               </a:spcBef>
-              <a:defRPr sz="2400" b="1">
+              <a:defRPr sz="2200" b="1">
                 <a:solidFill>
                   <a:srgbClr val="212529"/>
                 </a:solidFill>
+                <a:latin typeface="Segoe UI"/>
               </a:defRPr>
             </a:pPr>
             <a:r>
@@ -3238,12 +3503,13 @@
           <a:p>
             <a:pPr>
               <a:spcAft>
-                <a:spcPts val="1200"/>
+                <a:spcPts val="800"/>
               </a:spcAft>
-              <a:defRPr sz="2000">
+              <a:defRPr sz="1800">
                 <a:solidFill>
                   <a:srgbClr val="6C757D"/>
                 </a:solidFill>
+                <a:latin typeface="Segoe UI"/>
               </a:defRPr>
             </a:pPr>
             <a:r>
@@ -3253,12 +3519,13 @@
           <a:p>
             <a:pPr>
               <a:spcBef>
-                <a:spcPts val="2000"/>
+                <a:spcPts val="1600"/>
               </a:spcBef>
-              <a:defRPr sz="2400" b="1">
+              <a:defRPr sz="2200" b="1">
                 <a:solidFill>
                   <a:srgbClr val="212529"/>
                 </a:solidFill>
+                <a:latin typeface="Segoe UI"/>
               </a:defRPr>
             </a:pPr>
             <a:r>
@@ -3268,27 +3535,29 @@
           <a:p>
             <a:pPr>
               <a:spcAft>
-                <a:spcPts val="1200"/>
+                <a:spcPts val="800"/>
               </a:spcAft>
-              <a:defRPr sz="2000">
+              <a:defRPr sz="1800">
                 <a:solidFill>
                   <a:srgbClr val="6C757D"/>
                 </a:solidFill>
-              </a:defRPr>
-            </a:pPr>
-            <a:r>
-              <a:t>Unique in local-dev space (Garden is closest)</a:t>
+                <a:latin typeface="Segoe UI"/>
+              </a:defRPr>
+            </a:pPr>
+            <a:r>
+              <a:t>Unique in local-dev space</a:t>
             </a:r>
           </a:p>
           <a:p>
             <a:pPr>
               <a:spcBef>
-                <a:spcPts val="2000"/>
+                <a:spcPts val="1600"/>
               </a:spcBef>
-              <a:defRPr sz="2400" b="1">
+              <a:defRPr sz="2200" b="1">
                 <a:solidFill>
                   <a:srgbClr val="212529"/>
                 </a:solidFill>
+                <a:latin typeface="Segoe UI"/>
               </a:defRPr>
             </a:pPr>
             <a:r>
@@ -3298,12 +3567,13 @@
           <a:p>
             <a:pPr>
               <a:spcAft>
-                <a:spcPts val="1200"/>
+                <a:spcPts val="800"/>
               </a:spcAft>
-              <a:defRPr sz="2000">
+              <a:defRPr sz="1800">
                 <a:solidFill>
                   <a:srgbClr val="6C757D"/>
                 </a:solidFill>
+                <a:latin typeface="Segoe UI"/>
               </a:defRPr>
             </a:pPr>
             <a:r>
@@ -3313,12 +3583,13 @@
           <a:p>
             <a:pPr>
               <a:spcBef>
-                <a:spcPts val="2000"/>
+                <a:spcPts val="1600"/>
               </a:spcBef>
-              <a:defRPr sz="2400" b="1">
+              <a:defRPr sz="2200" b="1">
                 <a:solidFill>
                   <a:srgbClr val="212529"/>
                 </a:solidFill>
+                <a:latin typeface="Segoe UI"/>
               </a:defRPr>
             </a:pPr>
             <a:r>
@@ -3328,12 +3599,13 @@
           <a:p>
             <a:pPr>
               <a:spcAft>
-                <a:spcPts val="1200"/>
+                <a:spcPts val="800"/>
               </a:spcAft>
-              <a:defRPr sz="2000">
+              <a:defRPr sz="1800">
                 <a:solidFill>
                   <a:srgbClr val="6C757D"/>
                 </a:solidFill>
+                <a:latin typeface="Segoe UI"/>
               </a:defRPr>
             </a:pPr>
             <a:r>
@@ -3343,12 +3615,13 @@
           <a:p>
             <a:pPr>
               <a:spcBef>
-                <a:spcPts val="2000"/>
+                <a:spcPts val="1600"/>
               </a:spcBef>
-              <a:defRPr sz="2400" b="1">
+              <a:defRPr sz="2200" b="1">
                 <a:solidFill>
                   <a:srgbClr val="212529"/>
                 </a:solidFill>
+                <a:latin typeface="Segoe UI"/>
               </a:defRPr>
             </a:pPr>
             <a:r>
@@ -3358,12 +3631,13 @@
           <a:p>
             <a:pPr>
               <a:spcAft>
-                <a:spcPts val="1200"/>
+                <a:spcPts val="800"/>
               </a:spcAft>
-              <a:defRPr sz="2000">
+              <a:defRPr sz="1800">
                 <a:solidFill>
                   <a:srgbClr val="6C757D"/>
                 </a:solidFill>
+                <a:latin typeface="Segoe UI"/>
               </a:defRPr>
             </a:pPr>
             <a:r>
@@ -3373,31 +3647,33 @@
           <a:p>
             <a:pPr>
               <a:spcBef>
-                <a:spcPts val="2000"/>
+                <a:spcPts val="1600"/>
               </a:spcBef>
-              <a:defRPr sz="2400" b="1">
+              <a:defRPr sz="2200" b="1">
                 <a:solidFill>
                   <a:srgbClr val="212529"/>
                 </a:solidFill>
-              </a:defRPr>
-            </a:pPr>
-            <a:r>
-              <a:t>K8s-free</a:t>
+                <a:latin typeface="Segoe UI"/>
+              </a:defRPr>
+            </a:pPr>
+            <a:r>
+              <a:t>K8s-free abstraction</a:t>
             </a:r>
           </a:p>
           <a:p>
             <a:pPr>
               <a:spcAft>
-                <a:spcPts val="1200"/>
+                <a:spcPts val="800"/>
               </a:spcAft>
-              <a:defRPr sz="2000">
+              <a:defRPr sz="1800">
                 <a:solidFill>
                   <a:srgbClr val="6C757D"/>
                 </a:solidFill>
-              </a:defRPr>
-            </a:pPr>
-            <a:r>
-              <a:t>Only tool with complete abstraction from Kubernetes</a:t>
+                <a:latin typeface="Segoe UI"/>
+              </a:defRPr>
+            </a:pPr>
+            <a:r>
+              <a:t>Complete separation from Kubernetes complexity</a:t>
             </a:r>
           </a:p>
         </p:txBody>
@@ -3422,14 +3698,100 @@
       <p:grpSpPr/>
       <p:sp>
         <p:nvSpPr>
-          <p:cNvPr id="2" name="TextBox 1"/>
+          <p:cNvPr id="2" name="Rectangle 1"/>
+          <p:cNvSpPr/>
+          <p:nvPr/>
+        </p:nvSpPr>
+        <p:spPr>
+          <a:xfrm>
+            <a:off x="0" y="0"/>
+            <a:ext cx="12191695" cy="6858000"/>
+          </a:xfrm>
+          <a:prstGeom prst="rect">
+            <a:avLst/>
+          </a:prstGeom>
+          <a:solidFill>
+            <a:srgbClr val="FFFFFF"/>
+          </a:solidFill>
+          <a:ln>
+            <a:noFill/>
+          </a:ln>
+        </p:spPr>
+        <p:style>
+          <a:lnRef idx="1">
+            <a:schemeClr val="accent1"/>
+          </a:lnRef>
+          <a:fillRef idx="3">
+            <a:schemeClr val="accent1"/>
+          </a:fillRef>
+          <a:effectRef idx="2">
+            <a:schemeClr val="accent1"/>
+          </a:effectRef>
+          <a:fontRef idx="minor">
+            <a:schemeClr val="lt1"/>
+          </a:fontRef>
+        </p:style>
+        <p:txBody>
+          <a:bodyPr rtlCol="0" anchor="ctr"/>
+          <a:lstStyle/>
+          <a:p>
+            <a:pPr algn="ctr"/>
+          </a:p>
+        </p:txBody>
+      </p:sp>
+      <p:sp>
+        <p:nvSpPr>
+          <p:cNvPr id="3" name="Rectangle 2"/>
+          <p:cNvSpPr/>
+          <p:nvPr/>
+        </p:nvSpPr>
+        <p:spPr>
+          <a:xfrm>
+            <a:off x="0" y="0"/>
+            <a:ext cx="137160" cy="6858000"/>
+          </a:xfrm>
+          <a:prstGeom prst="rect">
+            <a:avLst/>
+          </a:prstGeom>
+          <a:solidFill>
+            <a:srgbClr val="7C4DFF"/>
+          </a:solidFill>
+          <a:ln>
+            <a:noFill/>
+          </a:ln>
+        </p:spPr>
+        <p:style>
+          <a:lnRef idx="1">
+            <a:schemeClr val="accent1"/>
+          </a:lnRef>
+          <a:fillRef idx="3">
+            <a:schemeClr val="accent1"/>
+          </a:fillRef>
+          <a:effectRef idx="2">
+            <a:schemeClr val="accent1"/>
+          </a:effectRef>
+          <a:fontRef idx="minor">
+            <a:schemeClr val="lt1"/>
+          </a:fontRef>
+        </p:style>
+        <p:txBody>
+          <a:bodyPr rtlCol="0" anchor="ctr"/>
+          <a:lstStyle/>
+          <a:p>
+            <a:pPr algn="ctr"/>
+          </a:p>
+        </p:txBody>
+      </p:sp>
+      <p:sp>
+        <p:nvSpPr>
+          <p:cNvPr id="4" name="TextBox 3"/>
           <p:cNvSpPr txBox="1"/>
           <p:nvPr/>
         </p:nvSpPr>
         <p:spPr>
           <a:xfrm>
-            <a:off x="457200" y="274320"/>
-            <a:ext cx="11277295" cy="914400"/>
+            <a:off x="731520" y="365760"/>
+            <a:ext cx="10728655" cy="914400"/>
           </a:xfrm>
           <a:prstGeom prst="rect">
             <a:avLst/>
@@ -3445,8 +3807,9 @@
             <a:pPr>
               <a:defRPr sz="4000" b="1">
                 <a:solidFill>
-                  <a:srgbClr val="6F42C1"/>
-                </a:solidFill>
+                  <a:srgbClr val="7C4DFF"/>
+                </a:solidFill>
+                <a:latin typeface="Segoe UI"/>
               </a:defRPr>
             </a:pPr>
             <a:r>
@@ -3457,14 +3820,57 @@
       </p:sp>
       <p:sp>
         <p:nvSpPr>
-          <p:cNvPr id="3" name="TextBox 2"/>
+          <p:cNvPr id="5" name="Rectangle 4"/>
+          <p:cNvSpPr/>
+          <p:nvPr/>
+        </p:nvSpPr>
+        <p:spPr>
+          <a:xfrm>
+            <a:off x="731520" y="1188720"/>
+            <a:ext cx="1371600" cy="45720"/>
+          </a:xfrm>
+          <a:prstGeom prst="rect">
+            <a:avLst/>
+          </a:prstGeom>
+          <a:solidFill>
+            <a:srgbClr val="7C4DFF"/>
+          </a:solidFill>
+          <a:ln>
+            <a:noFill/>
+          </a:ln>
+        </p:spPr>
+        <p:style>
+          <a:lnRef idx="1">
+            <a:schemeClr val="accent1"/>
+          </a:lnRef>
+          <a:fillRef idx="3">
+            <a:schemeClr val="accent1"/>
+          </a:fillRef>
+          <a:effectRef idx="2">
+            <a:schemeClr val="accent1"/>
+          </a:effectRef>
+          <a:fontRef idx="minor">
+            <a:schemeClr val="lt1"/>
+          </a:fontRef>
+        </p:style>
+        <p:txBody>
+          <a:bodyPr rtlCol="0" anchor="ctr"/>
+          <a:lstStyle/>
+          <a:p>
+            <a:pPr algn="ctr"/>
+          </a:p>
+        </p:txBody>
+      </p:sp>
+      <p:sp>
+        <p:nvSpPr>
+          <p:cNvPr id="6" name="TextBox 5"/>
           <p:cNvSpPr txBox="1"/>
           <p:nvPr/>
         </p:nvSpPr>
         <p:spPr>
           <a:xfrm>
-            <a:off x="457200" y="1280160"/>
-            <a:ext cx="11277295" cy="5029200"/>
+            <a:off x="731520" y="1463040"/>
+            <a:ext cx="10728655" cy="5029200"/>
           </a:xfrm>
           <a:prstGeom prst="rect">
             <a:avLst/>
@@ -3481,14 +3887,15 @@
               <a:spcBef>
                 <a:spcPts val="1200"/>
               </a:spcBef>
-              <a:defRPr sz="2400">
+              <a:defRPr sz="2200">
                 <a:solidFill>
                   <a:srgbClr val="212529"/>
                 </a:solidFill>
-              </a:defRPr>
-            </a:pPr>
-            <a:r>
-              <a:t>• Your real competition isn't other tools — it's:</a:t>
+                <a:latin typeface="Segoe UI"/>
+              </a:defRPr>
+            </a:pPr>
+            <a:r>
+              <a:t>  Your real competition isn't other tools—it's:</a:t>
             </a:r>
           </a:p>
           <a:p>
@@ -3496,14 +3903,15 @@
               <a:spcBef>
                 <a:spcPts val="1200"/>
               </a:spcBef>
-              <a:defRPr sz="2400">
+              <a:defRPr sz="2200">
                 <a:solidFill>
                   <a:srgbClr val="212529"/>
                 </a:solidFill>
-              </a:defRPr>
-            </a:pPr>
-            <a:r>
-              <a:t>• • 'Works on my machine' chaos</a:t>
+                <a:latin typeface="Segoe UI"/>
+              </a:defRPr>
+            </a:pPr>
+            <a:r>
+              <a:t>     • 'Works on my machine' chaos</a:t>
             </a:r>
           </a:p>
           <a:p>
@@ -3511,14 +3919,15 @@
               <a:spcBef>
                 <a:spcPts val="1200"/>
               </a:spcBef>
-              <a:defRPr sz="2400">
+              <a:defRPr sz="2200">
                 <a:solidFill>
                   <a:srgbClr val="212529"/>
                 </a:solidFill>
-              </a:defRPr>
-            </a:pPr>
-            <a:r>
-              <a:t>• • Teams giving up and using cloud dev environments ($$$)</a:t>
+                <a:latin typeface="Segoe UI"/>
+              </a:defRPr>
+            </a:pPr>
+            <a:r>
+              <a:t>     • Teams giving up and using cloud dev environments ($$$)</a:t>
             </a:r>
           </a:p>
           <a:p>
@@ -3526,14 +3935,15 @@
               <a:spcBef>
                 <a:spcPts val="1200"/>
               </a:spcBef>
-              <a:defRPr sz="2400">
+              <a:defRPr sz="2200">
                 <a:solidFill>
                   <a:srgbClr val="212529"/>
                 </a:solidFill>
-              </a:defRPr>
-            </a:pPr>
-            <a:r>
-              <a:t>• • Manual Docker Compose maintenance hell</a:t>
+                <a:latin typeface="Segoe UI"/>
+              </a:defRPr>
+            </a:pPr>
+            <a:r>
+              <a:t>     • Manual Docker Compose maintenance hell</a:t>
             </a:r>
           </a:p>
           <a:p>
@@ -3541,14 +3951,79 @@
               <a:spcBef>
                 <a:spcPts val="1200"/>
               </a:spcBef>
-              <a:defRPr sz="2400">
+              <a:defRPr sz="2200">
                 <a:solidFill>
                   <a:srgbClr val="212529"/>
                 </a:solidFill>
-              </a:defRPr>
-            </a:pPr>
-            <a:r>
-              <a:t>• </a:t>
+                <a:latin typeface="Segoe UI"/>
+              </a:defRPr>
+            </a:pPr>
+            <a:r>
+              <a:t>  </a:t>
+            </a:r>
+          </a:p>
+          <a:p>
+            <a:pPr>
+              <a:spcBef>
+                <a:spcPts val="1600"/>
+              </a:spcBef>
+              <a:defRPr sz="2200" b="1">
+                <a:solidFill>
+                  <a:srgbClr val="212529"/>
+                </a:solidFill>
+                <a:latin typeface="Segoe UI"/>
+              </a:defRPr>
+            </a:pPr>
+            <a:r>
+              <a:t>Closest Competitor:</a:t>
+            </a:r>
+          </a:p>
+          <a:p>
+            <a:pPr>
+              <a:spcAft>
+                <a:spcPts val="800"/>
+              </a:spcAft>
+              <a:defRPr sz="1800">
+                <a:solidFill>
+                  <a:srgbClr val="6C757D"/>
+                </a:solidFill>
+                <a:latin typeface="Segoe UI"/>
+              </a:defRPr>
+            </a:pPr>
+            <a:r>
+              <a:t>Garden (manifest-driven approach)</a:t>
+            </a:r>
+          </a:p>
+          <a:p>
+            <a:pPr>
+              <a:spcBef>
+                <a:spcPts val="1600"/>
+              </a:spcBef>
+              <a:defRPr sz="2200" b="1">
+                <a:solidFill>
+                  <a:srgbClr val="212529"/>
+                </a:solidFill>
+                <a:latin typeface="Segoe UI"/>
+              </a:defRPr>
+            </a:pPr>
+            <a:r>
+              <a:t>Everyone else:</a:t>
+            </a:r>
+          </a:p>
+          <a:p>
+            <a:pPr>
+              <a:spcAft>
+                <a:spcPts val="800"/>
+              </a:spcAft>
+              <a:defRPr sz="1800">
+                <a:solidFill>
+                  <a:srgbClr val="6C757D"/>
+                </a:solidFill>
+                <a:latin typeface="Segoe UI"/>
+              </a:defRPr>
+            </a:pPr>
+            <a:r>
+              <a:t>Requires K8s (Skaffold, DevSpace) or pivoted to AI (Okteto, Gitpod)</a:t>
             </a:r>
           </a:p>
           <a:p>
@@ -3556,74 +4031,47 @@
               <a:spcBef>
                 <a:spcPts val="1200"/>
               </a:spcBef>
-              <a:defRPr sz="2400">
+              <a:defRPr sz="2200">
                 <a:solidFill>
                   <a:srgbClr val="212529"/>
                 </a:solidFill>
-              </a:defRPr>
-            </a:pPr>
-            <a:r>
-              <a:t>• Garden is your closest competitor.</a:t>
+                <a:latin typeface="Segoe UI"/>
+              </a:defRPr>
+            </a:pPr>
+            <a:r>
+              <a:t>  </a:t>
             </a:r>
           </a:p>
           <a:p>
             <a:pPr>
               <a:spcBef>
-                <a:spcPts val="1200"/>
+                <a:spcPts val="1600"/>
               </a:spcBef>
-              <a:defRPr sz="2400">
+              <a:defRPr sz="2200" b="1">
                 <a:solidFill>
                   <a:srgbClr val="212529"/>
                 </a:solidFill>
-              </a:defRPr>
-            </a:pPr>
-            <a:r>
-              <a:t>• Everyone else either requires K8s (Skaffold, DevSpace)</a:t>
-            </a:r>
-          </a:p>
-          <a:p>
-            <a:pPr>
-              <a:spcBef>
-                <a:spcPts val="1200"/>
-              </a:spcBef>
-              <a:defRPr sz="2400">
-                <a:solidFill>
-                  <a:srgbClr val="212529"/>
-                </a:solidFill>
-              </a:defRPr>
-            </a:pPr>
-            <a:r>
-              <a:t>• or moved to AI agents (Okteto, Gitpod).</a:t>
-            </a:r>
-          </a:p>
-          <a:p>
-            <a:pPr>
-              <a:spcBef>
-                <a:spcPts val="1200"/>
-              </a:spcBef>
-              <a:defRPr sz="2400">
-                <a:solidFill>
-                  <a:srgbClr val="212529"/>
-                </a:solidFill>
-              </a:defRPr>
-            </a:pPr>
-            <a:r>
-              <a:t>• </a:t>
-            </a:r>
-          </a:p>
-          <a:p>
-            <a:pPr>
-              <a:spcBef>
-                <a:spcPts val="1200"/>
-              </a:spcBef>
-              <a:defRPr sz="2400">
-                <a:solidFill>
-                  <a:srgbClr val="212529"/>
-                </a:solidFill>
-              </a:defRPr>
-            </a:pPr>
-            <a:r>
-              <a:t>• TDK wins on: Simplicity, Speed of onboarding, Zero K8s tax</a:t>
+                <a:latin typeface="Segoe UI"/>
+              </a:defRPr>
+            </a:pPr>
+            <a:r>
+              <a:t>TDK wins on:</a:t>
+            </a:r>
+          </a:p>
+          <a:p>
+            <a:pPr>
+              <a:spcAft>
+                <a:spcPts val="800"/>
+              </a:spcAft>
+              <a:defRPr sz="1800">
+                <a:solidFill>
+                  <a:srgbClr val="6C757D"/>
+                </a:solidFill>
+                <a:latin typeface="Segoe UI"/>
+              </a:defRPr>
+            </a:pPr>
+            <a:r>
+              <a:t>Simplicity | Speed of onboarding | Zero K8s tax</a:t>
             </a:r>
           </a:p>
         </p:txBody>
@@ -3648,14 +4096,100 @@
       <p:grpSpPr/>
       <p:sp>
         <p:nvSpPr>
-          <p:cNvPr id="2" name="TextBox 1"/>
+          <p:cNvPr id="2" name="Rectangle 1"/>
+          <p:cNvSpPr/>
+          <p:nvPr/>
+        </p:nvSpPr>
+        <p:spPr>
+          <a:xfrm>
+            <a:off x="0" y="0"/>
+            <a:ext cx="12191695" cy="6858000"/>
+          </a:xfrm>
+          <a:prstGeom prst="rect">
+            <a:avLst/>
+          </a:prstGeom>
+          <a:solidFill>
+            <a:srgbClr val="F8F9FA"/>
+          </a:solidFill>
+          <a:ln>
+            <a:noFill/>
+          </a:ln>
+        </p:spPr>
+        <p:style>
+          <a:lnRef idx="1">
+            <a:schemeClr val="accent1"/>
+          </a:lnRef>
+          <a:fillRef idx="3">
+            <a:schemeClr val="accent1"/>
+          </a:fillRef>
+          <a:effectRef idx="2">
+            <a:schemeClr val="accent1"/>
+          </a:effectRef>
+          <a:fontRef idx="minor">
+            <a:schemeClr val="lt1"/>
+          </a:fontRef>
+        </p:style>
+        <p:txBody>
+          <a:bodyPr rtlCol="0" anchor="ctr"/>
+          <a:lstStyle/>
+          <a:p>
+            <a:pPr algn="ctr"/>
+          </a:p>
+        </p:txBody>
+      </p:sp>
+      <p:sp>
+        <p:nvSpPr>
+          <p:cNvPr id="3" name="Rectangle 2"/>
+          <p:cNvSpPr/>
+          <p:nvPr/>
+        </p:nvSpPr>
+        <p:spPr>
+          <a:xfrm>
+            <a:off x="0" y="0"/>
+            <a:ext cx="12191695" cy="137160"/>
+          </a:xfrm>
+          <a:prstGeom prst="rect">
+            <a:avLst/>
+          </a:prstGeom>
+          <a:solidFill>
+            <a:srgbClr val="7C4DFF"/>
+          </a:solidFill>
+          <a:ln>
+            <a:noFill/>
+          </a:ln>
+        </p:spPr>
+        <p:style>
+          <a:lnRef idx="1">
+            <a:schemeClr val="accent1"/>
+          </a:lnRef>
+          <a:fillRef idx="3">
+            <a:schemeClr val="accent1"/>
+          </a:fillRef>
+          <a:effectRef idx="2">
+            <a:schemeClr val="accent1"/>
+          </a:effectRef>
+          <a:fontRef idx="minor">
+            <a:schemeClr val="lt1"/>
+          </a:fontRef>
+        </p:style>
+        <p:txBody>
+          <a:bodyPr rtlCol="0" anchor="ctr"/>
+          <a:lstStyle/>
+          <a:p>
+            <a:pPr algn="ctr"/>
+          </a:p>
+        </p:txBody>
+      </p:sp>
+      <p:sp>
+        <p:nvSpPr>
+          <p:cNvPr id="4" name="TextBox 3"/>
           <p:cNvSpPr txBox="1"/>
           <p:nvPr/>
         </p:nvSpPr>
         <p:spPr>
           <a:xfrm>
-            <a:off x="457200" y="1828800"/>
-            <a:ext cx="11277295" cy="1371600"/>
+            <a:off x="731520" y="2011680"/>
+            <a:ext cx="10728655" cy="1097280"/>
           </a:xfrm>
           <a:prstGeom prst="rect">
             <a:avLst/>
@@ -3669,27 +4203,75 @@
           <a:lstStyle/>
           <a:p>
             <a:pPr algn="ctr">
-              <a:defRPr sz="5400" b="1">
+              <a:defRPr sz="5600" b="1">
                 <a:solidFill>
                   <a:srgbClr val="212529"/>
                 </a:solidFill>
-              </a:defRPr>
-            </a:pPr>
-            <a:r>
-              <a:t>TDK CLI: Kubernetes-Free Microservice Development</a:t>
+                <a:latin typeface="Segoe UI"/>
+              </a:defRPr>
+            </a:pPr>
+            <a:r>
+              <a:t>TDK CLI</a:t>
             </a:r>
           </a:p>
           <a:p>
             <a:pPr algn="ctr">
+              <a:spcBef>
+                <a:spcPts val="2000"/>
+              </a:spcBef>
               <a:defRPr sz="2800">
                 <a:solidFill>
                   <a:srgbClr val="6C757D"/>
                 </a:solidFill>
-              </a:defRPr>
-            </a:pPr>
-            <a:r>
-              <a:t>For the 70% of developers who just want to write code, not learn K8s</a:t>
-            </a:r>
+                <a:latin typeface="Segoe UI"/>
+              </a:defRPr>
+            </a:pPr>
+            <a:r>
+              <a:t>Kubernetes-Free Microservice Development</a:t>
+            </a:r>
+          </a:p>
+        </p:txBody>
+      </p:sp>
+      <p:sp>
+        <p:nvSpPr>
+          <p:cNvPr id="5" name="Oval 4"/>
+          <p:cNvSpPr/>
+          <p:nvPr/>
+        </p:nvSpPr>
+        <p:spPr>
+          <a:xfrm>
+            <a:off x="10058400" y="5029200"/>
+            <a:ext cx="1371600" cy="1371600"/>
+          </a:xfrm>
+          <a:prstGeom prst="ellipse">
+            <a:avLst/>
+          </a:prstGeom>
+          <a:solidFill>
+            <a:srgbClr val="7C4DFF"/>
+          </a:solidFill>
+          <a:ln>
+            <a:noFill/>
+          </a:ln>
+        </p:spPr>
+        <p:style>
+          <a:lnRef idx="1">
+            <a:schemeClr val="accent1"/>
+          </a:lnRef>
+          <a:fillRef idx="3">
+            <a:schemeClr val="accent1"/>
+          </a:fillRef>
+          <a:effectRef idx="2">
+            <a:schemeClr val="accent1"/>
+          </a:effectRef>
+          <a:fontRef idx="minor">
+            <a:schemeClr val="lt1"/>
+          </a:fontRef>
+        </p:style>
+        <p:txBody>
+          <a:bodyPr rtlCol="0" anchor="ctr"/>
+          <a:lstStyle/>
+          <a:p>
+            <a:pPr algn="ctr"/>
           </a:p>
         </p:txBody>
       </p:sp>
@@ -3713,14 +4295,100 @@
       <p:grpSpPr/>
       <p:sp>
         <p:nvSpPr>
-          <p:cNvPr id="2" name="TextBox 1"/>
+          <p:cNvPr id="2" name="Rectangle 1"/>
+          <p:cNvSpPr/>
+          <p:nvPr/>
+        </p:nvSpPr>
+        <p:spPr>
+          <a:xfrm>
+            <a:off x="0" y="0"/>
+            <a:ext cx="12191695" cy="6858000"/>
+          </a:xfrm>
+          <a:prstGeom prst="rect">
+            <a:avLst/>
+          </a:prstGeom>
+          <a:solidFill>
+            <a:srgbClr val="FFFFFF"/>
+          </a:solidFill>
+          <a:ln>
+            <a:noFill/>
+          </a:ln>
+        </p:spPr>
+        <p:style>
+          <a:lnRef idx="1">
+            <a:schemeClr val="accent1"/>
+          </a:lnRef>
+          <a:fillRef idx="3">
+            <a:schemeClr val="accent1"/>
+          </a:fillRef>
+          <a:effectRef idx="2">
+            <a:schemeClr val="accent1"/>
+          </a:effectRef>
+          <a:fontRef idx="minor">
+            <a:schemeClr val="lt1"/>
+          </a:fontRef>
+        </p:style>
+        <p:txBody>
+          <a:bodyPr rtlCol="0" anchor="ctr"/>
+          <a:lstStyle/>
+          <a:p>
+            <a:pPr algn="ctr"/>
+          </a:p>
+        </p:txBody>
+      </p:sp>
+      <p:sp>
+        <p:nvSpPr>
+          <p:cNvPr id="3" name="Rectangle 2"/>
+          <p:cNvSpPr/>
+          <p:nvPr/>
+        </p:nvSpPr>
+        <p:spPr>
+          <a:xfrm>
+            <a:off x="0" y="0"/>
+            <a:ext cx="137160" cy="6858000"/>
+          </a:xfrm>
+          <a:prstGeom prst="rect">
+            <a:avLst/>
+          </a:prstGeom>
+          <a:solidFill>
+            <a:srgbClr val="7C4DFF"/>
+          </a:solidFill>
+          <a:ln>
+            <a:noFill/>
+          </a:ln>
+        </p:spPr>
+        <p:style>
+          <a:lnRef idx="1">
+            <a:schemeClr val="accent1"/>
+          </a:lnRef>
+          <a:fillRef idx="3">
+            <a:schemeClr val="accent1"/>
+          </a:fillRef>
+          <a:effectRef idx="2">
+            <a:schemeClr val="accent1"/>
+          </a:effectRef>
+          <a:fontRef idx="minor">
+            <a:schemeClr val="lt1"/>
+          </a:fontRef>
+        </p:style>
+        <p:txBody>
+          <a:bodyPr rtlCol="0" anchor="ctr"/>
+          <a:lstStyle/>
+          <a:p>
+            <a:pPr algn="ctr"/>
+          </a:p>
+        </p:txBody>
+      </p:sp>
+      <p:sp>
+        <p:nvSpPr>
+          <p:cNvPr id="4" name="TextBox 3"/>
           <p:cNvSpPr txBox="1"/>
           <p:nvPr/>
         </p:nvSpPr>
         <p:spPr>
           <a:xfrm>
-            <a:off x="457200" y="274320"/>
-            <a:ext cx="11277295" cy="914400"/>
+            <a:off x="731520" y="365760"/>
+            <a:ext cx="10728655" cy="914400"/>
           </a:xfrm>
           <a:prstGeom prst="rect">
             <a:avLst/>
@@ -3736,26 +4404,70 @@
             <a:pPr>
               <a:defRPr sz="4000" b="1">
                 <a:solidFill>
-                  <a:srgbClr val="DC3545"/>
-                </a:solidFill>
-              </a:defRPr>
-            </a:pPr>
-            <a:r>
-              <a:t>The Problem: The 'Kubernetes Tax'</a:t>
-            </a:r>
-          </a:p>
-        </p:txBody>
-      </p:sp>
-      <p:sp>
-        <p:nvSpPr>
-          <p:cNvPr id="3" name="TextBox 2"/>
+                  <a:srgbClr val="7C4DFF"/>
+                </a:solidFill>
+                <a:latin typeface="Segoe UI"/>
+              </a:defRPr>
+            </a:pPr>
+            <a:r>
+              <a:t>The Problem: The Kubernetes Tax</a:t>
+            </a:r>
+          </a:p>
+        </p:txBody>
+      </p:sp>
+      <p:sp>
+        <p:nvSpPr>
+          <p:cNvPr id="5" name="Rectangle 4"/>
+          <p:cNvSpPr/>
+          <p:nvPr/>
+        </p:nvSpPr>
+        <p:spPr>
+          <a:xfrm>
+            <a:off x="731520" y="1188720"/>
+            <a:ext cx="1371600" cy="45720"/>
+          </a:xfrm>
+          <a:prstGeom prst="rect">
+            <a:avLst/>
+          </a:prstGeom>
+          <a:solidFill>
+            <a:srgbClr val="7C4DFF"/>
+          </a:solidFill>
+          <a:ln>
+            <a:noFill/>
+          </a:ln>
+        </p:spPr>
+        <p:style>
+          <a:lnRef idx="1">
+            <a:schemeClr val="accent1"/>
+          </a:lnRef>
+          <a:fillRef idx="3">
+            <a:schemeClr val="accent1"/>
+          </a:fillRef>
+          <a:effectRef idx="2">
+            <a:schemeClr val="accent1"/>
+          </a:effectRef>
+          <a:fontRef idx="minor">
+            <a:schemeClr val="lt1"/>
+          </a:fontRef>
+        </p:style>
+        <p:txBody>
+          <a:bodyPr rtlCol="0" anchor="ctr"/>
+          <a:lstStyle/>
+          <a:p>
+            <a:pPr algn="ctr"/>
+          </a:p>
+        </p:txBody>
+      </p:sp>
+      <p:sp>
+        <p:nvSpPr>
+          <p:cNvPr id="6" name="TextBox 5"/>
           <p:cNvSpPr txBox="1"/>
           <p:nvPr/>
         </p:nvSpPr>
         <p:spPr>
           <a:xfrm>
-            <a:off x="457200" y="1280160"/>
-            <a:ext cx="11277295" cy="5029200"/>
+            <a:off x="731520" y="1463040"/>
+            <a:ext cx="10728655" cy="5029200"/>
           </a:xfrm>
           <a:prstGeom prst="rect">
             <a:avLst/>
@@ -3772,14 +4484,15 @@
               <a:spcBef>
                 <a:spcPts val="1200"/>
               </a:spcBef>
-              <a:defRPr sz="2400">
+              <a:defRPr sz="2200">
                 <a:solidFill>
                   <a:srgbClr val="212529"/>
                 </a:solidFill>
-              </a:defRPr>
-            </a:pPr>
-            <a:r>
-              <a:t>• 70% of developers don't understand Kubernetes</a:t>
+                <a:latin typeface="Segoe UI"/>
+              </a:defRPr>
+            </a:pPr>
+            <a:r>
+              <a:t>  70% of developers don't understand Kubernetes</a:t>
             </a:r>
           </a:p>
           <a:p>
@@ -3787,74 +4500,143 @@
               <a:spcBef>
                 <a:spcPts val="1200"/>
               </a:spcBef>
-              <a:defRPr sz="2400">
+              <a:defRPr sz="2200">
                 <a:solidFill>
                   <a:srgbClr val="212529"/>
                 </a:solidFill>
-              </a:defRPr>
-            </a:pPr>
-            <a:r>
-              <a:t>• But every microservice tool forces them to learn it</a:t>
+                <a:latin typeface="Segoe UI"/>
+              </a:defRPr>
+            </a:pPr>
+            <a:r>
+              <a:t>  Yet every microservice tool forces them to learn it</a:t>
             </a:r>
           </a:p>
           <a:p>
             <a:pPr>
               <a:spcBef>
-                <a:spcPts val="1200"/>
+                <a:spcPts val="1600"/>
               </a:spcBef>
-              <a:defRPr sz="2400">
+              <a:defRPr sz="2200" b="1">
                 <a:solidFill>
                   <a:srgbClr val="212529"/>
                 </a:solidFill>
-              </a:defRPr>
-            </a:pPr>
-            <a:r>
-              <a:t>• Garden: 'production-like environments' = K8s complexity</a:t>
+                <a:latin typeface="Segoe UI"/>
+              </a:defRPr>
+            </a:pPr>
+            <a:r>
+              <a:t>Garden:</a:t>
+            </a:r>
+          </a:p>
+          <a:p>
+            <a:pPr>
+              <a:spcAft>
+                <a:spcPts val="800"/>
+              </a:spcAft>
+              <a:defRPr sz="1800">
+                <a:solidFill>
+                  <a:srgbClr val="6C757D"/>
+                </a:solidFill>
+                <a:latin typeface="Segoe UI"/>
+              </a:defRPr>
+            </a:pPr>
+            <a:r>
+              <a:t>'Production-like environments' = hidden K8s complexity</a:t>
             </a:r>
           </a:p>
           <a:p>
             <a:pPr>
               <a:spcBef>
-                <a:spcPts val="1200"/>
+                <a:spcPts val="1600"/>
               </a:spcBef>
-              <a:defRPr sz="2400">
+              <a:defRPr sz="2200" b="1">
                 <a:solidFill>
                   <a:srgbClr val="212529"/>
                 </a:solidFill>
-              </a:defRPr>
-            </a:pPr>
-            <a:r>
-              <a:t>• Skaffold: Requires K8s cluster knowledge</a:t>
+                <a:latin typeface="Segoe UI"/>
+              </a:defRPr>
+            </a:pPr>
+            <a:r>
+              <a:t>Skaffold:</a:t>
+            </a:r>
+          </a:p>
+          <a:p>
+            <a:pPr>
+              <a:spcAft>
+                <a:spcPts val="800"/>
+              </a:spcAft>
+              <a:defRPr sz="1800">
+                <a:solidFill>
+                  <a:srgbClr val="6C757D"/>
+                </a:solidFill>
+                <a:latin typeface="Segoe UI"/>
+              </a:defRPr>
+            </a:pPr>
+            <a:r>
+              <a:t>Requires K8s cluster knowledge</a:t>
             </a:r>
           </a:p>
           <a:p>
             <a:pPr>
               <a:spcBef>
-                <a:spcPts val="1200"/>
+                <a:spcPts val="1600"/>
               </a:spcBef>
-              <a:defRPr sz="2400">
+              <a:defRPr sz="2200" b="1">
                 <a:solidFill>
                   <a:srgbClr val="212529"/>
                 </a:solidFill>
-              </a:defRPr>
-            </a:pPr>
-            <a:r>
-              <a:t>• DevSpace: Built for K8s experts</a:t>
+                <a:latin typeface="Segoe UI"/>
+              </a:defRPr>
+            </a:pPr>
+            <a:r>
+              <a:t>DevSpace:</a:t>
+            </a:r>
+          </a:p>
+          <a:p>
+            <a:pPr>
+              <a:spcAft>
+                <a:spcPts val="800"/>
+              </a:spcAft>
+              <a:defRPr sz="1800">
+                <a:solidFill>
+                  <a:srgbClr val="6C757D"/>
+                </a:solidFill>
+                <a:latin typeface="Segoe UI"/>
+              </a:defRPr>
+            </a:pPr>
+            <a:r>
+              <a:t>Built for K8s experts</a:t>
             </a:r>
           </a:p>
           <a:p>
             <a:pPr>
               <a:spcBef>
-                <a:spcPts val="1200"/>
+                <a:spcPts val="1600"/>
               </a:spcBef>
-              <a:defRPr sz="2400">
+              <a:defRPr sz="2200" b="1">
                 <a:solidFill>
                   <a:srgbClr val="212529"/>
                 </a:solidFill>
-              </a:defRPr>
-            </a:pPr>
-            <a:r>
-              <a:t>• Result: Non-platform developers get blocked</a:t>
+                <a:latin typeface="Segoe UI"/>
+              </a:defRPr>
+            </a:pPr>
+            <a:r>
+              <a:t>Result:</a:t>
+            </a:r>
+          </a:p>
+          <a:p>
+            <a:pPr>
+              <a:spcAft>
+                <a:spcPts val="800"/>
+              </a:spcAft>
+              <a:defRPr sz="1800">
+                <a:solidFill>
+                  <a:srgbClr val="6C757D"/>
+                </a:solidFill>
+                <a:latin typeface="Segoe UI"/>
+              </a:defRPr>
+            </a:pPr>
+            <a:r>
+              <a:t>Non-platform developers get blocked</a:t>
             </a:r>
           </a:p>
         </p:txBody>
@@ -3879,14 +4661,100 @@
       <p:grpSpPr/>
       <p:sp>
         <p:nvSpPr>
-          <p:cNvPr id="2" name="TextBox 1"/>
+          <p:cNvPr id="2" name="Rectangle 1"/>
+          <p:cNvSpPr/>
+          <p:nvPr/>
+        </p:nvSpPr>
+        <p:spPr>
+          <a:xfrm>
+            <a:off x="0" y="0"/>
+            <a:ext cx="12191695" cy="6858000"/>
+          </a:xfrm>
+          <a:prstGeom prst="rect">
+            <a:avLst/>
+          </a:prstGeom>
+          <a:solidFill>
+            <a:srgbClr val="FFFFFF"/>
+          </a:solidFill>
+          <a:ln>
+            <a:noFill/>
+          </a:ln>
+        </p:spPr>
+        <p:style>
+          <a:lnRef idx="1">
+            <a:schemeClr val="accent1"/>
+          </a:lnRef>
+          <a:fillRef idx="3">
+            <a:schemeClr val="accent1"/>
+          </a:fillRef>
+          <a:effectRef idx="2">
+            <a:schemeClr val="accent1"/>
+          </a:effectRef>
+          <a:fontRef idx="minor">
+            <a:schemeClr val="lt1"/>
+          </a:fontRef>
+        </p:style>
+        <p:txBody>
+          <a:bodyPr rtlCol="0" anchor="ctr"/>
+          <a:lstStyle/>
+          <a:p>
+            <a:pPr algn="ctr"/>
+          </a:p>
+        </p:txBody>
+      </p:sp>
+      <p:sp>
+        <p:nvSpPr>
+          <p:cNvPr id="3" name="Rectangle 2"/>
+          <p:cNvSpPr/>
+          <p:nvPr/>
+        </p:nvSpPr>
+        <p:spPr>
+          <a:xfrm>
+            <a:off x="0" y="0"/>
+            <a:ext cx="137160" cy="6858000"/>
+          </a:xfrm>
+          <a:prstGeom prst="rect">
+            <a:avLst/>
+          </a:prstGeom>
+          <a:solidFill>
+            <a:srgbClr val="7C4DFF"/>
+          </a:solidFill>
+          <a:ln>
+            <a:noFill/>
+          </a:ln>
+        </p:spPr>
+        <p:style>
+          <a:lnRef idx="1">
+            <a:schemeClr val="accent1"/>
+          </a:lnRef>
+          <a:fillRef idx="3">
+            <a:schemeClr val="accent1"/>
+          </a:fillRef>
+          <a:effectRef idx="2">
+            <a:schemeClr val="accent1"/>
+          </a:effectRef>
+          <a:fontRef idx="minor">
+            <a:schemeClr val="lt1"/>
+          </a:fontRef>
+        </p:style>
+        <p:txBody>
+          <a:bodyPr rtlCol="0" anchor="ctr"/>
+          <a:lstStyle/>
+          <a:p>
+            <a:pPr algn="ctr"/>
+          </a:p>
+        </p:txBody>
+      </p:sp>
+      <p:sp>
+        <p:nvSpPr>
+          <p:cNvPr id="4" name="TextBox 3"/>
           <p:cNvSpPr txBox="1"/>
           <p:nvPr/>
         </p:nvSpPr>
         <p:spPr>
           <a:xfrm>
-            <a:off x="457200" y="274320"/>
-            <a:ext cx="11277295" cy="914400"/>
+            <a:off x="731520" y="365760"/>
+            <a:ext cx="10728655" cy="914400"/>
           </a:xfrm>
           <a:prstGeom prst="rect">
             <a:avLst/>
@@ -3902,26 +4770,70 @@
             <a:pPr>
               <a:defRPr sz="4000" b="1">
                 <a:solidFill>
-                  <a:srgbClr val="FFC107"/>
-                </a:solidFill>
-              </a:defRPr>
-            </a:pPr>
-            <a:r>
-              <a:t>What Developers Hear vs. What They Feel</a:t>
-            </a:r>
-          </a:p>
-        </p:txBody>
-      </p:sp>
-      <p:sp>
-        <p:nvSpPr>
-          <p:cNvPr id="3" name="TextBox 2"/>
+                  <a:srgbClr val="7C4DFF"/>
+                </a:solidFill>
+                <a:latin typeface="Segoe UI"/>
+              </a:defRPr>
+            </a:pPr>
+            <a:r>
+              <a:t>What Developers Actually Hear</a:t>
+            </a:r>
+          </a:p>
+        </p:txBody>
+      </p:sp>
+      <p:sp>
+        <p:nvSpPr>
+          <p:cNvPr id="5" name="Rectangle 4"/>
+          <p:cNvSpPr/>
+          <p:nvPr/>
+        </p:nvSpPr>
+        <p:spPr>
+          <a:xfrm>
+            <a:off x="731520" y="1188720"/>
+            <a:ext cx="1371600" cy="45720"/>
+          </a:xfrm>
+          <a:prstGeom prst="rect">
+            <a:avLst/>
+          </a:prstGeom>
+          <a:solidFill>
+            <a:srgbClr val="7C4DFF"/>
+          </a:solidFill>
+          <a:ln>
+            <a:noFill/>
+          </a:ln>
+        </p:spPr>
+        <p:style>
+          <a:lnRef idx="1">
+            <a:schemeClr val="accent1"/>
+          </a:lnRef>
+          <a:fillRef idx="3">
+            <a:schemeClr val="accent1"/>
+          </a:fillRef>
+          <a:effectRef idx="2">
+            <a:schemeClr val="accent1"/>
+          </a:effectRef>
+          <a:fontRef idx="minor">
+            <a:schemeClr val="lt1"/>
+          </a:fontRef>
+        </p:style>
+        <p:txBody>
+          <a:bodyPr rtlCol="0" anchor="ctr"/>
+          <a:lstStyle/>
+          <a:p>
+            <a:pPr algn="ctr"/>
+          </a:p>
+        </p:txBody>
+      </p:sp>
+      <p:sp>
+        <p:nvSpPr>
+          <p:cNvPr id="6" name="TextBox 5"/>
           <p:cNvSpPr txBox="1"/>
           <p:nvPr/>
         </p:nvSpPr>
         <p:spPr>
           <a:xfrm>
-            <a:off x="457200" y="1280160"/>
-            <a:ext cx="11277295" cy="5029200"/>
+            <a:off x="731520" y="1463040"/>
+            <a:ext cx="10728655" cy="5029200"/>
           </a:xfrm>
           <a:prstGeom prst="rect">
             <a:avLst/>
@@ -3936,12 +4848,13 @@
           <a:p>
             <a:pPr>
               <a:spcBef>
-                <a:spcPts val="2000"/>
+                <a:spcPts val="1600"/>
               </a:spcBef>
-              <a:defRPr sz="2400" b="1">
+              <a:defRPr sz="2200" b="1">
                 <a:solidFill>
                   <a:srgbClr val="212529"/>
                 </a:solidFill>
+                <a:latin typeface="Segoe UI"/>
               </a:defRPr>
             </a:pPr>
             <a:r>
@@ -3951,12 +4864,13 @@
           <a:p>
             <a:pPr>
               <a:spcAft>
-                <a:spcPts val="1200"/>
+                <a:spcPts val="800"/>
               </a:spcAft>
-              <a:defRPr sz="2000">
+              <a:defRPr sz="1800">
                 <a:solidFill>
                   <a:srgbClr val="6C757D"/>
                 </a:solidFill>
+                <a:latin typeface="Segoe UI"/>
               </a:defRPr>
             </a:pPr>
             <a:r>
@@ -3966,12 +4880,13 @@
           <a:p>
             <a:pPr>
               <a:spcBef>
-                <a:spcPts val="2000"/>
+                <a:spcPts val="1600"/>
               </a:spcBef>
-              <a:defRPr sz="2400" b="1">
+              <a:defRPr sz="2200" b="1">
                 <a:solidFill>
                   <a:srgbClr val="212529"/>
                 </a:solidFill>
+                <a:latin typeface="Segoe UI"/>
               </a:defRPr>
             </a:pPr>
             <a:r>
@@ -3981,12 +4896,13 @@
           <a:p>
             <a:pPr>
               <a:spcAft>
-                <a:spcPts val="1200"/>
+                <a:spcPts val="800"/>
               </a:spcAft>
-              <a:defRPr sz="2000">
+              <a:defRPr sz="1800">
                 <a:solidFill>
                   <a:srgbClr val="6C757D"/>
                 </a:solidFill>
+                <a:latin typeface="Segoe UI"/>
               </a:defRPr>
             </a:pPr>
             <a:r>
@@ -3996,12 +4912,13 @@
           <a:p>
             <a:pPr>
               <a:spcBef>
-                <a:spcPts val="2000"/>
+                <a:spcPts val="1600"/>
               </a:spcBef>
-              <a:defRPr sz="2400" b="1">
+              <a:defRPr sz="2200" b="1">
                 <a:solidFill>
                   <a:srgbClr val="212529"/>
                 </a:solidFill>
+                <a:latin typeface="Segoe UI"/>
               </a:defRPr>
             </a:pPr>
             <a:r>
@@ -4011,16 +4928,17 @@
           <a:p>
             <a:pPr>
               <a:spcAft>
-                <a:spcPts val="1200"/>
+                <a:spcPts val="800"/>
               </a:spcAft>
-              <a:defRPr sz="2000">
+              <a:defRPr sz="1800">
                 <a:solidFill>
                   <a:srgbClr val="6C757D"/>
                 </a:solidFill>
-              </a:defRPr>
-            </a:pPr>
-            <a:r>
-              <a:t>Cognitive overload. They give up and use cloud dev environments ($$$)</a:t>
+                <a:latin typeface="Segoe UI"/>
+              </a:defRPr>
+            </a:pPr>
+            <a:r>
+              <a:t>Cognitive overload. They give up and use expensive cloud dev environments</a:t>
             </a:r>
           </a:p>
           <a:p>
@@ -4028,25 +4946,27 @@
               <a:spcBef>
                 <a:spcPts val="1200"/>
               </a:spcBef>
-              <a:defRPr sz="2400">
+              <a:defRPr sz="2200">
                 <a:solidFill>
                   <a:srgbClr val="212529"/>
                 </a:solidFill>
-              </a:defRPr>
-            </a:pPr>
-            <a:r>
-              <a:t>• </a:t>
+                <a:latin typeface="Segoe UI"/>
+              </a:defRPr>
+            </a:pPr>
+            <a:r>
+              <a:t>  </a:t>
             </a:r>
           </a:p>
           <a:p>
             <a:pPr>
               <a:spcBef>
-                <a:spcPts val="2000"/>
+                <a:spcPts val="1600"/>
               </a:spcBef>
-              <a:defRPr sz="2400" b="1">
+              <a:defRPr sz="2200" b="1">
                 <a:solidFill>
                   <a:srgbClr val="212529"/>
                 </a:solidFill>
+                <a:latin typeface="Segoe UI"/>
               </a:defRPr>
             </a:pPr>
             <a:r>
@@ -4056,16 +4976,17 @@
           <a:p>
             <a:pPr>
               <a:spcAft>
-                <a:spcPts val="1200"/>
+                <a:spcPts val="800"/>
               </a:spcAft>
-              <a:defRPr sz="2000">
+              <a:defRPr sz="1800">
                 <a:solidFill>
                   <a:srgbClr val="6C757D"/>
                 </a:solidFill>
-              </a:defRPr>
-            </a:pPr>
-            <a:r>
-              <a:t>Pure Docker. No K8s. Just write service.json and tilt up.</a:t>
+                <a:latin typeface="Segoe UI"/>
+              </a:defRPr>
+            </a:pPr>
+            <a:r>
+              <a:t>Pure Docker. No K8s. Just write service.json and tilt up</a:t>
             </a:r>
           </a:p>
         </p:txBody>
@@ -4090,14 +5011,100 @@
       <p:grpSpPr/>
       <p:sp>
         <p:nvSpPr>
-          <p:cNvPr id="2" name="TextBox 1"/>
+          <p:cNvPr id="2" name="Rectangle 1"/>
+          <p:cNvSpPr/>
+          <p:nvPr/>
+        </p:nvSpPr>
+        <p:spPr>
+          <a:xfrm>
+            <a:off x="0" y="0"/>
+            <a:ext cx="12191695" cy="6858000"/>
+          </a:xfrm>
+          <a:prstGeom prst="rect">
+            <a:avLst/>
+          </a:prstGeom>
+          <a:solidFill>
+            <a:srgbClr val="FFFFFF"/>
+          </a:solidFill>
+          <a:ln>
+            <a:noFill/>
+          </a:ln>
+        </p:spPr>
+        <p:style>
+          <a:lnRef idx="1">
+            <a:schemeClr val="accent1"/>
+          </a:lnRef>
+          <a:fillRef idx="3">
+            <a:schemeClr val="accent1"/>
+          </a:fillRef>
+          <a:effectRef idx="2">
+            <a:schemeClr val="accent1"/>
+          </a:effectRef>
+          <a:fontRef idx="minor">
+            <a:schemeClr val="lt1"/>
+          </a:fontRef>
+        </p:style>
+        <p:txBody>
+          <a:bodyPr rtlCol="0" anchor="ctr"/>
+          <a:lstStyle/>
+          <a:p>
+            <a:pPr algn="ctr"/>
+          </a:p>
+        </p:txBody>
+      </p:sp>
+      <p:sp>
+        <p:nvSpPr>
+          <p:cNvPr id="3" name="Rectangle 2"/>
+          <p:cNvSpPr/>
+          <p:nvPr/>
+        </p:nvSpPr>
+        <p:spPr>
+          <a:xfrm>
+            <a:off x="0" y="0"/>
+            <a:ext cx="137160" cy="6858000"/>
+          </a:xfrm>
+          <a:prstGeom prst="rect">
+            <a:avLst/>
+          </a:prstGeom>
+          <a:solidFill>
+            <a:srgbClr val="7C4DFF"/>
+          </a:solidFill>
+          <a:ln>
+            <a:noFill/>
+          </a:ln>
+        </p:spPr>
+        <p:style>
+          <a:lnRef idx="1">
+            <a:schemeClr val="accent1"/>
+          </a:lnRef>
+          <a:fillRef idx="3">
+            <a:schemeClr val="accent1"/>
+          </a:fillRef>
+          <a:effectRef idx="2">
+            <a:schemeClr val="accent1"/>
+          </a:effectRef>
+          <a:fontRef idx="minor">
+            <a:schemeClr val="lt1"/>
+          </a:fontRef>
+        </p:style>
+        <p:txBody>
+          <a:bodyPr rtlCol="0" anchor="ctr"/>
+          <a:lstStyle/>
+          <a:p>
+            <a:pPr algn="ctr"/>
+          </a:p>
+        </p:txBody>
+      </p:sp>
+      <p:sp>
+        <p:nvSpPr>
+          <p:cNvPr id="4" name="TextBox 3"/>
           <p:cNvSpPr txBox="1"/>
           <p:nvPr/>
         </p:nvSpPr>
         <p:spPr>
           <a:xfrm>
-            <a:off x="457200" y="274320"/>
-            <a:ext cx="11277295" cy="914400"/>
+            <a:off x="731520" y="365760"/>
+            <a:ext cx="10728655" cy="914400"/>
           </a:xfrm>
           <a:prstGeom prst="rect">
             <a:avLst/>
@@ -4113,8 +5120,9 @@
             <a:pPr>
               <a:defRPr sz="4000" b="1">
                 <a:solidFill>
-                  <a:srgbClr val="007BFF"/>
-                </a:solidFill>
+                  <a:srgbClr val="7C4DFF"/>
+                </a:solidFill>
+                <a:latin typeface="Segoe UI"/>
               </a:defRPr>
             </a:pPr>
             <a:r>
@@ -4125,14 +5133,57 @@
       </p:sp>
       <p:sp>
         <p:nvSpPr>
-          <p:cNvPr id="3" name="TextBox 2"/>
+          <p:cNvPr id="5" name="Rectangle 4"/>
+          <p:cNvSpPr/>
+          <p:nvPr/>
+        </p:nvSpPr>
+        <p:spPr>
+          <a:xfrm>
+            <a:off x="731520" y="1188720"/>
+            <a:ext cx="1371600" cy="45720"/>
+          </a:xfrm>
+          <a:prstGeom prst="rect">
+            <a:avLst/>
+          </a:prstGeom>
+          <a:solidFill>
+            <a:srgbClr val="7C4DFF"/>
+          </a:solidFill>
+          <a:ln>
+            <a:noFill/>
+          </a:ln>
+        </p:spPr>
+        <p:style>
+          <a:lnRef idx="1">
+            <a:schemeClr val="accent1"/>
+          </a:lnRef>
+          <a:fillRef idx="3">
+            <a:schemeClr val="accent1"/>
+          </a:fillRef>
+          <a:effectRef idx="2">
+            <a:schemeClr val="accent1"/>
+          </a:effectRef>
+          <a:fontRef idx="minor">
+            <a:schemeClr val="lt1"/>
+          </a:fontRef>
+        </p:style>
+        <p:txBody>
+          <a:bodyPr rtlCol="0" anchor="ctr"/>
+          <a:lstStyle/>
+          <a:p>
+            <a:pPr algn="ctr"/>
+          </a:p>
+        </p:txBody>
+      </p:sp>
+      <p:sp>
+        <p:nvSpPr>
+          <p:cNvPr id="6" name="TextBox 5"/>
           <p:cNvSpPr txBox="1"/>
           <p:nvPr/>
         </p:nvSpPr>
         <p:spPr>
           <a:xfrm>
-            <a:off x="457200" y="1280160"/>
-            <a:ext cx="11277295" cy="5029200"/>
+            <a:off x="731520" y="1463040"/>
+            <a:ext cx="10728655" cy="5029200"/>
           </a:xfrm>
           <a:prstGeom prst="rect">
             <a:avLst/>
@@ -4147,12 +5198,13 @@
           <a:p>
             <a:pPr>
               <a:spcBef>
-                <a:spcPts val="2000"/>
+                <a:spcPts val="1600"/>
               </a:spcBef>
-              <a:defRPr sz="2400" b="1">
+              <a:defRPr sz="2200" b="1">
                 <a:solidFill>
                   <a:srgbClr val="212529"/>
                 </a:solidFill>
+                <a:latin typeface="Segoe UI"/>
               </a:defRPr>
             </a:pPr>
             <a:r>
@@ -4162,12 +5214,13 @@
           <a:p>
             <a:pPr>
               <a:spcAft>
-                <a:spcPts val="1200"/>
+                <a:spcPts val="800"/>
               </a:spcAft>
-              <a:defRPr sz="2000">
+              <a:defRPr sz="1800">
                 <a:solidFill>
                   <a:srgbClr val="6C757D"/>
                 </a:solidFill>
+                <a:latin typeface="Segoe UI"/>
               </a:defRPr>
             </a:pPr>
             <a:r>
@@ -4177,12 +5230,13 @@
           <a:p>
             <a:pPr>
               <a:spcBef>
-                <a:spcPts val="2000"/>
+                <a:spcPts val="1600"/>
               </a:spcBef>
-              <a:defRPr sz="2400" b="1">
+              <a:defRPr sz="2200" b="1">
                 <a:solidFill>
                   <a:srgbClr val="212529"/>
                 </a:solidFill>
+                <a:latin typeface="Segoe UI"/>
               </a:defRPr>
             </a:pPr>
             <a:r>
@@ -4192,27 +5246,29 @@
           <a:p>
             <a:pPr>
               <a:spcAft>
-                <a:spcPts val="1200"/>
+                <a:spcPts val="800"/>
               </a:spcAft>
-              <a:defRPr sz="2000">
+              <a:defRPr sz="1800">
                 <a:solidFill>
                   <a:srgbClr val="6C757D"/>
                 </a:solidFill>
-              </a:defRPr>
-            </a:pPr>
-            <a:r>
-              <a:t>Manifest-driven but leaks K8s concepts. Requires cluster knowledge.</a:t>
+                <a:latin typeface="Segoe UI"/>
+              </a:defRPr>
+            </a:pPr>
+            <a:r>
+              <a:t>Manifest-driven but leaks K8s concepts. Requires cluster knowledge</a:t>
             </a:r>
           </a:p>
           <a:p>
             <a:pPr>
               <a:spcBef>
-                <a:spcPts val="2000"/>
+                <a:spcPts val="1600"/>
               </a:spcBef>
-              <a:defRPr sz="2400" b="1">
+              <a:defRPr sz="2200" b="1">
                 <a:solidFill>
                   <a:srgbClr val="212529"/>
                 </a:solidFill>
+                <a:latin typeface="Segoe UI"/>
               </a:defRPr>
             </a:pPr>
             <a:r>
@@ -4222,27 +5278,29 @@
           <a:p>
             <a:pPr>
               <a:spcAft>
-                <a:spcPts val="1200"/>
+                <a:spcPts val="800"/>
               </a:spcAft>
-              <a:defRPr sz="2000">
+              <a:defRPr sz="1800">
                 <a:solidFill>
                   <a:srgbClr val="6C757D"/>
                 </a:solidFill>
-              </a:defRPr>
-            </a:pPr>
-            <a:r>
-              <a:t>Pure K8s tool. No auto-generation. Complex YAML.</a:t>
+                <a:latin typeface="Segoe UI"/>
+              </a:defRPr>
+            </a:pPr>
+            <a:r>
+              <a:t>Pure K8s tool. No auto-generation. Complex YAML</a:t>
             </a:r>
           </a:p>
           <a:p>
             <a:pPr>
               <a:spcBef>
-                <a:spcPts val="2000"/>
+                <a:spcPts val="1600"/>
               </a:spcBef>
-              <a:defRPr sz="2400" b="1">
+              <a:defRPr sz="2200" b="1">
                 <a:solidFill>
                   <a:srgbClr val="212529"/>
                 </a:solidFill>
+                <a:latin typeface="Segoe UI"/>
               </a:defRPr>
             </a:pPr>
             <a:r>
@@ -4252,27 +5310,29 @@
           <a:p>
             <a:pPr>
               <a:spcAft>
-                <a:spcPts val="1200"/>
+                <a:spcPts val="800"/>
               </a:spcAft>
-              <a:defRPr sz="2000">
+              <a:defRPr sz="1800">
                 <a:solidFill>
                   <a:srgbClr val="6C757D"/>
                 </a:solidFill>
-              </a:defRPr>
-            </a:pPr>
-            <a:r>
-              <a:t>K8s-focused with nice UI. Still requires K8s expertise.</a:t>
+                <a:latin typeface="Segoe UI"/>
+              </a:defRPr>
+            </a:pPr>
+            <a:r>
+              <a:t>K8s-focused with nice UI. Still requires K8s expertise</a:t>
             </a:r>
           </a:p>
           <a:p>
             <a:pPr>
               <a:spcBef>
-                <a:spcPts val="2000"/>
+                <a:spcPts val="1600"/>
               </a:spcBef>
-              <a:defRPr sz="2400" b="1">
+              <a:defRPr sz="2200" b="1">
                 <a:solidFill>
                   <a:srgbClr val="212529"/>
                 </a:solidFill>
+                <a:latin typeface="Segoe UI"/>
               </a:defRPr>
             </a:pPr>
             <a:r>
@@ -4282,27 +5342,29 @@
           <a:p>
             <a:pPr>
               <a:spcAft>
-                <a:spcPts val="1200"/>
+                <a:spcPts val="800"/>
               </a:spcAft>
-              <a:defRPr sz="2000">
+              <a:defRPr sz="1800">
                 <a:solidFill>
                   <a:srgbClr val="6C757D"/>
                 </a:solidFill>
-              </a:defRPr>
-            </a:pPr>
-            <a:r>
-              <a:t>Pivoted to AI agents. Lost local dev focus.</a:t>
+                <a:latin typeface="Segoe UI"/>
+              </a:defRPr>
+            </a:pPr>
+            <a:r>
+              <a:t>Pivoted to AI agents. Lost local dev focus</a:t>
             </a:r>
           </a:p>
           <a:p>
             <a:pPr>
               <a:spcBef>
-                <a:spcPts val="2000"/>
+                <a:spcPts val="1600"/>
               </a:spcBef>
-              <a:defRPr sz="2400" b="1">
+              <a:defRPr sz="2200" b="1">
                 <a:solidFill>
                   <a:srgbClr val="212529"/>
                 </a:solidFill>
+                <a:latin typeface="Segoe UI"/>
               </a:defRPr>
             </a:pPr>
             <a:r>
@@ -4312,16 +5374,17 @@
           <a:p>
             <a:pPr>
               <a:spcAft>
-                <a:spcPts val="1200"/>
+                <a:spcPts val="800"/>
               </a:spcAft>
-              <a:defRPr sz="2000">
+              <a:defRPr sz="1800">
                 <a:solidFill>
                   <a:srgbClr val="6C757D"/>
                 </a:solidFill>
-              </a:defRPr>
-            </a:pPr>
-            <a:r>
-              <a:t>Static configs. No auto-gen. No service discovery.</a:t>
+                <a:latin typeface="Segoe UI"/>
+              </a:defRPr>
+            </a:pPr>
+            <a:r>
+              <a:t>Static configs. No auto-gen. No service discovery</a:t>
             </a:r>
           </a:p>
         </p:txBody>
@@ -4346,14 +5409,100 @@
       <p:grpSpPr/>
       <p:sp>
         <p:nvSpPr>
-          <p:cNvPr id="2" name="TextBox 1"/>
+          <p:cNvPr id="2" name="Rectangle 1"/>
+          <p:cNvSpPr/>
+          <p:nvPr/>
+        </p:nvSpPr>
+        <p:spPr>
+          <a:xfrm>
+            <a:off x="0" y="0"/>
+            <a:ext cx="12191695" cy="6858000"/>
+          </a:xfrm>
+          <a:prstGeom prst="rect">
+            <a:avLst/>
+          </a:prstGeom>
+          <a:solidFill>
+            <a:srgbClr val="FFFFFF"/>
+          </a:solidFill>
+          <a:ln>
+            <a:noFill/>
+          </a:ln>
+        </p:spPr>
+        <p:style>
+          <a:lnRef idx="1">
+            <a:schemeClr val="accent1"/>
+          </a:lnRef>
+          <a:fillRef idx="3">
+            <a:schemeClr val="accent1"/>
+          </a:fillRef>
+          <a:effectRef idx="2">
+            <a:schemeClr val="accent1"/>
+          </a:effectRef>
+          <a:fontRef idx="minor">
+            <a:schemeClr val="lt1"/>
+          </a:fontRef>
+        </p:style>
+        <p:txBody>
+          <a:bodyPr rtlCol="0" anchor="ctr"/>
+          <a:lstStyle/>
+          <a:p>
+            <a:pPr algn="ctr"/>
+          </a:p>
+        </p:txBody>
+      </p:sp>
+      <p:sp>
+        <p:nvSpPr>
+          <p:cNvPr id="3" name="Rectangle 2"/>
+          <p:cNvSpPr/>
+          <p:nvPr/>
+        </p:nvSpPr>
+        <p:spPr>
+          <a:xfrm>
+            <a:off x="0" y="0"/>
+            <a:ext cx="137160" cy="6858000"/>
+          </a:xfrm>
+          <a:prstGeom prst="rect">
+            <a:avLst/>
+          </a:prstGeom>
+          <a:solidFill>
+            <a:srgbClr val="7C4DFF"/>
+          </a:solidFill>
+          <a:ln>
+            <a:noFill/>
+          </a:ln>
+        </p:spPr>
+        <p:style>
+          <a:lnRef idx="1">
+            <a:schemeClr val="accent1"/>
+          </a:lnRef>
+          <a:fillRef idx="3">
+            <a:schemeClr val="accent1"/>
+          </a:fillRef>
+          <a:effectRef idx="2">
+            <a:schemeClr val="accent1"/>
+          </a:effectRef>
+          <a:fontRef idx="minor">
+            <a:schemeClr val="lt1"/>
+          </a:fontRef>
+        </p:style>
+        <p:txBody>
+          <a:bodyPr rtlCol="0" anchor="ctr"/>
+          <a:lstStyle/>
+          <a:p>
+            <a:pPr algn="ctr"/>
+          </a:p>
+        </p:txBody>
+      </p:sp>
+      <p:sp>
+        <p:nvSpPr>
+          <p:cNvPr id="4" name="TextBox 3"/>
           <p:cNvSpPr txBox="1"/>
           <p:nvPr/>
         </p:nvSpPr>
         <p:spPr>
           <a:xfrm>
-            <a:off x="457200" y="274320"/>
-            <a:ext cx="11277295" cy="914400"/>
+            <a:off x="731520" y="365760"/>
+            <a:ext cx="10728655" cy="914400"/>
           </a:xfrm>
           <a:prstGeom prst="rect">
             <a:avLst/>
@@ -4369,26 +5518,70 @@
             <a:pPr>
               <a:defRPr sz="4000" b="1">
                 <a:solidFill>
-                  <a:srgbClr val="28A745"/>
-                </a:solidFill>
-              </a:defRPr>
-            </a:pPr>
-            <a:r>
-              <a:t>Head-to-Head: TDK vs. Garden</a:t>
-            </a:r>
-          </a:p>
-        </p:txBody>
-      </p:sp>
-      <p:sp>
-        <p:nvSpPr>
-          <p:cNvPr id="3" name="TextBox 2"/>
+                  <a:srgbClr val="7C4DFF"/>
+                </a:solidFill>
+                <a:latin typeface="Segoe UI"/>
+              </a:defRPr>
+            </a:pPr>
+            <a:r>
+              <a:t>TDK vs. Garden: Head-to-Head</a:t>
+            </a:r>
+          </a:p>
+        </p:txBody>
+      </p:sp>
+      <p:sp>
+        <p:nvSpPr>
+          <p:cNvPr id="5" name="Rectangle 4"/>
+          <p:cNvSpPr/>
+          <p:nvPr/>
+        </p:nvSpPr>
+        <p:spPr>
+          <a:xfrm>
+            <a:off x="731520" y="1188720"/>
+            <a:ext cx="1371600" cy="45720"/>
+          </a:xfrm>
+          <a:prstGeom prst="rect">
+            <a:avLst/>
+          </a:prstGeom>
+          <a:solidFill>
+            <a:srgbClr val="7C4DFF"/>
+          </a:solidFill>
+          <a:ln>
+            <a:noFill/>
+          </a:ln>
+        </p:spPr>
+        <p:style>
+          <a:lnRef idx="1">
+            <a:schemeClr val="accent1"/>
+          </a:lnRef>
+          <a:fillRef idx="3">
+            <a:schemeClr val="accent1"/>
+          </a:fillRef>
+          <a:effectRef idx="2">
+            <a:schemeClr val="accent1"/>
+          </a:effectRef>
+          <a:fontRef idx="minor">
+            <a:schemeClr val="lt1"/>
+          </a:fontRef>
+        </p:style>
+        <p:txBody>
+          <a:bodyPr rtlCol="0" anchor="ctr"/>
+          <a:lstStyle/>
+          <a:p>
+            <a:pPr algn="ctr"/>
+          </a:p>
+        </p:txBody>
+      </p:sp>
+      <p:sp>
+        <p:nvSpPr>
+          <p:cNvPr id="6" name="TextBox 5"/>
           <p:cNvSpPr txBox="1"/>
           <p:nvPr/>
         </p:nvSpPr>
         <p:spPr>
           <a:xfrm>
-            <a:off x="457200" y="1280160"/>
-            <a:ext cx="11277295" cy="5029200"/>
+            <a:off x="731520" y="1463040"/>
+            <a:ext cx="10728655" cy="5029200"/>
           </a:xfrm>
           <a:prstGeom prst="rect">
             <a:avLst/>
@@ -4403,12 +5596,13 @@
           <a:p>
             <a:pPr>
               <a:spcBef>
-                <a:spcPts val="2000"/>
+                <a:spcPts val="1400"/>
               </a:spcBef>
-              <a:defRPr sz="2400" b="1">
+              <a:defRPr sz="2000" b="1">
                 <a:solidFill>
                   <a:srgbClr val="212529"/>
                 </a:solidFill>
+                <a:latin typeface="Segoe UI"/>
               </a:defRPr>
             </a:pPr>
             <a:r>
@@ -4418,27 +5612,29 @@
           <a:p>
             <a:pPr>
               <a:spcAft>
-                <a:spcPts val="1200"/>
+                <a:spcPts val="600"/>
               </a:spcAft>
-              <a:defRPr sz="2000">
+              <a:defRPr sz="1800">
                 <a:solidFill>
                   <a:srgbClr val="6C757D"/>
                 </a:solidFill>
-              </a:defRPr>
-            </a:pPr>
-            <a:r>
-              <a:t>✅ TDK: service.json  |  ✅ Garden: garden.yml</a:t>
+                <a:latin typeface="Segoe UI"/>
+              </a:defRPr>
+            </a:pPr>
+            <a:r>
+              <a:t>    ✅ TDK: Simple service.json  |  ⚠️ Garden: Complex garden.yml</a:t>
             </a:r>
           </a:p>
           <a:p>
             <a:pPr>
               <a:spcBef>
-                <a:spcPts val="2000"/>
+                <a:spcPts val="1400"/>
               </a:spcBef>
-              <a:defRPr sz="2400" b="1">
+              <a:defRPr sz="2000" b="1">
                 <a:solidFill>
                   <a:srgbClr val="212529"/>
                 </a:solidFill>
+                <a:latin typeface="Segoe UI"/>
               </a:defRPr>
             </a:pPr>
             <a:r>
@@ -4448,27 +5644,29 @@
           <a:p>
             <a:pPr>
               <a:spcAft>
-                <a:spcPts val="1200"/>
+                <a:spcPts val="600"/>
               </a:spcAft>
-              <a:defRPr sz="2000">
+              <a:defRPr sz="1800">
                 <a:solidFill>
                   <a:srgbClr val="6C757D"/>
                 </a:solidFill>
-              </a:defRPr>
-            </a:pPr>
-            <a:r>
-              <a:t>✅ TDK: Docker, Vite, TSConfig, nginx  |  ❌ Garden: Manual setup</a:t>
+                <a:latin typeface="Segoe UI"/>
+              </a:defRPr>
+            </a:pPr>
+            <a:r>
+              <a:t>    ✅ TDK: Docker, Vite, TSConfig, nginx  |  ⚠️ Garden: Manual setup</a:t>
             </a:r>
           </a:p>
           <a:p>
             <a:pPr>
               <a:spcBef>
-                <a:spcPts val="2000"/>
+                <a:spcPts val="1400"/>
               </a:spcBef>
-              <a:defRPr sz="2400" b="1">
+              <a:defRPr sz="2000" b="1">
                 <a:solidFill>
                   <a:srgbClr val="212529"/>
                 </a:solidFill>
+                <a:latin typeface="Segoe UI"/>
               </a:defRPr>
             </a:pPr>
             <a:r>
@@ -4478,106 +5676,113 @@
           <a:p>
             <a:pPr>
               <a:spcAft>
-                <a:spcPts val="1200"/>
+                <a:spcPts val="600"/>
               </a:spcAft>
-              <a:defRPr sz="2000">
+              <a:defRPr sz="1800">
                 <a:solidFill>
                   <a:srgbClr val="6C757D"/>
                 </a:solidFill>
-              </a:defRPr>
-            </a:pPr>
-            <a:r>
-              <a:t>✅ TDK: No (Docker only)  |  ⚠️ Garden: Yes/Optional (leaks concepts)</a:t>
+                <a:latin typeface="Segoe UI"/>
+              </a:defRPr>
+            </a:pPr>
+            <a:r>
+              <a:t>    ✅ TDK: No (Docker only)  |  ⚠️ Garden: Yes/Optional (leaks concepts)</a:t>
             </a:r>
           </a:p>
           <a:p>
             <a:pPr>
               <a:spcBef>
-                <a:spcPts val="2000"/>
+                <a:spcPts val="1400"/>
               </a:spcBef>
-              <a:defRPr sz="2400" b="1">
+              <a:defRPr sz="2000" b="1">
                 <a:solidFill>
                   <a:srgbClr val="212529"/>
                 </a:solidFill>
-              </a:defRPr>
-            </a:pPr>
-            <a:r>
-              <a:t>CI/CD Integration</a:t>
+                <a:latin typeface="Segoe UI"/>
+              </a:defRPr>
+            </a:pPr>
+            <a:r>
+              <a:t>Learning Curve</a:t>
             </a:r>
           </a:p>
           <a:p>
             <a:pPr>
               <a:spcAft>
-                <a:spcPts val="1200"/>
+                <a:spcPts val="600"/>
               </a:spcAft>
-              <a:defRPr sz="2000">
+              <a:defRPr sz="1800">
                 <a:solidFill>
                   <a:srgbClr val="6C757D"/>
                 </a:solidFill>
-              </a:defRPr>
-            </a:pPr>
-            <a:r>
-              <a:t>❌ TDK: Not built-in  |  ✅ Garden: Built-in pipelines</a:t>
+                <a:latin typeface="Segoe UI"/>
+              </a:defRPr>
+            </a:pPr>
+            <a:r>
+              <a:t>    ✅ TDK: 30 minutes  |  ⚠️ Garden: 2-3 days (K8s concepts)</a:t>
             </a:r>
           </a:p>
           <a:p>
             <a:pPr>
               <a:spcBef>
-                <a:spcPts val="2000"/>
+                <a:spcPts val="1400"/>
               </a:spcBef>
-              <a:defRPr sz="2400" b="1">
+              <a:defRPr sz="2000" b="1">
                 <a:solidFill>
                   <a:srgbClr val="212529"/>
                 </a:solidFill>
-              </a:defRPr>
-            </a:pPr>
-            <a:r>
-              <a:t>Learning Curve</a:t>
+                <a:latin typeface="Segoe UI"/>
+              </a:defRPr>
+            </a:pPr>
+            <a:r>
+              <a:t>Target User</a:t>
             </a:r>
           </a:p>
           <a:p>
             <a:pPr>
               <a:spcAft>
-                <a:spcPts val="1200"/>
+                <a:spcPts val="600"/>
               </a:spcAft>
-              <a:defRPr sz="2000">
+              <a:defRPr sz="1800">
                 <a:solidFill>
                   <a:srgbClr val="6C757D"/>
                 </a:solidFill>
-              </a:defRPr>
-            </a:pPr>
-            <a:r>
-              <a:t>✅ TDK: 30 minutes  |  ⚠️ Garden: 2-3 days (K8s concepts)</a:t>
+                <a:latin typeface="Segoe UI"/>
+              </a:defRPr>
+            </a:pPr>
+            <a:r>
+              <a:t>    ✅ TDK: Any developer  |  ⚠️ Garden: Platform engineers</a:t>
             </a:r>
           </a:p>
           <a:p>
             <a:pPr>
               <a:spcBef>
-                <a:spcPts val="2000"/>
+                <a:spcPts val="1400"/>
               </a:spcBef>
-              <a:defRPr sz="2400" b="1">
+              <a:defRPr sz="2000" b="1">
                 <a:solidFill>
                   <a:srgbClr val="212529"/>
                 </a:solidFill>
-              </a:defRPr>
-            </a:pPr>
-            <a:r>
-              <a:t>Target User</a:t>
+                <a:latin typeface="Segoe UI"/>
+              </a:defRPr>
+            </a:pPr>
+            <a:r>
+              <a:t>CI/CD</a:t>
             </a:r>
           </a:p>
           <a:p>
             <a:pPr>
               <a:spcAft>
-                <a:spcPts val="1200"/>
+                <a:spcPts val="600"/>
               </a:spcAft>
-              <a:defRPr sz="2000">
+              <a:defRPr sz="1800">
                 <a:solidFill>
                   <a:srgbClr val="6C757D"/>
                 </a:solidFill>
-              </a:defRPr>
-            </a:pPr>
-            <a:r>
-              <a:t>✅ TDK: Any developer  |  ⚠️ Garden: Platform engineers</a:t>
+                <a:latin typeface="Segoe UI"/>
+              </a:defRPr>
+            </a:pPr>
+            <a:r>
+              <a:t>    ✅ TDK: Not built-in  |  ⚠️ Garden: Built-in pipelines</a:t>
             </a:r>
           </a:p>
         </p:txBody>
@@ -4602,14 +5807,100 @@
       <p:grpSpPr/>
       <p:sp>
         <p:nvSpPr>
-          <p:cNvPr id="2" name="TextBox 1"/>
+          <p:cNvPr id="2" name="Rectangle 1"/>
+          <p:cNvSpPr/>
+          <p:nvPr/>
+        </p:nvSpPr>
+        <p:spPr>
+          <a:xfrm>
+            <a:off x="0" y="0"/>
+            <a:ext cx="12191695" cy="6858000"/>
+          </a:xfrm>
+          <a:prstGeom prst="rect">
+            <a:avLst/>
+          </a:prstGeom>
+          <a:solidFill>
+            <a:srgbClr val="FFFFFF"/>
+          </a:solidFill>
+          <a:ln>
+            <a:noFill/>
+          </a:ln>
+        </p:spPr>
+        <p:style>
+          <a:lnRef idx="1">
+            <a:schemeClr val="accent1"/>
+          </a:lnRef>
+          <a:fillRef idx="3">
+            <a:schemeClr val="accent1"/>
+          </a:fillRef>
+          <a:effectRef idx="2">
+            <a:schemeClr val="accent1"/>
+          </a:effectRef>
+          <a:fontRef idx="minor">
+            <a:schemeClr val="lt1"/>
+          </a:fontRef>
+        </p:style>
+        <p:txBody>
+          <a:bodyPr rtlCol="0" anchor="ctr"/>
+          <a:lstStyle/>
+          <a:p>
+            <a:pPr algn="ctr"/>
+          </a:p>
+        </p:txBody>
+      </p:sp>
+      <p:sp>
+        <p:nvSpPr>
+          <p:cNvPr id="3" name="Rectangle 2"/>
+          <p:cNvSpPr/>
+          <p:nvPr/>
+        </p:nvSpPr>
+        <p:spPr>
+          <a:xfrm>
+            <a:off x="0" y="0"/>
+            <a:ext cx="137160" cy="6858000"/>
+          </a:xfrm>
+          <a:prstGeom prst="rect">
+            <a:avLst/>
+          </a:prstGeom>
+          <a:solidFill>
+            <a:srgbClr val="7C4DFF"/>
+          </a:solidFill>
+          <a:ln>
+            <a:noFill/>
+          </a:ln>
+        </p:spPr>
+        <p:style>
+          <a:lnRef idx="1">
+            <a:schemeClr val="accent1"/>
+          </a:lnRef>
+          <a:fillRef idx="3">
+            <a:schemeClr val="accent1"/>
+          </a:fillRef>
+          <a:effectRef idx="2">
+            <a:schemeClr val="accent1"/>
+          </a:effectRef>
+          <a:fontRef idx="minor">
+            <a:schemeClr val="lt1"/>
+          </a:fontRef>
+        </p:style>
+        <p:txBody>
+          <a:bodyPr rtlCol="0" anchor="ctr"/>
+          <a:lstStyle/>
+          <a:p>
+            <a:pPr algn="ctr"/>
+          </a:p>
+        </p:txBody>
+      </p:sp>
+      <p:sp>
+        <p:nvSpPr>
+          <p:cNvPr id="4" name="TextBox 3"/>
           <p:cNvSpPr txBox="1"/>
           <p:nvPr/>
         </p:nvSpPr>
         <p:spPr>
           <a:xfrm>
-            <a:off x="457200" y="274320"/>
-            <a:ext cx="11277295" cy="914400"/>
+            <a:off x="731520" y="365760"/>
+            <a:ext cx="10728655" cy="914400"/>
           </a:xfrm>
           <a:prstGeom prst="rect">
             <a:avLst/>
@@ -4625,26 +5916,70 @@
             <a:pPr>
               <a:defRPr sz="4000" b="1">
                 <a:solidFill>
-                  <a:srgbClr val="6F42C1"/>
-                </a:solidFill>
-              </a:defRPr>
-            </a:pPr>
-            <a:r>
-              <a:t>TDK's Unique Position: The ONLY Tool That...</a:t>
-            </a:r>
-          </a:p>
-        </p:txBody>
-      </p:sp>
-      <p:sp>
-        <p:nvSpPr>
-          <p:cNvPr id="3" name="TextBox 2"/>
+                  <a:srgbClr val="7C4DFF"/>
+                </a:solidFill>
+                <a:latin typeface="Segoe UI"/>
+              </a:defRPr>
+            </a:pPr>
+            <a:r>
+              <a:t>TDK's Unique Position</a:t>
+            </a:r>
+          </a:p>
+        </p:txBody>
+      </p:sp>
+      <p:sp>
+        <p:nvSpPr>
+          <p:cNvPr id="5" name="Rectangle 4"/>
+          <p:cNvSpPr/>
+          <p:nvPr/>
+        </p:nvSpPr>
+        <p:spPr>
+          <a:xfrm>
+            <a:off x="731520" y="1188720"/>
+            <a:ext cx="1371600" cy="45720"/>
+          </a:xfrm>
+          <a:prstGeom prst="rect">
+            <a:avLst/>
+          </a:prstGeom>
+          <a:solidFill>
+            <a:srgbClr val="7C4DFF"/>
+          </a:solidFill>
+          <a:ln>
+            <a:noFill/>
+          </a:ln>
+        </p:spPr>
+        <p:style>
+          <a:lnRef idx="1">
+            <a:schemeClr val="accent1"/>
+          </a:lnRef>
+          <a:fillRef idx="3">
+            <a:schemeClr val="accent1"/>
+          </a:fillRef>
+          <a:effectRef idx="2">
+            <a:schemeClr val="accent1"/>
+          </a:effectRef>
+          <a:fontRef idx="minor">
+            <a:schemeClr val="lt1"/>
+          </a:fontRef>
+        </p:style>
+        <p:txBody>
+          <a:bodyPr rtlCol="0" anchor="ctr"/>
+          <a:lstStyle/>
+          <a:p>
+            <a:pPr algn="ctr"/>
+          </a:p>
+        </p:txBody>
+      </p:sp>
+      <p:sp>
+        <p:nvSpPr>
+          <p:cNvPr id="6" name="TextBox 5"/>
           <p:cNvSpPr txBox="1"/>
           <p:nvPr/>
         </p:nvSpPr>
         <p:spPr>
           <a:xfrm>
-            <a:off x="457200" y="1280160"/>
-            <a:ext cx="11277295" cy="5029200"/>
+            <a:off x="731520" y="1463040"/>
+            <a:ext cx="10728655" cy="5029200"/>
           </a:xfrm>
           <a:prstGeom prst="rect">
             <a:avLst/>
@@ -4661,14 +5996,15 @@
               <a:spcBef>
                 <a:spcPts val="1200"/>
               </a:spcBef>
-              <a:defRPr sz="2400">
+              <a:defRPr sz="2200">
                 <a:solidFill>
                   <a:srgbClr val="212529"/>
                 </a:solidFill>
-              </a:defRPr>
-            </a:pPr>
-            <a:r>
-              <a:t>• Generates configs from manifests (service.json → 10+ files)</a:t>
+                <a:latin typeface="Segoe UI"/>
+              </a:defRPr>
+            </a:pPr>
+            <a:r>
+              <a:t>  Generates configs from manifests (service.json → 10+ files)</a:t>
             </a:r>
           </a:p>
           <a:p>
@@ -4676,14 +6012,15 @@
               <a:spcBef>
                 <a:spcPts val="1200"/>
               </a:spcBef>
-              <a:defRPr sz="2400">
+              <a:defRPr sz="2200">
                 <a:solidFill>
                   <a:srgbClr val="212529"/>
                 </a:solidFill>
-              </a:defRPr>
-            </a:pPr>
-            <a:r>
-              <a:t>• Works WITHOUT Kubernetes (pure Docker + Tilt)</a:t>
+                <a:latin typeface="Segoe UI"/>
+              </a:defRPr>
+            </a:pPr>
+            <a:r>
+              <a:t>  Works WITHOUT Kubernetes (pure Docker + Tilt)</a:t>
             </a:r>
           </a:p>
           <a:p>
@@ -4691,14 +6028,15 @@
               <a:spcBef>
                 <a:spcPts val="1200"/>
               </a:spcBef>
-              <a:defRPr sz="2400">
+              <a:defRPr sz="2200">
                 <a:solidFill>
                   <a:srgbClr val="212529"/>
                 </a:solidFill>
-              </a:defRPr>
-            </a:pPr>
-            <a:r>
-              <a:t>• Scales to 120+ services locally (proven at that scale)</a:t>
+                <a:latin typeface="Segoe UI"/>
+              </a:defRPr>
+            </a:pPr>
+            <a:r>
+              <a:t>  Scales to 120+ services locally (proven at that scale)</a:t>
             </a:r>
           </a:p>
           <a:p>
@@ -4706,14 +6044,15 @@
               <a:spcBef>
                 <a:spcPts val="1200"/>
               </a:spcBef>
-              <a:defRPr sz="2400">
+              <a:defRPr sz="2200">
                 <a:solidFill>
                   <a:srgbClr val="212529"/>
                 </a:solidFill>
-              </a:defRPr>
-            </a:pPr>
-            <a:r>
-              <a:t>• Auto-discovers services from directory structure</a:t>
+                <a:latin typeface="Segoe UI"/>
+              </a:defRPr>
+            </a:pPr>
+            <a:r>
+              <a:t>  Auto-discovers services from directory structure</a:t>
             </a:r>
           </a:p>
           <a:p>
@@ -4721,14 +6060,15 @@
               <a:spcBef>
                 <a:spcPts val="1200"/>
               </a:spcBef>
-              <a:defRPr sz="2400">
+              <a:defRPr sz="2200">
                 <a:solidFill>
                   <a:srgbClr val="212529"/>
                 </a:solidFill>
-              </a:defRPr>
-            </a:pPr>
-            <a:r>
-              <a:t>• Provides golden Docker images (L1-L4 layering)</a:t>
+                <a:latin typeface="Segoe UI"/>
+              </a:defRPr>
+            </a:pPr>
+            <a:r>
+              <a:t>  Provides golden Docker images (L1-L4 layering)</a:t>
             </a:r>
           </a:p>
           <a:p>
@@ -4736,14 +6076,47 @@
               <a:spcBef>
                 <a:spcPts val="1200"/>
               </a:spcBef>
-              <a:defRPr sz="2400">
+              <a:defRPr sz="2200">
                 <a:solidFill>
                   <a:srgbClr val="212529"/>
                 </a:solidFill>
-              </a:defRPr>
-            </a:pPr>
-            <a:r>
-              <a:t>• Gives you microservice orchestration WITHOUT the K8s burden</a:t>
+                <a:latin typeface="Segoe UI"/>
+              </a:defRPr>
+            </a:pPr>
+            <a:r>
+              <a:t>  </a:t>
+            </a:r>
+          </a:p>
+          <a:p>
+            <a:pPr>
+              <a:spcBef>
+                <a:spcPts val="1600"/>
+              </a:spcBef>
+              <a:defRPr sz="2200" b="1">
+                <a:solidFill>
+                  <a:srgbClr val="212529"/>
+                </a:solidFill>
+                <a:latin typeface="Segoe UI"/>
+              </a:defRPr>
+            </a:pPr>
+            <a:r>
+              <a:t>Key Differentiator:</a:t>
+            </a:r>
+          </a:p>
+          <a:p>
+            <a:pPr>
+              <a:spcAft>
+                <a:spcPts val="800"/>
+              </a:spcAft>
+              <a:defRPr sz="1800">
+                <a:solidFill>
+                  <a:srgbClr val="6C757D"/>
+                </a:solidFill>
+                <a:latin typeface="Segoe UI"/>
+              </a:defRPr>
+            </a:pPr>
+            <a:r>
+              <a:t>Microservice orchestration WITHOUT the K8s burden</a:t>
             </a:r>
           </a:p>
         </p:txBody>
@@ -4768,14 +6141,100 @@
       <p:grpSpPr/>
       <p:sp>
         <p:nvSpPr>
-          <p:cNvPr id="2" name="TextBox 1"/>
+          <p:cNvPr id="2" name="Rectangle 1"/>
+          <p:cNvSpPr/>
+          <p:nvPr/>
+        </p:nvSpPr>
+        <p:spPr>
+          <a:xfrm>
+            <a:off x="0" y="0"/>
+            <a:ext cx="12191695" cy="6858000"/>
+          </a:xfrm>
+          <a:prstGeom prst="rect">
+            <a:avLst/>
+          </a:prstGeom>
+          <a:solidFill>
+            <a:srgbClr val="FFFFFF"/>
+          </a:solidFill>
+          <a:ln>
+            <a:noFill/>
+          </a:ln>
+        </p:spPr>
+        <p:style>
+          <a:lnRef idx="1">
+            <a:schemeClr val="accent1"/>
+          </a:lnRef>
+          <a:fillRef idx="3">
+            <a:schemeClr val="accent1"/>
+          </a:fillRef>
+          <a:effectRef idx="2">
+            <a:schemeClr val="accent1"/>
+          </a:effectRef>
+          <a:fontRef idx="minor">
+            <a:schemeClr val="lt1"/>
+          </a:fontRef>
+        </p:style>
+        <p:txBody>
+          <a:bodyPr rtlCol="0" anchor="ctr"/>
+          <a:lstStyle/>
+          <a:p>
+            <a:pPr algn="ctr"/>
+          </a:p>
+        </p:txBody>
+      </p:sp>
+      <p:sp>
+        <p:nvSpPr>
+          <p:cNvPr id="3" name="Rectangle 2"/>
+          <p:cNvSpPr/>
+          <p:nvPr/>
+        </p:nvSpPr>
+        <p:spPr>
+          <a:xfrm>
+            <a:off x="0" y="0"/>
+            <a:ext cx="137160" cy="6858000"/>
+          </a:xfrm>
+          <a:prstGeom prst="rect">
+            <a:avLst/>
+          </a:prstGeom>
+          <a:solidFill>
+            <a:srgbClr val="7C4DFF"/>
+          </a:solidFill>
+          <a:ln>
+            <a:noFill/>
+          </a:ln>
+        </p:spPr>
+        <p:style>
+          <a:lnRef idx="1">
+            <a:schemeClr val="accent1"/>
+          </a:lnRef>
+          <a:fillRef idx="3">
+            <a:schemeClr val="accent1"/>
+          </a:fillRef>
+          <a:effectRef idx="2">
+            <a:schemeClr val="accent1"/>
+          </a:effectRef>
+          <a:fontRef idx="minor">
+            <a:schemeClr val="lt1"/>
+          </a:fontRef>
+        </p:style>
+        <p:txBody>
+          <a:bodyPr rtlCol="0" anchor="ctr"/>
+          <a:lstStyle/>
+          <a:p>
+            <a:pPr algn="ctr"/>
+          </a:p>
+        </p:txBody>
+      </p:sp>
+      <p:sp>
+        <p:nvSpPr>
+          <p:cNvPr id="4" name="TextBox 3"/>
           <p:cNvSpPr txBox="1"/>
           <p:nvPr/>
         </p:nvSpPr>
         <p:spPr>
           <a:xfrm>
-            <a:off x="457200" y="274320"/>
-            <a:ext cx="11277295" cy="914400"/>
+            <a:off x="731520" y="365760"/>
+            <a:ext cx="10728655" cy="914400"/>
           </a:xfrm>
           <a:prstGeom prst="rect">
             <a:avLst/>
@@ -4791,26 +6250,70 @@
             <a:pPr>
               <a:defRPr sz="4000" b="1">
                 <a:solidFill>
-                  <a:srgbClr val="17A2B8"/>
-                </a:solidFill>
-              </a:defRPr>
-            </a:pPr>
-            <a:r>
-              <a:t>The Market Gap We're Filling</a:t>
-            </a:r>
-          </a:p>
-        </p:txBody>
-      </p:sp>
-      <p:sp>
-        <p:nvSpPr>
-          <p:cNvPr id="3" name="TextBox 2"/>
+                  <a:srgbClr val="7C4DFF"/>
+                </a:solidFill>
+                <a:latin typeface="Segoe UI"/>
+              </a:defRPr>
+            </a:pPr>
+            <a:r>
+              <a:t>Who Uses What Tool</a:t>
+            </a:r>
+          </a:p>
+        </p:txBody>
+      </p:sp>
+      <p:sp>
+        <p:nvSpPr>
+          <p:cNvPr id="5" name="Rectangle 4"/>
+          <p:cNvSpPr/>
+          <p:nvPr/>
+        </p:nvSpPr>
+        <p:spPr>
+          <a:xfrm>
+            <a:off x="731520" y="1188720"/>
+            <a:ext cx="1371600" cy="45720"/>
+          </a:xfrm>
+          <a:prstGeom prst="rect">
+            <a:avLst/>
+          </a:prstGeom>
+          <a:solidFill>
+            <a:srgbClr val="7C4DFF"/>
+          </a:solidFill>
+          <a:ln>
+            <a:noFill/>
+          </a:ln>
+        </p:spPr>
+        <p:style>
+          <a:lnRef idx="1">
+            <a:schemeClr val="accent1"/>
+          </a:lnRef>
+          <a:fillRef idx="3">
+            <a:schemeClr val="accent1"/>
+          </a:fillRef>
+          <a:effectRef idx="2">
+            <a:schemeClr val="accent1"/>
+          </a:effectRef>
+          <a:fontRef idx="minor">
+            <a:schemeClr val="lt1"/>
+          </a:fontRef>
+        </p:style>
+        <p:txBody>
+          <a:bodyPr rtlCol="0" anchor="ctr"/>
+          <a:lstStyle/>
+          <a:p>
+            <a:pPr algn="ctr"/>
+          </a:p>
+        </p:txBody>
+      </p:sp>
+      <p:sp>
+        <p:nvSpPr>
+          <p:cNvPr id="6" name="TextBox 5"/>
           <p:cNvSpPr txBox="1"/>
           <p:nvPr/>
         </p:nvSpPr>
         <p:spPr>
           <a:xfrm>
-            <a:off x="457200" y="1280160"/>
-            <a:ext cx="11277295" cy="5029200"/>
+            <a:off x="731520" y="1463040"/>
+            <a:ext cx="10728655" cy="5029200"/>
           </a:xfrm>
           <a:prstGeom prst="rect">
             <a:avLst/>
@@ -4825,12 +6328,13 @@
           <a:p>
             <a:pPr>
               <a:spcBef>
-                <a:spcPts val="2000"/>
+                <a:spcPts val="1600"/>
               </a:spcBef>
-              <a:defRPr sz="2400" b="1">
+              <a:defRPr sz="2200" b="1">
                 <a:solidFill>
                   <a:srgbClr val="212529"/>
                 </a:solidFill>
+                <a:latin typeface="Segoe UI"/>
               </a:defRPr>
             </a:pPr>
             <a:r>
@@ -4840,12 +6344,13 @@
           <a:p>
             <a:pPr>
               <a:spcAft>
-                <a:spcPts val="1200"/>
+                <a:spcPts val="800"/>
               </a:spcAft>
-              <a:defRPr sz="2000">
+              <a:defRPr sz="1800">
                 <a:solidFill>
                   <a:srgbClr val="6C757D"/>
                 </a:solidFill>
+                <a:latin typeface="Segoe UI"/>
               </a:defRPr>
             </a:pPr>
             <a:r>
@@ -4855,12 +6360,13 @@
           <a:p>
             <a:pPr>
               <a:spcBef>
-                <a:spcPts val="2000"/>
+                <a:spcPts val="1600"/>
               </a:spcBef>
-              <a:defRPr sz="2400" b="1">
+              <a:defRPr sz="2200" b="1">
                 <a:solidFill>
                   <a:srgbClr val="212529"/>
                 </a:solidFill>
+                <a:latin typeface="Segoe UI"/>
               </a:defRPr>
             </a:pPr>
             <a:r>
@@ -4870,12 +6376,13 @@
           <a:p>
             <a:pPr>
               <a:spcAft>
-                <a:spcPts val="1200"/>
+                <a:spcPts val="800"/>
               </a:spcAft>
-              <a:defRPr sz="2000">
+              <a:defRPr sz="1800">
                 <a:solidFill>
                   <a:srgbClr val="6C757D"/>
                 </a:solidFill>
+                <a:latin typeface="Segoe UI"/>
               </a:defRPr>
             </a:pPr>
             <a:r>
@@ -4885,12 +6392,13 @@
           <a:p>
             <a:pPr>
               <a:spcBef>
-                <a:spcPts val="2000"/>
+                <a:spcPts val="1600"/>
               </a:spcBef>
-              <a:defRPr sz="2400" b="1">
+              <a:defRPr sz="2200" b="1">
                 <a:solidFill>
                   <a:srgbClr val="212529"/>
                 </a:solidFill>
+                <a:latin typeface="Segoe UI"/>
               </a:defRPr>
             </a:pPr>
             <a:r>
@@ -4900,12 +6408,13 @@
           <a:p>
             <a:pPr>
               <a:spcAft>
-                <a:spcPts val="1200"/>
+                <a:spcPts val="800"/>
               </a:spcAft>
-              <a:defRPr sz="2000">
+              <a:defRPr sz="1800">
                 <a:solidFill>
                   <a:srgbClr val="6C757D"/>
                 </a:solidFill>
+                <a:latin typeface="Segoe UI"/>
               </a:defRPr>
             </a:pPr>
             <a:r>
@@ -4915,12 +6424,13 @@
           <a:p>
             <a:pPr>
               <a:spcBef>
-                <a:spcPts val="2000"/>
+                <a:spcPts val="1600"/>
               </a:spcBef>
-              <a:defRPr sz="2400" b="1">
+              <a:defRPr sz="2200" b="1">
                 <a:solidFill>
                   <a:srgbClr val="212529"/>
                 </a:solidFill>
+                <a:latin typeface="Segoe UI"/>
               </a:defRPr>
             </a:pPr>
             <a:r>
@@ -4930,12 +6440,13 @@
           <a:p>
             <a:pPr>
               <a:spcAft>
-                <a:spcPts val="1200"/>
+                <a:spcPts val="800"/>
               </a:spcAft>
-              <a:defRPr sz="2000">
+              <a:defRPr sz="1800">
                 <a:solidFill>
                   <a:srgbClr val="6C757D"/>
                 </a:solidFill>
+                <a:latin typeface="Segoe UI"/>
               </a:defRPr>
             </a:pPr>
             <a:r>
@@ -4947,25 +6458,27 @@
               <a:spcBef>
                 <a:spcPts val="1200"/>
               </a:spcBef>
-              <a:defRPr sz="2400">
+              <a:defRPr sz="2200">
                 <a:solidFill>
                   <a:srgbClr val="212529"/>
                 </a:solidFill>
-              </a:defRPr>
-            </a:pPr>
-            <a:r>
-              <a:t>• </a:t>
+                <a:latin typeface="Segoe UI"/>
+              </a:defRPr>
+            </a:pPr>
+            <a:r>
+              <a:t>  </a:t>
             </a:r>
           </a:p>
           <a:p>
             <a:pPr>
               <a:spcBef>
-                <a:spcPts val="2000"/>
+                <a:spcPts val="1600"/>
               </a:spcBef>
-              <a:defRPr sz="2400" b="1">
+              <a:defRPr sz="2200" b="1">
                 <a:solidFill>
                   <a:srgbClr val="212529"/>
                 </a:solidFill>
+                <a:latin typeface="Segoe UI"/>
               </a:defRPr>
             </a:pPr>
             <a:r>
@@ -4975,12 +6488,13 @@
           <a:p>
             <a:pPr>
               <a:spcAft>
-                <a:spcPts val="1200"/>
+                <a:spcPts val="800"/>
               </a:spcAft>
-              <a:defRPr sz="2000">
+              <a:defRPr sz="1800">
                 <a:solidFill>
                   <a:srgbClr val="6C757D"/>
                 </a:solidFill>
+                <a:latin typeface="Segoe UI"/>
               </a:defRPr>
             </a:pPr>
             <a:r>
@@ -5009,14 +6523,100 @@
       <p:grpSpPr/>
       <p:sp>
         <p:nvSpPr>
-          <p:cNvPr id="2" name="TextBox 1"/>
+          <p:cNvPr id="2" name="Rectangle 1"/>
+          <p:cNvSpPr/>
+          <p:nvPr/>
+        </p:nvSpPr>
+        <p:spPr>
+          <a:xfrm>
+            <a:off x="0" y="0"/>
+            <a:ext cx="12191695" cy="6858000"/>
+          </a:xfrm>
+          <a:prstGeom prst="rect">
+            <a:avLst/>
+          </a:prstGeom>
+          <a:solidFill>
+            <a:srgbClr val="FFFFFF"/>
+          </a:solidFill>
+          <a:ln>
+            <a:noFill/>
+          </a:ln>
+        </p:spPr>
+        <p:style>
+          <a:lnRef idx="1">
+            <a:schemeClr val="accent1"/>
+          </a:lnRef>
+          <a:fillRef idx="3">
+            <a:schemeClr val="accent1"/>
+          </a:fillRef>
+          <a:effectRef idx="2">
+            <a:schemeClr val="accent1"/>
+          </a:effectRef>
+          <a:fontRef idx="minor">
+            <a:schemeClr val="lt1"/>
+          </a:fontRef>
+        </p:style>
+        <p:txBody>
+          <a:bodyPr rtlCol="0" anchor="ctr"/>
+          <a:lstStyle/>
+          <a:p>
+            <a:pPr algn="ctr"/>
+          </a:p>
+        </p:txBody>
+      </p:sp>
+      <p:sp>
+        <p:nvSpPr>
+          <p:cNvPr id="3" name="Rectangle 2"/>
+          <p:cNvSpPr/>
+          <p:nvPr/>
+        </p:nvSpPr>
+        <p:spPr>
+          <a:xfrm>
+            <a:off x="0" y="0"/>
+            <a:ext cx="137160" cy="6858000"/>
+          </a:xfrm>
+          <a:prstGeom prst="rect">
+            <a:avLst/>
+          </a:prstGeom>
+          <a:solidFill>
+            <a:srgbClr val="7C4DFF"/>
+          </a:solidFill>
+          <a:ln>
+            <a:noFill/>
+          </a:ln>
+        </p:spPr>
+        <p:style>
+          <a:lnRef idx="1">
+            <a:schemeClr val="accent1"/>
+          </a:lnRef>
+          <a:fillRef idx="3">
+            <a:schemeClr val="accent1"/>
+          </a:fillRef>
+          <a:effectRef idx="2">
+            <a:schemeClr val="accent1"/>
+          </a:effectRef>
+          <a:fontRef idx="minor">
+            <a:schemeClr val="lt1"/>
+          </a:fontRef>
+        </p:style>
+        <p:txBody>
+          <a:bodyPr rtlCol="0" anchor="ctr"/>
+          <a:lstStyle/>
+          <a:p>
+            <a:pPr algn="ctr"/>
+          </a:p>
+        </p:txBody>
+      </p:sp>
+      <p:sp>
+        <p:nvSpPr>
+          <p:cNvPr id="4" name="TextBox 3"/>
           <p:cNvSpPr txBox="1"/>
           <p:nvPr/>
         </p:nvSpPr>
         <p:spPr>
           <a:xfrm>
-            <a:off x="457200" y="274320"/>
-            <a:ext cx="11277295" cy="914400"/>
+            <a:off x="731520" y="365760"/>
+            <a:ext cx="10728655" cy="914400"/>
           </a:xfrm>
           <a:prstGeom prst="rect">
             <a:avLst/>
@@ -5032,8 +6632,9 @@
             <a:pPr>
               <a:defRPr sz="4000" b="1">
                 <a:solidFill>
-                  <a:srgbClr val="DC3545"/>
-                </a:solidFill>
+                  <a:srgbClr val="7C4DFF"/>
+                </a:solidFill>
+                <a:latin typeface="Segoe UI"/>
               </a:defRPr>
             </a:pPr>
             <a:r>
@@ -5044,14 +6645,57 @@
       </p:sp>
       <p:sp>
         <p:nvSpPr>
-          <p:cNvPr id="3" name="TextBox 2"/>
+          <p:cNvPr id="5" name="Rectangle 4"/>
+          <p:cNvSpPr/>
+          <p:nvPr/>
+        </p:nvSpPr>
+        <p:spPr>
+          <a:xfrm>
+            <a:off x="731520" y="1188720"/>
+            <a:ext cx="1371600" cy="45720"/>
+          </a:xfrm>
+          <a:prstGeom prst="rect">
+            <a:avLst/>
+          </a:prstGeom>
+          <a:solidFill>
+            <a:srgbClr val="7C4DFF"/>
+          </a:solidFill>
+          <a:ln>
+            <a:noFill/>
+          </a:ln>
+        </p:spPr>
+        <p:style>
+          <a:lnRef idx="1">
+            <a:schemeClr val="accent1"/>
+          </a:lnRef>
+          <a:fillRef idx="3">
+            <a:schemeClr val="accent1"/>
+          </a:fillRef>
+          <a:effectRef idx="2">
+            <a:schemeClr val="accent1"/>
+          </a:effectRef>
+          <a:fontRef idx="minor">
+            <a:schemeClr val="lt1"/>
+          </a:fontRef>
+        </p:style>
+        <p:txBody>
+          <a:bodyPr rtlCol="0" anchor="ctr"/>
+          <a:lstStyle/>
+          <a:p>
+            <a:pPr algn="ctr"/>
+          </a:p>
+        </p:txBody>
+      </p:sp>
+      <p:sp>
+        <p:nvSpPr>
+          <p:cNvPr id="6" name="TextBox 5"/>
           <p:cNvSpPr txBox="1"/>
           <p:nvPr/>
         </p:nvSpPr>
         <p:spPr>
           <a:xfrm>
-            <a:off x="457200" y="1280160"/>
-            <a:ext cx="11277295" cy="5029200"/>
+            <a:off x="731520" y="1463040"/>
+            <a:ext cx="10728655" cy="5029200"/>
           </a:xfrm>
           <a:prstGeom prst="rect">
             <a:avLst/>
@@ -5068,14 +6712,15 @@
               <a:spcBef>
                 <a:spcPts val="1200"/>
               </a:spcBef>
-              <a:defRPr sz="2400">
+              <a:defRPr sz="2200">
                 <a:solidFill>
                   <a:srgbClr val="212529"/>
                 </a:solidFill>
-              </a:defRPr>
-            </a:pPr>
-            <a:r>
-              <a:t>• TDK CLI is the 'Kubernetes-free' alternative for local microservice development.</a:t>
+                <a:latin typeface="Segoe UI"/>
+              </a:defRPr>
+            </a:pPr>
+            <a:r>
+              <a:t>  TDK CLI is the 'Kubernetes-free' alternative for local microservice development</a:t>
             </a:r>
           </a:p>
           <a:p>
@@ -5083,74 +6728,143 @@
               <a:spcBef>
                 <a:spcPts val="1200"/>
               </a:spcBef>
-              <a:defRPr sz="2400">
+              <a:defRPr sz="2200">
                 <a:solidFill>
                   <a:srgbClr val="212529"/>
                 </a:solidFill>
-              </a:defRPr>
-            </a:pPr>
-            <a:r>
-              <a:t>• </a:t>
+                <a:latin typeface="Segoe UI"/>
+              </a:defRPr>
+            </a:pPr>
+            <a:r>
+              <a:t>  </a:t>
             </a:r>
           </a:p>
           <a:p>
             <a:pPr>
               <a:spcBef>
-                <a:spcPts val="1200"/>
+                <a:spcPts val="1600"/>
               </a:spcBef>
-              <a:defRPr sz="2400">
+              <a:defRPr sz="2200" b="1">
                 <a:solidFill>
                   <a:srgbClr val="212529"/>
                 </a:solidFill>
-              </a:defRPr>
-            </a:pPr>
-            <a:r>
-              <a:t>• For: Teams building microservices who don't want to learn Kubernetes</a:t>
+                <a:latin typeface="Segoe UI"/>
+              </a:defRPr>
+            </a:pPr>
+            <a:r>
+              <a:t>For:</a:t>
+            </a:r>
+          </a:p>
+          <a:p>
+            <a:pPr>
+              <a:spcAft>
+                <a:spcPts val="800"/>
+              </a:spcAft>
+              <a:defRPr sz="1800">
+                <a:solidFill>
+                  <a:srgbClr val="6C757D"/>
+                </a:solidFill>
+                <a:latin typeface="Segoe UI"/>
+              </a:defRPr>
+            </a:pPr>
+            <a:r>
+              <a:t>Teams building microservices who don't want to learn Kubernetes</a:t>
             </a:r>
           </a:p>
           <a:p>
             <a:pPr>
               <a:spcBef>
-                <a:spcPts val="1200"/>
+                <a:spcPts val="1600"/>
               </a:spcBef>
-              <a:defRPr sz="2400">
+              <a:defRPr sz="2200" b="1">
                 <a:solidFill>
                   <a:srgbClr val="212529"/>
                 </a:solidFill>
-              </a:defRPr>
-            </a:pPr>
-            <a:r>
-              <a:t>• Who: Need to run 5-120+ services locally</a:t>
+                <a:latin typeface="Segoe UI"/>
+              </a:defRPr>
+            </a:pPr>
+            <a:r>
+              <a:t>Who:</a:t>
+            </a:r>
+          </a:p>
+          <a:p>
+            <a:pPr>
+              <a:spcAft>
+                <a:spcPts val="800"/>
+              </a:spcAft>
+              <a:defRPr sz="1800">
+                <a:solidFill>
+                  <a:srgbClr val="6C757D"/>
+                </a:solidFill>
+                <a:latin typeface="Segoe UI"/>
+              </a:defRPr>
+            </a:pPr>
+            <a:r>
+              <a:t>Need to run 5-120+ services locally</a:t>
             </a:r>
           </a:p>
           <a:p>
             <a:pPr>
               <a:spcBef>
-                <a:spcPts val="1200"/>
+                <a:spcPts val="1600"/>
               </a:spcBef>
-              <a:defRPr sz="2400">
+              <a:defRPr sz="2200" b="1">
                 <a:solidFill>
                   <a:srgbClr val="212529"/>
                 </a:solidFill>
-              </a:defRPr>
-            </a:pPr>
-            <a:r>
-              <a:t>• Unlike: Garden, Skaffold, DevSpace (which require K8s knowledge)</a:t>
+                <a:latin typeface="Segoe UI"/>
+              </a:defRPr>
+            </a:pPr>
+            <a:r>
+              <a:t>Unlike:</a:t>
+            </a:r>
+          </a:p>
+          <a:p>
+            <a:pPr>
+              <a:spcAft>
+                <a:spcPts val="800"/>
+              </a:spcAft>
+              <a:defRPr sz="1800">
+                <a:solidFill>
+                  <a:srgbClr val="6C757D"/>
+                </a:solidFill>
+                <a:latin typeface="Segoe UI"/>
+              </a:defRPr>
+            </a:pPr>
+            <a:r>
+              <a:t>Garden, Skaffold, DevSpace (which require K8s knowledge)</a:t>
             </a:r>
           </a:p>
           <a:p>
             <a:pPr>
               <a:spcBef>
-                <a:spcPts val="1200"/>
+                <a:spcPts val="1600"/>
               </a:spcBef>
-              <a:defRPr sz="2400">
+              <a:defRPr sz="2200" b="1">
                 <a:solidFill>
                   <a:srgbClr val="212529"/>
                 </a:solidFill>
-              </a:defRPr>
-            </a:pPr>
-            <a:r>
-              <a:t>• We: Generate configs from simple JSON manifests using pure Docker</a:t>
+                <a:latin typeface="Segoe UI"/>
+              </a:defRPr>
+            </a:pPr>
+            <a:r>
+              <a:t>We:</a:t>
+            </a:r>
+          </a:p>
+          <a:p>
+            <a:pPr>
+              <a:spcAft>
+                <a:spcPts val="800"/>
+              </a:spcAft>
+              <a:defRPr sz="1800">
+                <a:solidFill>
+                  <a:srgbClr val="6C757D"/>
+                </a:solidFill>
+                <a:latin typeface="Segoe UI"/>
+              </a:defRPr>
+            </a:pPr>
+            <a:r>
+              <a:t>Generate configs from simple JSON manifests using pure Docker</a:t>
             </a:r>
           </a:p>
         </p:txBody>
@@ -5175,14 +6889,100 @@
       <p:grpSpPr/>
       <p:sp>
         <p:nvSpPr>
-          <p:cNvPr id="2" name="TextBox 1"/>
+          <p:cNvPr id="2" name="Rectangle 1"/>
+          <p:cNvSpPr/>
+          <p:nvPr/>
+        </p:nvSpPr>
+        <p:spPr>
+          <a:xfrm>
+            <a:off x="0" y="0"/>
+            <a:ext cx="12191695" cy="6858000"/>
+          </a:xfrm>
+          <a:prstGeom prst="rect">
+            <a:avLst/>
+          </a:prstGeom>
+          <a:solidFill>
+            <a:srgbClr val="FFFFFF"/>
+          </a:solidFill>
+          <a:ln>
+            <a:noFill/>
+          </a:ln>
+        </p:spPr>
+        <p:style>
+          <a:lnRef idx="1">
+            <a:schemeClr val="accent1"/>
+          </a:lnRef>
+          <a:fillRef idx="3">
+            <a:schemeClr val="accent1"/>
+          </a:fillRef>
+          <a:effectRef idx="2">
+            <a:schemeClr val="accent1"/>
+          </a:effectRef>
+          <a:fontRef idx="minor">
+            <a:schemeClr val="lt1"/>
+          </a:fontRef>
+        </p:style>
+        <p:txBody>
+          <a:bodyPr rtlCol="0" anchor="ctr"/>
+          <a:lstStyle/>
+          <a:p>
+            <a:pPr algn="ctr"/>
+          </a:p>
+        </p:txBody>
+      </p:sp>
+      <p:sp>
+        <p:nvSpPr>
+          <p:cNvPr id="3" name="Rectangle 2"/>
+          <p:cNvSpPr/>
+          <p:nvPr/>
+        </p:nvSpPr>
+        <p:spPr>
+          <a:xfrm>
+            <a:off x="0" y="0"/>
+            <a:ext cx="137160" cy="6858000"/>
+          </a:xfrm>
+          <a:prstGeom prst="rect">
+            <a:avLst/>
+          </a:prstGeom>
+          <a:solidFill>
+            <a:srgbClr val="7C4DFF"/>
+          </a:solidFill>
+          <a:ln>
+            <a:noFill/>
+          </a:ln>
+        </p:spPr>
+        <p:style>
+          <a:lnRef idx="1">
+            <a:schemeClr val="accent1"/>
+          </a:lnRef>
+          <a:fillRef idx="3">
+            <a:schemeClr val="accent1"/>
+          </a:fillRef>
+          <a:effectRef idx="2">
+            <a:schemeClr val="accent1"/>
+          </a:effectRef>
+          <a:fontRef idx="minor">
+            <a:schemeClr val="lt1"/>
+          </a:fontRef>
+        </p:style>
+        <p:txBody>
+          <a:bodyPr rtlCol="0" anchor="ctr"/>
+          <a:lstStyle/>
+          <a:p>
+            <a:pPr algn="ctr"/>
+          </a:p>
+        </p:txBody>
+      </p:sp>
+      <p:sp>
+        <p:nvSpPr>
+          <p:cNvPr id="4" name="TextBox 3"/>
           <p:cNvSpPr txBox="1"/>
           <p:nvPr/>
         </p:nvSpPr>
         <p:spPr>
           <a:xfrm>
-            <a:off x="457200" y="274320"/>
-            <a:ext cx="11277295" cy="914400"/>
+            <a:off x="731520" y="365760"/>
+            <a:ext cx="10728655" cy="914400"/>
           </a:xfrm>
           <a:prstGeom prst="rect">
             <a:avLst/>
@@ -5198,26 +6998,70 @@
             <a:pPr>
               <a:defRPr sz="4000" b="1">
                 <a:solidFill>
-                  <a:srgbClr val="28A745"/>
-                </a:solidFill>
-              </a:defRPr>
-            </a:pPr>
-            <a:r>
-              <a:t>Marketing Messaging That Works</a:t>
-            </a:r>
-          </a:p>
-        </p:txBody>
-      </p:sp>
-      <p:sp>
-        <p:nvSpPr>
-          <p:cNvPr id="3" name="TextBox 2"/>
+                  <a:srgbClr val="7C4DFF"/>
+                </a:solidFill>
+                <a:latin typeface="Segoe UI"/>
+              </a:defRPr>
+            </a:pPr>
+            <a:r>
+              <a:t>Marketing Messaging</a:t>
+            </a:r>
+          </a:p>
+        </p:txBody>
+      </p:sp>
+      <p:sp>
+        <p:nvSpPr>
+          <p:cNvPr id="5" name="Rectangle 4"/>
+          <p:cNvSpPr/>
+          <p:nvPr/>
+        </p:nvSpPr>
+        <p:spPr>
+          <a:xfrm>
+            <a:off x="731520" y="1188720"/>
+            <a:ext cx="1371600" cy="45720"/>
+          </a:xfrm>
+          <a:prstGeom prst="rect">
+            <a:avLst/>
+          </a:prstGeom>
+          <a:solidFill>
+            <a:srgbClr val="7C4DFF"/>
+          </a:solidFill>
+          <a:ln>
+            <a:noFill/>
+          </a:ln>
+        </p:spPr>
+        <p:style>
+          <a:lnRef idx="1">
+            <a:schemeClr val="accent1"/>
+          </a:lnRef>
+          <a:fillRef idx="3">
+            <a:schemeClr val="accent1"/>
+          </a:fillRef>
+          <a:effectRef idx="2">
+            <a:schemeClr val="accent1"/>
+          </a:effectRef>
+          <a:fontRef idx="minor">
+            <a:schemeClr val="lt1"/>
+          </a:fontRef>
+        </p:style>
+        <p:txBody>
+          <a:bodyPr rtlCol="0" anchor="ctr"/>
+          <a:lstStyle/>
+          <a:p>
+            <a:pPr algn="ctr"/>
+          </a:p>
+        </p:txBody>
+      </p:sp>
+      <p:sp>
+        <p:nvSpPr>
+          <p:cNvPr id="6" name="TextBox 5"/>
           <p:cNvSpPr txBox="1"/>
           <p:nvPr/>
         </p:nvSpPr>
         <p:spPr>
           <a:xfrm>
-            <a:off x="457200" y="1280160"/>
-            <a:ext cx="11277295" cy="5029200"/>
+            <a:off x="731520" y="1463040"/>
+            <a:ext cx="10728655" cy="5029200"/>
           </a:xfrm>
           <a:prstGeom prst="rect">
             <a:avLst/>
@@ -5232,12 +7076,13 @@
           <a:p>
             <a:pPr>
               <a:spcBef>
-                <a:spcPts val="2000"/>
+                <a:spcPts val="1600"/>
               </a:spcBef>
-              <a:defRPr sz="2400" b="1">
+              <a:defRPr sz="2200" b="1">
                 <a:solidFill>
                   <a:srgbClr val="212529"/>
                 </a:solidFill>
+                <a:latin typeface="Segoe UI"/>
               </a:defRPr>
             </a:pPr>
             <a:r>
@@ -5247,12 +7092,13 @@
           <a:p>
             <a:pPr>
               <a:spcAft>
-                <a:spcPts val="1200"/>
+                <a:spcPts val="800"/>
               </a:spcAft>
-              <a:defRPr sz="2000">
+              <a:defRPr sz="1800">
                 <a:solidFill>
                   <a:srgbClr val="6C757D"/>
                 </a:solidFill>
+                <a:latin typeface="Segoe UI"/>
               </a:defRPr>
             </a:pPr>
             <a:r>
@@ -5262,12 +7108,13 @@
           <a:p>
             <a:pPr>
               <a:spcBef>
-                <a:spcPts val="2000"/>
+                <a:spcPts val="1600"/>
               </a:spcBef>
-              <a:defRPr sz="2400" b="1">
+              <a:defRPr sz="2200" b="1">
                 <a:solidFill>
                   <a:srgbClr val="212529"/>
                 </a:solidFill>
+                <a:latin typeface="Segoe UI"/>
               </a:defRPr>
             </a:pPr>
             <a:r>
@@ -5277,12 +7124,13 @@
           <a:p>
             <a:pPr>
               <a:spcAft>
-                <a:spcPts val="1200"/>
+                <a:spcPts val="800"/>
               </a:spcAft>
-              <a:defRPr sz="2000">
+              <a:defRPr sz="1800">
                 <a:solidFill>
                   <a:srgbClr val="6C757D"/>
                 </a:solidFill>
+                <a:latin typeface="Segoe UI"/>
               </a:defRPr>
             </a:pPr>
             <a:r>
@@ -5294,25 +7142,27 @@
               <a:spcBef>
                 <a:spcPts val="1200"/>
               </a:spcBef>
-              <a:defRPr sz="2400">
+              <a:defRPr sz="2200">
                 <a:solidFill>
                   <a:srgbClr val="212529"/>
                 </a:solidFill>
-              </a:defRPr>
-            </a:pPr>
-            <a:r>
-              <a:t>• </a:t>
+                <a:latin typeface="Segoe UI"/>
+              </a:defRPr>
+            </a:pPr>
+            <a:r>
+              <a:t>  </a:t>
             </a:r>
           </a:p>
           <a:p>
             <a:pPr>
               <a:spcBef>
-                <a:spcPts val="2000"/>
+                <a:spcPts val="1600"/>
               </a:spcBef>
-              <a:defRPr sz="2400" b="1">
+              <a:defRPr sz="2200" b="1">
                 <a:solidFill>
                   <a:srgbClr val="212529"/>
                 </a:solidFill>
+                <a:latin typeface="Segoe UI"/>
               </a:defRPr>
             </a:pPr>
             <a:r>
@@ -5322,12 +7172,13 @@
           <a:p>
             <a:pPr>
               <a:spcAft>
-                <a:spcPts val="1200"/>
+                <a:spcPts val="800"/>
               </a:spcAft>
-              <a:defRPr sz="2000">
+              <a:defRPr sz="1800">
                 <a:solidFill>
                   <a:srgbClr val="6C757D"/>
                 </a:solidFill>
+                <a:latin typeface="Segoe UI"/>
               </a:defRPr>
             </a:pPr>
             <a:r>
@@ -5337,12 +7188,13 @@
           <a:p>
             <a:pPr>
               <a:spcBef>
-                <a:spcPts val="2000"/>
+                <a:spcPts val="1600"/>
               </a:spcBef>
-              <a:defRPr sz="2400" b="1">
+              <a:defRPr sz="2200" b="1">
                 <a:solidFill>
                   <a:srgbClr val="212529"/>
                 </a:solidFill>
+                <a:latin typeface="Segoe UI"/>
               </a:defRPr>
             </a:pPr>
             <a:r>
@@ -5352,12 +7204,13 @@
           <a:p>
             <a:pPr>
               <a:spcAft>
-                <a:spcPts val="1200"/>
+                <a:spcPts val="800"/>
               </a:spcAft>
-              <a:defRPr sz="2000">
+              <a:defRPr sz="1800">
                 <a:solidFill>
                   <a:srgbClr val="6C757D"/>
                 </a:solidFill>
+                <a:latin typeface="Segoe UI"/>
               </a:defRPr>
             </a:pPr>
             <a:r>
@@ -5369,25 +7222,27 @@
               <a:spcBef>
                 <a:spcPts val="1200"/>
               </a:spcBef>
-              <a:defRPr sz="2400">
+              <a:defRPr sz="2200">
                 <a:solidFill>
                   <a:srgbClr val="212529"/>
                 </a:solidFill>
-              </a:defRPr>
-            </a:pPr>
-            <a:r>
-              <a:t>• </a:t>
+                <a:latin typeface="Segoe UI"/>
+              </a:defRPr>
+            </a:pPr>
+            <a:r>
+              <a:t>  </a:t>
             </a:r>
           </a:p>
           <a:p>
             <a:pPr>
               <a:spcBef>
-                <a:spcPts val="2000"/>
+                <a:spcPts val="1600"/>
               </a:spcBef>
-              <a:defRPr sz="2400" b="1">
+              <a:defRPr sz="2200" b="1">
                 <a:solidFill>
                   <a:srgbClr val="212529"/>
                 </a:solidFill>
+                <a:latin typeface="Segoe UI"/>
               </a:defRPr>
             </a:pPr>
             <a:r>
@@ -5397,16 +7252,17 @@
           <a:p>
             <a:pPr>
               <a:spcAft>
-                <a:spcPts val="1200"/>
+                <a:spcPts val="800"/>
               </a:spcAft>
-              <a:defRPr sz="2000">
+              <a:defRPr sz="1800">
                 <a:solidFill>
                   <a:srgbClr val="6C757D"/>
                 </a:solidFill>
-              </a:defRPr>
-            </a:pPr>
-            <a:r>
-              <a:t>Zero K8s knowledge required. Any developer can onboard in 30 minutes.</a:t>
+                <a:latin typeface="Segoe UI"/>
+              </a:defRPr>
+            </a:pPr>
+            <a:r>
+              <a:t>Zero K8s knowledge required. Any developer can onboard in 30 minutes</a:t>
             </a:r>
           </a:p>
         </p:txBody>

--- a/TDK_CLI_Competitive_Positioning.pptx
+++ b/TDK_CLI_Competitive_Positioning.pptx
@@ -3212,7 +3212,6 @@
                 <a:solidFill>
                   <a:srgbClr val="212529"/>
                 </a:solidFill>
-                <a:latin typeface="Segoe UI"/>
               </a:defRPr>
             </a:pPr>
             <a:r>
@@ -3228,55 +3227,11 @@
                 <a:solidFill>
                   <a:srgbClr val="6C757D"/>
                 </a:solidFill>
-                <a:latin typeface="Segoe UI"/>
               </a:defRPr>
             </a:pPr>
             <a:r>
               <a:t>The Kubernetes-Free Alternative for Local Microservice Development</a:t>
             </a:r>
-          </a:p>
-        </p:txBody>
-      </p:sp>
-      <p:sp>
-        <p:nvSpPr>
-          <p:cNvPr id="5" name="Oval 4"/>
-          <p:cNvSpPr/>
-          <p:nvPr/>
-        </p:nvSpPr>
-        <p:spPr>
-          <a:xfrm>
-            <a:off x="10058400" y="5029200"/>
-            <a:ext cx="1371600" cy="1371600"/>
-          </a:xfrm>
-          <a:prstGeom prst="ellipse">
-            <a:avLst/>
-          </a:prstGeom>
-          <a:solidFill>
-            <a:srgbClr val="7C4DFF"/>
-          </a:solidFill>
-          <a:ln>
-            <a:noFill/>
-          </a:ln>
-        </p:spPr>
-        <p:style>
-          <a:lnRef idx="1">
-            <a:schemeClr val="accent1"/>
-          </a:lnRef>
-          <a:fillRef idx="3">
-            <a:schemeClr val="accent1"/>
-          </a:fillRef>
-          <a:effectRef idx="2">
-            <a:schemeClr val="accent1"/>
-          </a:effectRef>
-          <a:fontRef idx="minor">
-            <a:schemeClr val="lt1"/>
-          </a:fontRef>
-        </p:style>
-        <p:txBody>
-          <a:bodyPr rtlCol="0" anchor="ctr"/>
-          <a:lstStyle/>
-          <a:p>
-            <a:pPr algn="ctr"/>
           </a:p>
         </p:txBody>
       </p:sp>
@@ -3411,7 +3366,6 @@
                 <a:solidFill>
                   <a:srgbClr val="7C4DFF"/>
                 </a:solidFill>
-                <a:latin typeface="Segoe UI"/>
               </a:defRPr>
             </a:pPr>
             <a:r>
@@ -3493,7 +3447,6 @@
                 <a:solidFill>
                   <a:srgbClr val="212529"/>
                 </a:solidFill>
-                <a:latin typeface="Segoe UI"/>
               </a:defRPr>
             </a:pPr>
             <a:r>
@@ -3509,7 +3462,6 @@
                 <a:solidFill>
                   <a:srgbClr val="6C757D"/>
                 </a:solidFill>
-                <a:latin typeface="Segoe UI"/>
               </a:defRPr>
             </a:pPr>
             <a:r>
@@ -3525,7 +3477,6 @@
                 <a:solidFill>
                   <a:srgbClr val="212529"/>
                 </a:solidFill>
-                <a:latin typeface="Segoe UI"/>
               </a:defRPr>
             </a:pPr>
             <a:r>
@@ -3541,7 +3492,6 @@
                 <a:solidFill>
                   <a:srgbClr val="6C757D"/>
                 </a:solidFill>
-                <a:latin typeface="Segoe UI"/>
               </a:defRPr>
             </a:pPr>
             <a:r>
@@ -3557,7 +3507,6 @@
                 <a:solidFill>
                   <a:srgbClr val="212529"/>
                 </a:solidFill>
-                <a:latin typeface="Segoe UI"/>
               </a:defRPr>
             </a:pPr>
             <a:r>
@@ -3573,7 +3522,6 @@
                 <a:solidFill>
                   <a:srgbClr val="6C757D"/>
                 </a:solidFill>
-                <a:latin typeface="Segoe UI"/>
               </a:defRPr>
             </a:pPr>
             <a:r>
@@ -3589,7 +3537,6 @@
                 <a:solidFill>
                   <a:srgbClr val="212529"/>
                 </a:solidFill>
-                <a:latin typeface="Segoe UI"/>
               </a:defRPr>
             </a:pPr>
             <a:r>
@@ -3605,7 +3552,6 @@
                 <a:solidFill>
                   <a:srgbClr val="6C757D"/>
                 </a:solidFill>
-                <a:latin typeface="Segoe UI"/>
               </a:defRPr>
             </a:pPr>
             <a:r>
@@ -3621,7 +3567,6 @@
                 <a:solidFill>
                   <a:srgbClr val="212529"/>
                 </a:solidFill>
-                <a:latin typeface="Segoe UI"/>
               </a:defRPr>
             </a:pPr>
             <a:r>
@@ -3637,7 +3582,6 @@
                 <a:solidFill>
                   <a:srgbClr val="6C757D"/>
                 </a:solidFill>
-                <a:latin typeface="Segoe UI"/>
               </a:defRPr>
             </a:pPr>
             <a:r>
@@ -3653,7 +3597,6 @@
                 <a:solidFill>
                   <a:srgbClr val="212529"/>
                 </a:solidFill>
-                <a:latin typeface="Segoe UI"/>
               </a:defRPr>
             </a:pPr>
             <a:r>
@@ -3669,7 +3612,6 @@
                 <a:solidFill>
                   <a:srgbClr val="6C757D"/>
                 </a:solidFill>
-                <a:latin typeface="Segoe UI"/>
               </a:defRPr>
             </a:pPr>
             <a:r>
@@ -3809,7 +3751,6 @@
                 <a:solidFill>
                   <a:srgbClr val="7C4DFF"/>
                 </a:solidFill>
-                <a:latin typeface="Segoe UI"/>
               </a:defRPr>
             </a:pPr>
             <a:r>
@@ -3891,7 +3832,6 @@
                 <a:solidFill>
                   <a:srgbClr val="212529"/>
                 </a:solidFill>
-                <a:latin typeface="Segoe UI"/>
               </a:defRPr>
             </a:pPr>
             <a:r>
@@ -3907,7 +3847,6 @@
                 <a:solidFill>
                   <a:srgbClr val="212529"/>
                 </a:solidFill>
-                <a:latin typeface="Segoe UI"/>
               </a:defRPr>
             </a:pPr>
             <a:r>
@@ -3923,7 +3862,6 @@
                 <a:solidFill>
                   <a:srgbClr val="212529"/>
                 </a:solidFill>
-                <a:latin typeface="Segoe UI"/>
               </a:defRPr>
             </a:pPr>
             <a:r>
@@ -3939,7 +3877,6 @@
                 <a:solidFill>
                   <a:srgbClr val="212529"/>
                 </a:solidFill>
-                <a:latin typeface="Segoe UI"/>
               </a:defRPr>
             </a:pPr>
             <a:r>
@@ -3955,7 +3892,6 @@
                 <a:solidFill>
                   <a:srgbClr val="212529"/>
                 </a:solidFill>
-                <a:latin typeface="Segoe UI"/>
               </a:defRPr>
             </a:pPr>
             <a:r>
@@ -3971,7 +3907,6 @@
                 <a:solidFill>
                   <a:srgbClr val="212529"/>
                 </a:solidFill>
-                <a:latin typeface="Segoe UI"/>
               </a:defRPr>
             </a:pPr>
             <a:r>
@@ -3987,7 +3922,6 @@
                 <a:solidFill>
                   <a:srgbClr val="6C757D"/>
                 </a:solidFill>
-                <a:latin typeface="Segoe UI"/>
               </a:defRPr>
             </a:pPr>
             <a:r>
@@ -4003,7 +3937,6 @@
                 <a:solidFill>
                   <a:srgbClr val="212529"/>
                 </a:solidFill>
-                <a:latin typeface="Segoe UI"/>
               </a:defRPr>
             </a:pPr>
             <a:r>
@@ -4019,7 +3952,6 @@
                 <a:solidFill>
                   <a:srgbClr val="6C757D"/>
                 </a:solidFill>
-                <a:latin typeface="Segoe UI"/>
               </a:defRPr>
             </a:pPr>
             <a:r>
@@ -4035,7 +3967,6 @@
                 <a:solidFill>
                   <a:srgbClr val="212529"/>
                 </a:solidFill>
-                <a:latin typeface="Segoe UI"/>
               </a:defRPr>
             </a:pPr>
             <a:r>
@@ -4051,7 +3982,6 @@
                 <a:solidFill>
                   <a:srgbClr val="212529"/>
                 </a:solidFill>
-                <a:latin typeface="Segoe UI"/>
               </a:defRPr>
             </a:pPr>
             <a:r>
@@ -4067,11 +3997,10 @@
                 <a:solidFill>
                   <a:srgbClr val="6C757D"/>
                 </a:solidFill>
-                <a:latin typeface="Segoe UI"/>
-              </a:defRPr>
-            </a:pPr>
-            <a:r>
-              <a:t>Simplicity | Speed of onboarding | Zero K8s tax</a:t>
+              </a:defRPr>
+            </a:pPr>
+            <a:r>
+              <a:t>Simplicity | Speed of onboarding | No K8s barrier</a:t>
             </a:r>
           </a:p>
         </p:txBody>
@@ -4207,7 +4136,6 @@
                 <a:solidFill>
                   <a:srgbClr val="212529"/>
                 </a:solidFill>
-                <a:latin typeface="Segoe UI"/>
               </a:defRPr>
             </a:pPr>
             <a:r>
@@ -4223,55 +4151,11 @@
                 <a:solidFill>
                   <a:srgbClr val="6C757D"/>
                 </a:solidFill>
-                <a:latin typeface="Segoe UI"/>
               </a:defRPr>
             </a:pPr>
             <a:r>
               <a:t>Kubernetes-Free Microservice Development</a:t>
             </a:r>
-          </a:p>
-        </p:txBody>
-      </p:sp>
-      <p:sp>
-        <p:nvSpPr>
-          <p:cNvPr id="5" name="Oval 4"/>
-          <p:cNvSpPr/>
-          <p:nvPr/>
-        </p:nvSpPr>
-        <p:spPr>
-          <a:xfrm>
-            <a:off x="10058400" y="5029200"/>
-            <a:ext cx="1371600" cy="1371600"/>
-          </a:xfrm>
-          <a:prstGeom prst="ellipse">
-            <a:avLst/>
-          </a:prstGeom>
-          <a:solidFill>
-            <a:srgbClr val="7C4DFF"/>
-          </a:solidFill>
-          <a:ln>
-            <a:noFill/>
-          </a:ln>
-        </p:spPr>
-        <p:style>
-          <a:lnRef idx="1">
-            <a:schemeClr val="accent1"/>
-          </a:lnRef>
-          <a:fillRef idx="3">
-            <a:schemeClr val="accent1"/>
-          </a:fillRef>
-          <a:effectRef idx="2">
-            <a:schemeClr val="accent1"/>
-          </a:effectRef>
-          <a:fontRef idx="minor">
-            <a:schemeClr val="lt1"/>
-          </a:fontRef>
-        </p:style>
-        <p:txBody>
-          <a:bodyPr rtlCol="0" anchor="ctr"/>
-          <a:lstStyle/>
-          <a:p>
-            <a:pPr algn="ctr"/>
           </a:p>
         </p:txBody>
       </p:sp>
@@ -4406,11 +4290,10 @@
                 <a:solidFill>
                   <a:srgbClr val="7C4DFF"/>
                 </a:solidFill>
-                <a:latin typeface="Segoe UI"/>
-              </a:defRPr>
-            </a:pPr>
-            <a:r>
-              <a:t>The Problem: The Kubernetes Tax</a:t>
+              </a:defRPr>
+            </a:pPr>
+            <a:r>
+              <a:t>The Problem: The Kubernetes Learning Curve</a:t>
             </a:r>
           </a:p>
         </p:txBody>
@@ -4488,7 +4371,6 @@
                 <a:solidFill>
                   <a:srgbClr val="212529"/>
                 </a:solidFill>
-                <a:latin typeface="Segoe UI"/>
               </a:defRPr>
             </a:pPr>
             <a:r>
@@ -4504,7 +4386,6 @@
                 <a:solidFill>
                   <a:srgbClr val="212529"/>
                 </a:solidFill>
-                <a:latin typeface="Segoe UI"/>
               </a:defRPr>
             </a:pPr>
             <a:r>
@@ -4520,7 +4401,6 @@
                 <a:solidFill>
                   <a:srgbClr val="212529"/>
                 </a:solidFill>
-                <a:latin typeface="Segoe UI"/>
               </a:defRPr>
             </a:pPr>
             <a:r>
@@ -4536,11 +4416,10 @@
                 <a:solidFill>
                   <a:srgbClr val="6C757D"/>
                 </a:solidFill>
-                <a:latin typeface="Segoe UI"/>
-              </a:defRPr>
-            </a:pPr>
-            <a:r>
-              <a:t>'Production-like environments' = hidden K8s complexity</a:t>
+              </a:defRPr>
+            </a:pPr>
+            <a:r>
+              <a:t>'Production-like environments' = hidden complexity</a:t>
             </a:r>
           </a:p>
           <a:p>
@@ -4552,7 +4431,6 @@
                 <a:solidFill>
                   <a:srgbClr val="212529"/>
                 </a:solidFill>
-                <a:latin typeface="Segoe UI"/>
               </a:defRPr>
             </a:pPr>
             <a:r>
@@ -4568,11 +4446,10 @@
                 <a:solidFill>
                   <a:srgbClr val="6C757D"/>
                 </a:solidFill>
-                <a:latin typeface="Segoe UI"/>
-              </a:defRPr>
-            </a:pPr>
-            <a:r>
-              <a:t>Requires K8s cluster knowledge</a:t>
+              </a:defRPr>
+            </a:pPr>
+            <a:r>
+              <a:t>Requires K8s cluster expertise</a:t>
             </a:r>
           </a:p>
           <a:p>
@@ -4584,7 +4461,6 @@
                 <a:solidFill>
                   <a:srgbClr val="212529"/>
                 </a:solidFill>
-                <a:latin typeface="Segoe UI"/>
               </a:defRPr>
             </a:pPr>
             <a:r>
@@ -4600,11 +4476,10 @@
                 <a:solidFill>
                   <a:srgbClr val="6C757D"/>
                 </a:solidFill>
-                <a:latin typeface="Segoe UI"/>
-              </a:defRPr>
-            </a:pPr>
-            <a:r>
-              <a:t>Built for K8s experts</a:t>
+              </a:defRPr>
+            </a:pPr>
+            <a:r>
+              <a:t>Built for K8s specialists</a:t>
             </a:r>
           </a:p>
           <a:p>
@@ -4616,7 +4491,6 @@
                 <a:solidFill>
                   <a:srgbClr val="212529"/>
                 </a:solidFill>
-                <a:latin typeface="Segoe UI"/>
               </a:defRPr>
             </a:pPr>
             <a:r>
@@ -4632,11 +4506,10 @@
                 <a:solidFill>
                   <a:srgbClr val="6C757D"/>
                 </a:solidFill>
-                <a:latin typeface="Segoe UI"/>
-              </a:defRPr>
-            </a:pPr>
-            <a:r>
-              <a:t>Non-platform developers get blocked</a:t>
+              </a:defRPr>
+            </a:pPr>
+            <a:r>
+              <a:t>Regular developers get blocked</a:t>
             </a:r>
           </a:p>
         </p:txBody>
@@ -4772,7 +4645,6 @@
                 <a:solidFill>
                   <a:srgbClr val="7C4DFF"/>
                 </a:solidFill>
-                <a:latin typeface="Segoe UI"/>
               </a:defRPr>
             </a:pPr>
             <a:r>
@@ -4854,7 +4726,6 @@
                 <a:solidFill>
                   <a:srgbClr val="212529"/>
                 </a:solidFill>
-                <a:latin typeface="Segoe UI"/>
               </a:defRPr>
             </a:pPr>
             <a:r>
@@ -4870,7 +4741,6 @@
                 <a:solidFill>
                   <a:srgbClr val="6C757D"/>
                 </a:solidFill>
-                <a:latin typeface="Segoe UI"/>
               </a:defRPr>
             </a:pPr>
             <a:r>
@@ -4886,7 +4756,6 @@
                 <a:solidFill>
                   <a:srgbClr val="212529"/>
                 </a:solidFill>
-                <a:latin typeface="Segoe UI"/>
               </a:defRPr>
             </a:pPr>
             <a:r>
@@ -4902,7 +4771,6 @@
                 <a:solidFill>
                   <a:srgbClr val="6C757D"/>
                 </a:solidFill>
-                <a:latin typeface="Segoe UI"/>
               </a:defRPr>
             </a:pPr>
             <a:r>
@@ -4918,7 +4786,6 @@
                 <a:solidFill>
                   <a:srgbClr val="212529"/>
                 </a:solidFill>
-                <a:latin typeface="Segoe UI"/>
               </a:defRPr>
             </a:pPr>
             <a:r>
@@ -4934,7 +4801,6 @@
                 <a:solidFill>
                   <a:srgbClr val="6C757D"/>
                 </a:solidFill>
-                <a:latin typeface="Segoe UI"/>
               </a:defRPr>
             </a:pPr>
             <a:r>
@@ -4950,7 +4816,6 @@
                 <a:solidFill>
                   <a:srgbClr val="212529"/>
                 </a:solidFill>
-                <a:latin typeface="Segoe UI"/>
               </a:defRPr>
             </a:pPr>
             <a:r>
@@ -4966,7 +4831,6 @@
                 <a:solidFill>
                   <a:srgbClr val="212529"/>
                 </a:solidFill>
-                <a:latin typeface="Segoe UI"/>
               </a:defRPr>
             </a:pPr>
             <a:r>
@@ -4982,7 +4846,6 @@
                 <a:solidFill>
                   <a:srgbClr val="6C757D"/>
                 </a:solidFill>
-                <a:latin typeface="Segoe UI"/>
               </a:defRPr>
             </a:pPr>
             <a:r>
@@ -5122,7 +4985,6 @@
                 <a:solidFill>
                   <a:srgbClr val="7C4DFF"/>
                 </a:solidFill>
-                <a:latin typeface="Segoe UI"/>
               </a:defRPr>
             </a:pPr>
             <a:r>
@@ -5204,7 +5066,6 @@
                 <a:solidFill>
                   <a:srgbClr val="212529"/>
                 </a:solidFill>
-                <a:latin typeface="Segoe UI"/>
               </a:defRPr>
             </a:pPr>
             <a:r>
@@ -5220,7 +5081,6 @@
                 <a:solidFill>
                   <a:srgbClr val="6C757D"/>
                 </a:solidFill>
-                <a:latin typeface="Segoe UI"/>
               </a:defRPr>
             </a:pPr>
             <a:r>
@@ -5236,7 +5096,6 @@
                 <a:solidFill>
                   <a:srgbClr val="212529"/>
                 </a:solidFill>
-                <a:latin typeface="Segoe UI"/>
               </a:defRPr>
             </a:pPr>
             <a:r>
@@ -5252,7 +5111,6 @@
                 <a:solidFill>
                   <a:srgbClr val="6C757D"/>
                 </a:solidFill>
-                <a:latin typeface="Segoe UI"/>
               </a:defRPr>
             </a:pPr>
             <a:r>
@@ -5268,7 +5126,6 @@
                 <a:solidFill>
                   <a:srgbClr val="212529"/>
                 </a:solidFill>
-                <a:latin typeface="Segoe UI"/>
               </a:defRPr>
             </a:pPr>
             <a:r>
@@ -5284,7 +5141,6 @@
                 <a:solidFill>
                   <a:srgbClr val="6C757D"/>
                 </a:solidFill>
-                <a:latin typeface="Segoe UI"/>
               </a:defRPr>
             </a:pPr>
             <a:r>
@@ -5300,7 +5156,6 @@
                 <a:solidFill>
                   <a:srgbClr val="212529"/>
                 </a:solidFill>
-                <a:latin typeface="Segoe UI"/>
               </a:defRPr>
             </a:pPr>
             <a:r>
@@ -5316,7 +5171,6 @@
                 <a:solidFill>
                   <a:srgbClr val="6C757D"/>
                 </a:solidFill>
-                <a:latin typeface="Segoe UI"/>
               </a:defRPr>
             </a:pPr>
             <a:r>
@@ -5332,7 +5186,6 @@
                 <a:solidFill>
                   <a:srgbClr val="212529"/>
                 </a:solidFill>
-                <a:latin typeface="Segoe UI"/>
               </a:defRPr>
             </a:pPr>
             <a:r>
@@ -5348,7 +5201,6 @@
                 <a:solidFill>
                   <a:srgbClr val="6C757D"/>
                 </a:solidFill>
-                <a:latin typeface="Segoe UI"/>
               </a:defRPr>
             </a:pPr>
             <a:r>
@@ -5364,7 +5216,6 @@
                 <a:solidFill>
                   <a:srgbClr val="212529"/>
                 </a:solidFill>
-                <a:latin typeface="Segoe UI"/>
               </a:defRPr>
             </a:pPr>
             <a:r>
@@ -5380,7 +5231,6 @@
                 <a:solidFill>
                   <a:srgbClr val="6C757D"/>
                 </a:solidFill>
-                <a:latin typeface="Segoe UI"/>
               </a:defRPr>
             </a:pPr>
             <a:r>
@@ -5520,7 +5370,6 @@
                 <a:solidFill>
                   <a:srgbClr val="7C4DFF"/>
                 </a:solidFill>
-                <a:latin typeface="Segoe UI"/>
               </a:defRPr>
             </a:pPr>
             <a:r>
@@ -5602,7 +5451,6 @@
                 <a:solidFill>
                   <a:srgbClr val="212529"/>
                 </a:solidFill>
-                <a:latin typeface="Segoe UI"/>
               </a:defRPr>
             </a:pPr>
             <a:r>
@@ -5618,7 +5466,6 @@
                 <a:solidFill>
                   <a:srgbClr val="6C757D"/>
                 </a:solidFill>
-                <a:latin typeface="Segoe UI"/>
               </a:defRPr>
             </a:pPr>
             <a:r>
@@ -5634,7 +5481,6 @@
                 <a:solidFill>
                   <a:srgbClr val="212529"/>
                 </a:solidFill>
-                <a:latin typeface="Segoe UI"/>
               </a:defRPr>
             </a:pPr>
             <a:r>
@@ -5650,7 +5496,6 @@
                 <a:solidFill>
                   <a:srgbClr val="6C757D"/>
                 </a:solidFill>
-                <a:latin typeface="Segoe UI"/>
               </a:defRPr>
             </a:pPr>
             <a:r>
@@ -5666,7 +5511,6 @@
                 <a:solidFill>
                   <a:srgbClr val="212529"/>
                 </a:solidFill>
-                <a:latin typeface="Segoe UI"/>
               </a:defRPr>
             </a:pPr>
             <a:r>
@@ -5682,7 +5526,6 @@
                 <a:solidFill>
                   <a:srgbClr val="6C757D"/>
                 </a:solidFill>
-                <a:latin typeface="Segoe UI"/>
               </a:defRPr>
             </a:pPr>
             <a:r>
@@ -5698,7 +5541,6 @@
                 <a:solidFill>
                   <a:srgbClr val="212529"/>
                 </a:solidFill>
-                <a:latin typeface="Segoe UI"/>
               </a:defRPr>
             </a:pPr>
             <a:r>
@@ -5714,7 +5556,6 @@
                 <a:solidFill>
                   <a:srgbClr val="6C757D"/>
                 </a:solidFill>
-                <a:latin typeface="Segoe UI"/>
               </a:defRPr>
             </a:pPr>
             <a:r>
@@ -5730,7 +5571,6 @@
                 <a:solidFill>
                   <a:srgbClr val="212529"/>
                 </a:solidFill>
-                <a:latin typeface="Segoe UI"/>
               </a:defRPr>
             </a:pPr>
             <a:r>
@@ -5746,7 +5586,6 @@
                 <a:solidFill>
                   <a:srgbClr val="6C757D"/>
                 </a:solidFill>
-                <a:latin typeface="Segoe UI"/>
               </a:defRPr>
             </a:pPr>
             <a:r>
@@ -5762,7 +5601,6 @@
                 <a:solidFill>
                   <a:srgbClr val="212529"/>
                 </a:solidFill>
-                <a:latin typeface="Segoe UI"/>
               </a:defRPr>
             </a:pPr>
             <a:r>
@@ -5778,7 +5616,6 @@
                 <a:solidFill>
                   <a:srgbClr val="6C757D"/>
                 </a:solidFill>
-                <a:latin typeface="Segoe UI"/>
               </a:defRPr>
             </a:pPr>
             <a:r>
@@ -5918,7 +5755,6 @@
                 <a:solidFill>
                   <a:srgbClr val="7C4DFF"/>
                 </a:solidFill>
-                <a:latin typeface="Segoe UI"/>
               </a:defRPr>
             </a:pPr>
             <a:r>
@@ -6000,7 +5836,6 @@
                 <a:solidFill>
                   <a:srgbClr val="212529"/>
                 </a:solidFill>
-                <a:latin typeface="Segoe UI"/>
               </a:defRPr>
             </a:pPr>
             <a:r>
@@ -6016,7 +5851,6 @@
                 <a:solidFill>
                   <a:srgbClr val="212529"/>
                 </a:solidFill>
-                <a:latin typeface="Segoe UI"/>
               </a:defRPr>
             </a:pPr>
             <a:r>
@@ -6032,7 +5866,6 @@
                 <a:solidFill>
                   <a:srgbClr val="212529"/>
                 </a:solidFill>
-                <a:latin typeface="Segoe UI"/>
               </a:defRPr>
             </a:pPr>
             <a:r>
@@ -6048,7 +5881,6 @@
                 <a:solidFill>
                   <a:srgbClr val="212529"/>
                 </a:solidFill>
-                <a:latin typeface="Segoe UI"/>
               </a:defRPr>
             </a:pPr>
             <a:r>
@@ -6064,7 +5896,6 @@
                 <a:solidFill>
                   <a:srgbClr val="212529"/>
                 </a:solidFill>
-                <a:latin typeface="Segoe UI"/>
               </a:defRPr>
             </a:pPr>
             <a:r>
@@ -6080,7 +5911,6 @@
                 <a:solidFill>
                   <a:srgbClr val="212529"/>
                 </a:solidFill>
-                <a:latin typeface="Segoe UI"/>
               </a:defRPr>
             </a:pPr>
             <a:r>
@@ -6096,7 +5926,6 @@
                 <a:solidFill>
                   <a:srgbClr val="212529"/>
                 </a:solidFill>
-                <a:latin typeface="Segoe UI"/>
               </a:defRPr>
             </a:pPr>
             <a:r>
@@ -6112,11 +5941,10 @@
                 <a:solidFill>
                   <a:srgbClr val="6C757D"/>
                 </a:solidFill>
-                <a:latin typeface="Segoe UI"/>
-              </a:defRPr>
-            </a:pPr>
-            <a:r>
-              <a:t>Microservice orchestration WITHOUT the K8s burden</a:t>
+              </a:defRPr>
+            </a:pPr>
+            <a:r>
+              <a:t>Microservice orchestration WITHOUT the K8s complexity</a:t>
             </a:r>
           </a:p>
         </p:txBody>
@@ -6252,7 +6080,6 @@
                 <a:solidFill>
                   <a:srgbClr val="7C4DFF"/>
                 </a:solidFill>
-                <a:latin typeface="Segoe UI"/>
               </a:defRPr>
             </a:pPr>
             <a:r>
@@ -6334,7 +6161,6 @@
                 <a:solidFill>
                   <a:srgbClr val="212529"/>
                 </a:solidFill>
-                <a:latin typeface="Segoe UI"/>
               </a:defRPr>
             </a:pPr>
             <a:r>
@@ -6350,7 +6176,6 @@
                 <a:solidFill>
                   <a:srgbClr val="6C757D"/>
                 </a:solidFill>
-                <a:latin typeface="Segoe UI"/>
               </a:defRPr>
             </a:pPr>
             <a:r>
@@ -6366,7 +6191,6 @@
                 <a:solidFill>
                   <a:srgbClr val="212529"/>
                 </a:solidFill>
-                <a:latin typeface="Segoe UI"/>
               </a:defRPr>
             </a:pPr>
             <a:r>
@@ -6382,7 +6206,6 @@
                 <a:solidFill>
                   <a:srgbClr val="6C757D"/>
                 </a:solidFill>
-                <a:latin typeface="Segoe UI"/>
               </a:defRPr>
             </a:pPr>
             <a:r>
@@ -6398,7 +6221,6 @@
                 <a:solidFill>
                   <a:srgbClr val="212529"/>
                 </a:solidFill>
-                <a:latin typeface="Segoe UI"/>
               </a:defRPr>
             </a:pPr>
             <a:r>
@@ -6414,7 +6236,6 @@
                 <a:solidFill>
                   <a:srgbClr val="6C757D"/>
                 </a:solidFill>
-                <a:latin typeface="Segoe UI"/>
               </a:defRPr>
             </a:pPr>
             <a:r>
@@ -6430,7 +6251,6 @@
                 <a:solidFill>
                   <a:srgbClr val="212529"/>
                 </a:solidFill>
-                <a:latin typeface="Segoe UI"/>
               </a:defRPr>
             </a:pPr>
             <a:r>
@@ -6446,7 +6266,6 @@
                 <a:solidFill>
                   <a:srgbClr val="6C757D"/>
                 </a:solidFill>
-                <a:latin typeface="Segoe UI"/>
               </a:defRPr>
             </a:pPr>
             <a:r>
@@ -6462,7 +6281,6 @@
                 <a:solidFill>
                   <a:srgbClr val="212529"/>
                 </a:solidFill>
-                <a:latin typeface="Segoe UI"/>
               </a:defRPr>
             </a:pPr>
             <a:r>
@@ -6478,7 +6296,6 @@
                 <a:solidFill>
                   <a:srgbClr val="212529"/>
                 </a:solidFill>
-                <a:latin typeface="Segoe UI"/>
               </a:defRPr>
             </a:pPr>
             <a:r>
@@ -6494,7 +6311,6 @@
                 <a:solidFill>
                   <a:srgbClr val="6C757D"/>
                 </a:solidFill>
-                <a:latin typeface="Segoe UI"/>
               </a:defRPr>
             </a:pPr>
             <a:r>
@@ -6634,7 +6450,6 @@
                 <a:solidFill>
                   <a:srgbClr val="7C4DFF"/>
                 </a:solidFill>
-                <a:latin typeface="Segoe UI"/>
               </a:defRPr>
             </a:pPr>
             <a:r>
@@ -6716,7 +6531,6 @@
                 <a:solidFill>
                   <a:srgbClr val="212529"/>
                 </a:solidFill>
-                <a:latin typeface="Segoe UI"/>
               </a:defRPr>
             </a:pPr>
             <a:r>
@@ -6732,7 +6546,6 @@
                 <a:solidFill>
                   <a:srgbClr val="212529"/>
                 </a:solidFill>
-                <a:latin typeface="Segoe UI"/>
               </a:defRPr>
             </a:pPr>
             <a:r>
@@ -6748,7 +6561,6 @@
                 <a:solidFill>
                   <a:srgbClr val="212529"/>
                 </a:solidFill>
-                <a:latin typeface="Segoe UI"/>
               </a:defRPr>
             </a:pPr>
             <a:r>
@@ -6764,7 +6576,6 @@
                 <a:solidFill>
                   <a:srgbClr val="6C757D"/>
                 </a:solidFill>
-                <a:latin typeface="Segoe UI"/>
               </a:defRPr>
             </a:pPr>
             <a:r>
@@ -6780,7 +6591,6 @@
                 <a:solidFill>
                   <a:srgbClr val="212529"/>
                 </a:solidFill>
-                <a:latin typeface="Segoe UI"/>
               </a:defRPr>
             </a:pPr>
             <a:r>
@@ -6796,7 +6606,6 @@
                 <a:solidFill>
                   <a:srgbClr val="6C757D"/>
                 </a:solidFill>
-                <a:latin typeface="Segoe UI"/>
               </a:defRPr>
             </a:pPr>
             <a:r>
@@ -6812,7 +6621,6 @@
                 <a:solidFill>
                   <a:srgbClr val="212529"/>
                 </a:solidFill>
-                <a:latin typeface="Segoe UI"/>
               </a:defRPr>
             </a:pPr>
             <a:r>
@@ -6828,7 +6636,6 @@
                 <a:solidFill>
                   <a:srgbClr val="6C757D"/>
                 </a:solidFill>
-                <a:latin typeface="Segoe UI"/>
               </a:defRPr>
             </a:pPr>
             <a:r>
@@ -6844,7 +6651,6 @@
                 <a:solidFill>
                   <a:srgbClr val="212529"/>
                 </a:solidFill>
-                <a:latin typeface="Segoe UI"/>
               </a:defRPr>
             </a:pPr>
             <a:r>
@@ -6860,7 +6666,6 @@
                 <a:solidFill>
                   <a:srgbClr val="6C757D"/>
                 </a:solidFill>
-                <a:latin typeface="Segoe UI"/>
               </a:defRPr>
             </a:pPr>
             <a:r>
@@ -7000,7 +6805,6 @@
                 <a:solidFill>
                   <a:srgbClr val="7C4DFF"/>
                 </a:solidFill>
-                <a:latin typeface="Segoe UI"/>
               </a:defRPr>
             </a:pPr>
             <a:r>
@@ -7082,7 +6886,6 @@
                 <a:solidFill>
                   <a:srgbClr val="212529"/>
                 </a:solidFill>
-                <a:latin typeface="Segoe UI"/>
               </a:defRPr>
             </a:pPr>
             <a:r>
@@ -7098,7 +6901,6 @@
                 <a:solidFill>
                   <a:srgbClr val="6C757D"/>
                 </a:solidFill>
-                <a:latin typeface="Segoe UI"/>
               </a:defRPr>
             </a:pPr>
             <a:r>
@@ -7114,7 +6916,6 @@
                 <a:solidFill>
                   <a:srgbClr val="212529"/>
                 </a:solidFill>
-                <a:latin typeface="Segoe UI"/>
               </a:defRPr>
             </a:pPr>
             <a:r>
@@ -7130,7 +6931,6 @@
                 <a:solidFill>
                   <a:srgbClr val="6C757D"/>
                 </a:solidFill>
-                <a:latin typeface="Segoe UI"/>
               </a:defRPr>
             </a:pPr>
             <a:r>
@@ -7146,7 +6946,6 @@
                 <a:solidFill>
                   <a:srgbClr val="212529"/>
                 </a:solidFill>
-                <a:latin typeface="Segoe UI"/>
               </a:defRPr>
             </a:pPr>
             <a:r>
@@ -7162,7 +6961,6 @@
                 <a:solidFill>
                   <a:srgbClr val="212529"/>
                 </a:solidFill>
-                <a:latin typeface="Segoe UI"/>
               </a:defRPr>
             </a:pPr>
             <a:r>
@@ -7178,7 +6976,6 @@
                 <a:solidFill>
                   <a:srgbClr val="6C757D"/>
                 </a:solidFill>
-                <a:latin typeface="Segoe UI"/>
               </a:defRPr>
             </a:pPr>
             <a:r>
@@ -7194,7 +6991,6 @@
                 <a:solidFill>
                   <a:srgbClr val="212529"/>
                 </a:solidFill>
-                <a:latin typeface="Segoe UI"/>
               </a:defRPr>
             </a:pPr>
             <a:r>
@@ -7210,7 +7006,6 @@
                 <a:solidFill>
                   <a:srgbClr val="6C757D"/>
                 </a:solidFill>
-                <a:latin typeface="Segoe UI"/>
               </a:defRPr>
             </a:pPr>
             <a:r>
@@ -7226,7 +7021,6 @@
                 <a:solidFill>
                   <a:srgbClr val="212529"/>
                 </a:solidFill>
-                <a:latin typeface="Segoe UI"/>
               </a:defRPr>
             </a:pPr>
             <a:r>
@@ -7242,7 +7036,6 @@
                 <a:solidFill>
                   <a:srgbClr val="212529"/>
                 </a:solidFill>
-                <a:latin typeface="Segoe UI"/>
               </a:defRPr>
             </a:pPr>
             <a:r>
@@ -7258,7 +7051,6 @@
                 <a:solidFill>
                   <a:srgbClr val="6C757D"/>
                 </a:solidFill>
-                <a:latin typeface="Segoe UI"/>
               </a:defRPr>
             </a:pPr>
             <a:r>

--- a/TDK_CLI_Competitive_Positioning.pptx
+++ b/TDK_CLI_Competitive_Positioning.pptx
@@ -17,6 +17,10 @@
     <p:sldId id="265" r:id="rId16"/>
     <p:sldId id="266" r:id="rId17"/>
     <p:sldId id="267" r:id="rId18"/>
+    <p:sldId id="268" r:id="rId20"/>
+    <p:sldId id="269" r:id="rId21"/>
+    <p:sldId id="270" r:id="rId22"/>
+    <p:sldId id="271" r:id="rId23"/>
   </p:sldIdLst>
   <p:sldSz cx="12191695" cy="6858000" type="screen4x3"/>
   <p:notesSz cx="6858000" cy="9144000"/>
@@ -116,6 +120,1196 @@
     </a:lvl9pPr>
   </p:defaultTextStyle>
 </p:presentation>
+</file>
+
+<file path=ppt/notesMasters/notesMaster1.xml><?xml version="1.0" encoding="utf-8"?>
+<p:notesMaster xmlns:a="http://schemas.openxmlformats.org/drawingml/2006/main" xmlns:p="http://schemas.openxmlformats.org/presentationml/2006/main" xmlns:r="http://schemas.openxmlformats.org/officeDocument/2006/relationships">
+  <p:cSld>
+    <p:bg>
+      <p:bgRef idx="1001">
+        <a:schemeClr val="bg1"/>
+      </p:bgRef>
+    </p:bg>
+    <p:spTree>
+      <p:nvGrpSpPr>
+        <p:cNvPr id="1" name=""/>
+        <p:cNvGrpSpPr/>
+        <p:nvPr/>
+      </p:nvGrpSpPr>
+      <p:grpSpPr>
+        <a:xfrm>
+          <a:off x="0" y="0"/>
+          <a:ext cx="0" cy="0"/>
+          <a:chOff x="0" y="0"/>
+          <a:chExt cx="0" cy="0"/>
+        </a:xfrm>
+      </p:grpSpPr>
+      <p:sp>
+        <p:nvSpPr>
+          <p:cNvPr id="2" name="Header Placeholder 1"/>
+          <p:cNvSpPr>
+            <a:spLocks noGrp="1"/>
+          </p:cNvSpPr>
+          <p:nvPr>
+            <p:ph type="hdr" sz="quarter"/>
+          </p:nvPr>
+        </p:nvSpPr>
+        <p:spPr>
+          <a:xfrm>
+            <a:off x="0" y="0"/>
+            <a:ext cx="2971800" cy="457200"/>
+          </a:xfrm>
+          <a:prstGeom prst="rect">
+            <a:avLst/>
+          </a:prstGeom>
+        </p:spPr>
+        <p:txBody>
+          <a:bodyPr vert="horz" lIns="91440" tIns="45720" rIns="91440" bIns="45720" rtlCol="0"/>
+          <a:lstStyle>
+            <a:lvl1pPr algn="l">
+              <a:defRPr sz="1200"/>
+            </a:lvl1pPr>
+          </a:lstStyle>
+          <a:p>
+            <a:endParaRPr lang="en-US"/>
+          </a:p>
+        </p:txBody>
+      </p:sp>
+      <p:sp>
+        <p:nvSpPr>
+          <p:cNvPr id="3" name="Date Placeholder 2"/>
+          <p:cNvSpPr>
+            <a:spLocks noGrp="1"/>
+          </p:cNvSpPr>
+          <p:nvPr>
+            <p:ph type="dt" idx="1"/>
+          </p:nvPr>
+        </p:nvSpPr>
+        <p:spPr>
+          <a:xfrm>
+            <a:off x="3884613" y="0"/>
+            <a:ext cx="2971800" cy="457200"/>
+          </a:xfrm>
+          <a:prstGeom prst="rect">
+            <a:avLst/>
+          </a:prstGeom>
+        </p:spPr>
+        <p:txBody>
+          <a:bodyPr vert="horz" lIns="91440" tIns="45720" rIns="91440" bIns="45720" rtlCol="0"/>
+          <a:lstStyle>
+            <a:lvl1pPr algn="r">
+              <a:defRPr sz="1200"/>
+            </a:lvl1pPr>
+          </a:lstStyle>
+          <a:p>
+            <a:fld id="{0F89C1C7-3DCD-1040-A9CF-14679D8B5DDD}" type="datetimeFigureOut">
+              <a:rPr lang="en-US" smtClean="0"/>
+              <a:t>10/17/16</a:t>
+            </a:fld>
+            <a:endParaRPr lang="en-US"/>
+          </a:p>
+        </p:txBody>
+      </p:sp>
+      <p:sp>
+        <p:nvSpPr>
+          <p:cNvPr id="4" name="Slide Image Placeholder 3"/>
+          <p:cNvSpPr>
+            <a:spLocks noGrp="1" noRot="1" noChangeAspect="1"/>
+          </p:cNvSpPr>
+          <p:nvPr>
+            <p:ph type="sldImg" idx="2"/>
+          </p:nvPr>
+        </p:nvSpPr>
+        <p:spPr>
+          <a:xfrm>
+            <a:off x="1143000" y="685800"/>
+            <a:ext cx="4572000" cy="3429000"/>
+          </a:xfrm>
+          <a:prstGeom prst="rect">
+            <a:avLst/>
+          </a:prstGeom>
+          <a:noFill/>
+          <a:ln w="12700">
+            <a:solidFill>
+              <a:prstClr val="black"/>
+            </a:solidFill>
+          </a:ln>
+        </p:spPr>
+        <p:txBody>
+          <a:bodyPr vert="horz" lIns="91440" tIns="45720" rIns="91440" bIns="45720" rtlCol="0" anchor="ctr"/>
+          <a:lstStyle/>
+          <a:p>
+            <a:endParaRPr lang="en-US"/>
+          </a:p>
+        </p:txBody>
+      </p:sp>
+      <p:sp>
+        <p:nvSpPr>
+          <p:cNvPr id="5" name="Notes Placeholder 4"/>
+          <p:cNvSpPr>
+            <a:spLocks noGrp="1"/>
+          </p:cNvSpPr>
+          <p:nvPr>
+            <p:ph type="body" sz="quarter" idx="3"/>
+          </p:nvPr>
+        </p:nvSpPr>
+        <p:spPr>
+          <a:xfrm>
+            <a:off x="685800" y="4343400"/>
+            <a:ext cx="5486400" cy="4114800"/>
+          </a:xfrm>
+          <a:prstGeom prst="rect">
+            <a:avLst/>
+          </a:prstGeom>
+        </p:spPr>
+        <p:txBody>
+          <a:bodyPr vert="horz" lIns="91440" tIns="45720" rIns="91440" bIns="45720" rtlCol="0"/>
+          <a:lstStyle/>
+          <a:p>
+            <a:pPr lvl="0"/>
+            <a:r>
+              <a:rPr lang="en-US" smtClean="0"/>
+              <a:t>Click to edit Master text styles</a:t>
+            </a:r>
+          </a:p>
+          <a:p>
+            <a:pPr lvl="1"/>
+            <a:r>
+              <a:rPr lang="en-US" smtClean="0"/>
+              <a:t>Second level</a:t>
+            </a:r>
+          </a:p>
+          <a:p>
+            <a:pPr lvl="2"/>
+            <a:r>
+              <a:rPr lang="en-US" smtClean="0"/>
+              <a:t>Third level</a:t>
+            </a:r>
+          </a:p>
+          <a:p>
+            <a:pPr lvl="3"/>
+            <a:r>
+              <a:rPr lang="en-US" smtClean="0"/>
+              <a:t>Fourth level</a:t>
+            </a:r>
+          </a:p>
+          <a:p>
+            <a:pPr lvl="4"/>
+            <a:r>
+              <a:rPr lang="en-US" smtClean="0"/>
+              <a:t>Fifth level</a:t>
+            </a:r>
+            <a:endParaRPr lang="en-US"/>
+          </a:p>
+        </p:txBody>
+      </p:sp>
+      <p:sp>
+        <p:nvSpPr>
+          <p:cNvPr id="6" name="Footer Placeholder 5"/>
+          <p:cNvSpPr>
+            <a:spLocks noGrp="1"/>
+          </p:cNvSpPr>
+          <p:nvPr>
+            <p:ph type="ftr" sz="quarter" idx="4"/>
+          </p:nvPr>
+        </p:nvSpPr>
+        <p:spPr>
+          <a:xfrm>
+            <a:off x="0" y="8685213"/>
+            <a:ext cx="2971800" cy="457200"/>
+          </a:xfrm>
+          <a:prstGeom prst="rect">
+            <a:avLst/>
+          </a:prstGeom>
+        </p:spPr>
+        <p:txBody>
+          <a:bodyPr vert="horz" lIns="91440" tIns="45720" rIns="91440" bIns="45720" rtlCol="0" anchor="b"/>
+          <a:lstStyle>
+            <a:lvl1pPr algn="l">
+              <a:defRPr sz="1200"/>
+            </a:lvl1pPr>
+          </a:lstStyle>
+          <a:p>
+            <a:endParaRPr lang="en-US"/>
+          </a:p>
+        </p:txBody>
+      </p:sp>
+      <p:sp>
+        <p:nvSpPr>
+          <p:cNvPr id="7" name="Slide Number Placeholder 6"/>
+          <p:cNvSpPr>
+            <a:spLocks noGrp="1"/>
+          </p:cNvSpPr>
+          <p:nvPr>
+            <p:ph type="sldNum" sz="quarter" idx="5"/>
+          </p:nvPr>
+        </p:nvSpPr>
+        <p:spPr>
+          <a:xfrm>
+            <a:off x="3884613" y="8685213"/>
+            <a:ext cx="2971800" cy="457200"/>
+          </a:xfrm>
+          <a:prstGeom prst="rect">
+            <a:avLst/>
+          </a:prstGeom>
+        </p:spPr>
+        <p:txBody>
+          <a:bodyPr vert="horz" lIns="91440" tIns="45720" rIns="91440" bIns="45720" rtlCol="0" anchor="b"/>
+          <a:lstStyle>
+            <a:lvl1pPr algn="r">
+              <a:defRPr sz="1200"/>
+            </a:lvl1pPr>
+          </a:lstStyle>
+          <a:p>
+            <a:fld id="{BB5E49A5-4136-284D-997B-48E1D791AD67}" type="slidenum">
+              <a:rPr lang="en-US" smtClean="0"/>
+              <a:t>‹#›</a:t>
+            </a:fld>
+            <a:endParaRPr lang="en-US"/>
+          </a:p>
+        </p:txBody>
+      </p:sp>
+    </p:spTree>
+    <p:extLst>
+      <p:ext uri="{BB962C8B-B14F-4D97-AF65-F5344CB8AC3E}">
+        <p14:creationId xmlns:p14="http://schemas.microsoft.com/office/powerpoint/2010/main" val="2623252185"/>
+      </p:ext>
+    </p:extLst>
+  </p:cSld>
+  <p:clrMap bg1="lt1" tx1="dk1" bg2="lt2" tx2="dk2" accent1="accent1" accent2="accent2" accent3="accent3" accent4="accent4" accent5="accent5" accent6="accent6" hlink="hlink" folHlink="folHlink"/>
+  <p:notesStyle>
+    <a:lvl1pPr marL="0" algn="l" defTabSz="457200" rtl="0" eaLnBrk="1" latinLnBrk="0" hangingPunct="1">
+      <a:defRPr sz="1200" kern="1200">
+        <a:solidFill>
+          <a:schemeClr val="tx1"/>
+        </a:solidFill>
+        <a:latin typeface="+mn-lt"/>
+        <a:ea typeface="+mn-ea"/>
+        <a:cs typeface="+mn-cs"/>
+      </a:defRPr>
+    </a:lvl1pPr>
+    <a:lvl2pPr marL="457200" algn="l" defTabSz="457200" rtl="0" eaLnBrk="1" latinLnBrk="0" hangingPunct="1">
+      <a:defRPr sz="1200" kern="1200">
+        <a:solidFill>
+          <a:schemeClr val="tx1"/>
+        </a:solidFill>
+        <a:latin typeface="+mn-lt"/>
+        <a:ea typeface="+mn-ea"/>
+        <a:cs typeface="+mn-cs"/>
+      </a:defRPr>
+    </a:lvl2pPr>
+    <a:lvl3pPr marL="914400" algn="l" defTabSz="457200" rtl="0" eaLnBrk="1" latinLnBrk="0" hangingPunct="1">
+      <a:defRPr sz="1200" kern="1200">
+        <a:solidFill>
+          <a:schemeClr val="tx1"/>
+        </a:solidFill>
+        <a:latin typeface="+mn-lt"/>
+        <a:ea typeface="+mn-ea"/>
+        <a:cs typeface="+mn-cs"/>
+      </a:defRPr>
+    </a:lvl3pPr>
+    <a:lvl4pPr marL="1371600" algn="l" defTabSz="457200" rtl="0" eaLnBrk="1" latinLnBrk="0" hangingPunct="1">
+      <a:defRPr sz="1200" kern="1200">
+        <a:solidFill>
+          <a:schemeClr val="tx1"/>
+        </a:solidFill>
+        <a:latin typeface="+mn-lt"/>
+        <a:ea typeface="+mn-ea"/>
+        <a:cs typeface="+mn-cs"/>
+      </a:defRPr>
+    </a:lvl4pPr>
+    <a:lvl5pPr marL="1828800" algn="l" defTabSz="457200" rtl="0" eaLnBrk="1" latinLnBrk="0" hangingPunct="1">
+      <a:defRPr sz="1200" kern="1200">
+        <a:solidFill>
+          <a:schemeClr val="tx1"/>
+        </a:solidFill>
+        <a:latin typeface="+mn-lt"/>
+        <a:ea typeface="+mn-ea"/>
+        <a:cs typeface="+mn-cs"/>
+      </a:defRPr>
+    </a:lvl5pPr>
+    <a:lvl6pPr marL="2286000" algn="l" defTabSz="457200" rtl="0" eaLnBrk="1" latinLnBrk="0" hangingPunct="1">
+      <a:defRPr sz="1200" kern="1200">
+        <a:solidFill>
+          <a:schemeClr val="tx1"/>
+        </a:solidFill>
+        <a:latin typeface="+mn-lt"/>
+        <a:ea typeface="+mn-ea"/>
+        <a:cs typeface="+mn-cs"/>
+      </a:defRPr>
+    </a:lvl6pPr>
+    <a:lvl7pPr marL="2743200" algn="l" defTabSz="457200" rtl="0" eaLnBrk="1" latinLnBrk="0" hangingPunct="1">
+      <a:defRPr sz="1200" kern="1200">
+        <a:solidFill>
+          <a:schemeClr val="tx1"/>
+        </a:solidFill>
+        <a:latin typeface="+mn-lt"/>
+        <a:ea typeface="+mn-ea"/>
+        <a:cs typeface="+mn-cs"/>
+      </a:defRPr>
+    </a:lvl7pPr>
+    <a:lvl8pPr marL="3200400" algn="l" defTabSz="457200" rtl="0" eaLnBrk="1" latinLnBrk="0" hangingPunct="1">
+      <a:defRPr sz="1200" kern="1200">
+        <a:solidFill>
+          <a:schemeClr val="tx1"/>
+        </a:solidFill>
+        <a:latin typeface="+mn-lt"/>
+        <a:ea typeface="+mn-ea"/>
+        <a:cs typeface="+mn-cs"/>
+      </a:defRPr>
+    </a:lvl8pPr>
+    <a:lvl9pPr marL="3657600" algn="l" defTabSz="457200" rtl="0" eaLnBrk="1" latinLnBrk="0" hangingPunct="1">
+      <a:defRPr sz="1200" kern="1200">
+        <a:solidFill>
+          <a:schemeClr val="tx1"/>
+        </a:solidFill>
+        <a:latin typeface="+mn-lt"/>
+        <a:ea typeface="+mn-ea"/>
+        <a:cs typeface="+mn-cs"/>
+      </a:defRPr>
+    </a:lvl9pPr>
+  </p:notesStyle>
+</p:notesMaster>
+</file>
+
+<file path=ppt/notesSlides/notesSlide1.xml><?xml version="1.0" encoding="utf-8"?>
+<p:notes xmlns:a="http://schemas.openxmlformats.org/drawingml/2006/main" xmlns:p="http://schemas.openxmlformats.org/presentationml/2006/main" xmlns:r="http://schemas.openxmlformats.org/officeDocument/2006/relationships">
+  <p:cSld>
+    <p:spTree>
+      <p:nvGrpSpPr>
+        <p:cNvPr id="1" name=""/>
+        <p:cNvGrpSpPr/>
+        <p:nvPr/>
+      </p:nvGrpSpPr>
+      <p:grpSpPr>
+        <a:xfrm>
+          <a:off x="0" y="0"/>
+          <a:ext cx="0" cy="0"/>
+          <a:chOff x="0" y="0"/>
+          <a:chExt cx="0" cy="0"/>
+        </a:xfrm>
+      </p:grpSpPr>
+      <p:sp>
+        <p:nvSpPr>
+          <p:cNvPr id="2" name="Slide Image Placeholder 1"/>
+          <p:cNvSpPr>
+            <a:spLocks noGrp="1"/>
+          </p:cNvSpPr>
+          <p:nvPr>
+            <p:ph type="sldImg" idx="2"/>
+          </p:nvPr>
+        </p:nvSpPr>
+        <p:spPr/>
+      </p:sp>
+      <p:sp>
+        <p:nvSpPr>
+          <p:cNvPr id="3" name="Notes Placeholder 2"/>
+          <p:cNvSpPr>
+            <a:spLocks noGrp="1"/>
+          </p:cNvSpPr>
+          <p:nvPr>
+            <p:ph type="body" idx="3" sz="quarter"/>
+          </p:nvPr>
+        </p:nvSpPr>
+        <p:spPr/>
+        <p:txBody>
+          <a:bodyPr/>
+          <a:lstStyle/>
+          <a:p>
+            <a:r>
+              <a:t>Welcome everyone. Today we're going to talk about TDK CLI and how it solves a problem that 70% of developers face: being forced to learn Kubernetes just to run microservices locally. This isn't about bashing other tools—it's about finding a better way for teams who want to move fast without platform engineering overhead.</a:t>
+            </a:r>
+          </a:p>
+        </p:txBody>
+      </p:sp>
+      <p:sp>
+        <p:nvSpPr>
+          <p:cNvPr id="4" name="Slide Number Placeholder 3"/>
+          <p:cNvSpPr>
+            <a:spLocks noGrp="1"/>
+          </p:cNvSpPr>
+          <p:nvPr>
+            <p:ph type="sldNum" idx="5" sz="quarter"/>
+          </p:nvPr>
+        </p:nvSpPr>
+        <p:spPr/>
+      </p:sp>
+    </p:spTree>
+  </p:cSld>
+  <p:clrMapOvr>
+    <a:masterClrMapping/>
+  </p:clrMapOvr>
+</p:notes>
+</file>
+
+<file path=ppt/notesSlides/notesSlide10.xml><?xml version="1.0" encoding="utf-8"?>
+<p:notes xmlns:a="http://schemas.openxmlformats.org/drawingml/2006/main" xmlns:p="http://schemas.openxmlformats.org/presentationml/2006/main" xmlns:r="http://schemas.openxmlformats.org/officeDocument/2006/relationships">
+  <p:cSld>
+    <p:spTree>
+      <p:nvGrpSpPr>
+        <p:cNvPr id="1" name=""/>
+        <p:cNvGrpSpPr/>
+        <p:nvPr/>
+      </p:nvGrpSpPr>
+      <p:grpSpPr>
+        <a:xfrm>
+          <a:off x="0" y="0"/>
+          <a:ext cx="0" cy="0"/>
+          <a:chOff x="0" y="0"/>
+          <a:chExt cx="0" cy="0"/>
+        </a:xfrm>
+      </p:grpSpPr>
+      <p:sp>
+        <p:nvSpPr>
+          <p:cNvPr id="2" name="Slide Image Placeholder 1"/>
+          <p:cNvSpPr>
+            <a:spLocks noGrp="1"/>
+          </p:cNvSpPr>
+          <p:nvPr>
+            <p:ph type="sldImg" idx="2"/>
+          </p:nvPr>
+        </p:nvSpPr>
+        <p:spPr/>
+      </p:sp>
+      <p:sp>
+        <p:nvSpPr>
+          <p:cNvPr id="3" name="Notes Placeholder 2"/>
+          <p:cNvSpPr>
+            <a:spLocks noGrp="1"/>
+          </p:cNvSpPr>
+          <p:nvPr>
+            <p:ph type="body" idx="3" sz="quarter"/>
+          </p:nvPr>
+        </p:nvSpPr>
+        <p:spPr/>
+        <p:txBody>
+          <a:bodyPr/>
+          <a:lstStyle/>
+          <a:p>
+            <a:r>
+              <a:t>Our moat isn't one thing—it's four. Tilt foundation gives us stability. Manifest-driven approach is unique in local-dev. Golden images give us production-readiness. Auto-discovery removes friction. Competitors can copy one, but replicating all four is hard. Plus we have 120+ services battle-tested.</a:t>
+            </a:r>
+          </a:p>
+        </p:txBody>
+      </p:sp>
+      <p:sp>
+        <p:nvSpPr>
+          <p:cNvPr id="4" name="Slide Number Placeholder 3"/>
+          <p:cNvSpPr>
+            <a:spLocks noGrp="1"/>
+          </p:cNvSpPr>
+          <p:nvPr>
+            <p:ph type="sldNum" idx="5" sz="quarter"/>
+          </p:nvPr>
+        </p:nvSpPr>
+        <p:spPr/>
+      </p:sp>
+    </p:spTree>
+  </p:cSld>
+  <p:clrMapOvr>
+    <a:masterClrMapping/>
+  </p:clrMapOvr>
+</p:notes>
+</file>
+
+<file path=ppt/notesSlides/notesSlide11.xml><?xml version="1.0" encoding="utf-8"?>
+<p:notes xmlns:a="http://schemas.openxmlformats.org/drawingml/2006/main" xmlns:p="http://schemas.openxmlformats.org/presentationml/2006/main" xmlns:r="http://schemas.openxmlformats.org/officeDocument/2006/relationships">
+  <p:cSld>
+    <p:spTree>
+      <p:nvGrpSpPr>
+        <p:cNvPr id="1" name=""/>
+        <p:cNvGrpSpPr/>
+        <p:nvPr/>
+      </p:nvGrpSpPr>
+      <p:grpSpPr>
+        <a:xfrm>
+          <a:off x="0" y="0"/>
+          <a:ext cx="0" cy="0"/>
+          <a:chOff x="0" y="0"/>
+          <a:chExt cx="0" cy="0"/>
+        </a:xfrm>
+      </p:grpSpPr>
+      <p:sp>
+        <p:nvSpPr>
+          <p:cNvPr id="2" name="Slide Image Placeholder 1"/>
+          <p:cNvSpPr>
+            <a:spLocks noGrp="1"/>
+          </p:cNvSpPr>
+          <p:nvPr>
+            <p:ph type="sldImg" idx="2"/>
+          </p:nvPr>
+        </p:nvSpPr>
+        <p:spPr/>
+      </p:sp>
+      <p:sp>
+        <p:nvSpPr>
+          <p:cNvPr id="3" name="Notes Placeholder 2"/>
+          <p:cNvSpPr>
+            <a:spLocks noGrp="1"/>
+          </p:cNvSpPr>
+          <p:nvPr>
+            <p:ph type="body" idx="3" sz="quarter"/>
+          </p:nvPr>
+        </p:nvSpPr>
+        <p:spPr/>
+        <p:txBody>
+          <a:bodyPr/>
+          <a:lstStyle/>
+          <a:p>
+            <a:r>
+              <a:t>The real competition isn't other tools—it's the status quo. 'Works on my machine' chaos. Teams giving up and paying $500+/month for cloud dev environments. Manual Docker Compose hell. Our closest competitor is Garden, but they require K8s knowledge. Our unique angle: same manifest-driven power, zero K8s complexity.</a:t>
+            </a:r>
+          </a:p>
+        </p:txBody>
+      </p:sp>
+      <p:sp>
+        <p:nvSpPr>
+          <p:cNvPr id="4" name="Slide Number Placeholder 3"/>
+          <p:cNvSpPr>
+            <a:spLocks noGrp="1"/>
+          </p:cNvSpPr>
+          <p:nvPr>
+            <p:ph type="sldNum" idx="5" sz="quarter"/>
+          </p:nvPr>
+        </p:nvSpPr>
+        <p:spPr/>
+      </p:sp>
+    </p:spTree>
+  </p:cSld>
+  <p:clrMapOvr>
+    <a:masterClrMapping/>
+  </p:clrMapOvr>
+</p:notes>
+</file>
+
+<file path=ppt/notesSlides/notesSlide12.xml><?xml version="1.0" encoding="utf-8"?>
+<p:notes xmlns:a="http://schemas.openxmlformats.org/drawingml/2006/main" xmlns:p="http://schemas.openxmlformats.org/presentationml/2006/main" xmlns:r="http://schemas.openxmlformats.org/officeDocument/2006/relationships">
+  <p:cSld>
+    <p:spTree>
+      <p:nvGrpSpPr>
+        <p:cNvPr id="1" name=""/>
+        <p:cNvGrpSpPr/>
+        <p:nvPr/>
+      </p:nvGrpSpPr>
+      <p:grpSpPr>
+        <a:xfrm>
+          <a:off x="0" y="0"/>
+          <a:ext cx="0" cy="0"/>
+          <a:chOff x="0" y="0"/>
+          <a:chExt cx="0" cy="0"/>
+        </a:xfrm>
+      </p:grpSpPr>
+      <p:sp>
+        <p:nvSpPr>
+          <p:cNvPr id="2" name="Slide Image Placeholder 1"/>
+          <p:cNvSpPr>
+            <a:spLocks noGrp="1"/>
+          </p:cNvSpPr>
+          <p:nvPr>
+            <p:ph type="sldImg" idx="2"/>
+          </p:nvPr>
+        </p:nvSpPr>
+        <p:spPr/>
+      </p:sp>
+      <p:sp>
+        <p:nvSpPr>
+          <p:cNvPr id="3" name="Notes Placeholder 2"/>
+          <p:cNvSpPr>
+            <a:spLocks noGrp="1"/>
+          </p:cNvSpPr>
+          <p:nvPr>
+            <p:ph type="body" idx="3" sz="quarter"/>
+          </p:nvPr>
+        </p:nvSpPr>
+        <p:spPr/>
+        <p:txBody>
+          <a:bodyPr/>
+          <a:lstStyle/>
+          <a:p>
+            <a:r>
+              <a:t>TDK CLI. Kubernetes-free microservice development. Questions?</a:t>
+            </a:r>
+          </a:p>
+        </p:txBody>
+      </p:sp>
+      <p:sp>
+        <p:nvSpPr>
+          <p:cNvPr id="4" name="Slide Number Placeholder 3"/>
+          <p:cNvSpPr>
+            <a:spLocks noGrp="1"/>
+          </p:cNvSpPr>
+          <p:nvPr>
+            <p:ph type="sldNum" idx="5" sz="quarter"/>
+          </p:nvPr>
+        </p:nvSpPr>
+        <p:spPr/>
+      </p:sp>
+    </p:spTree>
+  </p:cSld>
+  <p:clrMapOvr>
+    <a:masterClrMapping/>
+  </p:clrMapOvr>
+</p:notes>
+</file>
+
+<file path=ppt/notesSlides/notesSlide2.xml><?xml version="1.0" encoding="utf-8"?>
+<p:notes xmlns:a="http://schemas.openxmlformats.org/drawingml/2006/main" xmlns:p="http://schemas.openxmlformats.org/presentationml/2006/main" xmlns:r="http://schemas.openxmlformats.org/officeDocument/2006/relationships">
+  <p:cSld>
+    <p:spTree>
+      <p:nvGrpSpPr>
+        <p:cNvPr id="1" name=""/>
+        <p:cNvGrpSpPr/>
+        <p:nvPr/>
+      </p:nvGrpSpPr>
+      <p:grpSpPr>
+        <a:xfrm>
+          <a:off x="0" y="0"/>
+          <a:ext cx="0" cy="0"/>
+          <a:chOff x="0" y="0"/>
+          <a:chExt cx="0" cy="0"/>
+        </a:xfrm>
+      </p:grpSpPr>
+      <p:sp>
+        <p:nvSpPr>
+          <p:cNvPr id="2" name="Slide Image Placeholder 1"/>
+          <p:cNvSpPr>
+            <a:spLocks noGrp="1"/>
+          </p:cNvSpPr>
+          <p:nvPr>
+            <p:ph type="sldImg" idx="2"/>
+          </p:nvPr>
+        </p:nvSpPr>
+        <p:spPr/>
+      </p:sp>
+      <p:sp>
+        <p:nvSpPr>
+          <p:cNvPr id="3" name="Notes Placeholder 2"/>
+          <p:cNvSpPr>
+            <a:spLocks noGrp="1"/>
+          </p:cNvSpPr>
+          <p:nvPr>
+            <p:ph type="body" idx="3" sz="quarter"/>
+          </p:nvPr>
+        </p:nvSpPr>
+        <p:spPr/>
+        <p:txBody>
+          <a:bodyPr/>
+          <a:lstStyle/>
+          <a:p>
+            <a:r>
+              <a:t>The Kubernetes learning curve is real. Most developers didn't sign up to become DevOps engineers. Yet every microservice tool out there—Garden, Skaffold, DevSpace—forces them to learn K8s concepts. The result? Cognitive overload. Teams either give up and pay for expensive cloud dev environments, or they power through and waste weeks learning infrastructure they don't actually need for local development.</a:t>
+            </a:r>
+          </a:p>
+        </p:txBody>
+      </p:sp>
+      <p:sp>
+        <p:nvSpPr>
+          <p:cNvPr id="4" name="Slide Number Placeholder 3"/>
+          <p:cNvSpPr>
+            <a:spLocks noGrp="1"/>
+          </p:cNvSpPr>
+          <p:nvPr>
+            <p:ph type="sldNum" idx="5" sz="quarter"/>
+          </p:nvPr>
+        </p:nvSpPr>
+        <p:spPr/>
+      </p:sp>
+    </p:spTree>
+  </p:cSld>
+  <p:clrMapOvr>
+    <a:masterClrMapping/>
+  </p:clrMapOvr>
+</p:notes>
+</file>
+
+<file path=ppt/notesSlides/notesSlide3.xml><?xml version="1.0" encoding="utf-8"?>
+<p:notes xmlns:a="http://schemas.openxmlformats.org/drawingml/2006/main" xmlns:p="http://schemas.openxmlformats.org/presentationml/2006/main" xmlns:r="http://schemas.openxmlformats.org/officeDocument/2006/relationships">
+  <p:cSld>
+    <p:spTree>
+      <p:nvGrpSpPr>
+        <p:cNvPr id="1" name=""/>
+        <p:cNvGrpSpPr/>
+        <p:nvPr/>
+      </p:nvGrpSpPr>
+      <p:grpSpPr>
+        <a:xfrm>
+          <a:off x="0" y="0"/>
+          <a:ext cx="0" cy="0"/>
+          <a:chOff x="0" y="0"/>
+          <a:chExt cx="0" cy="0"/>
+        </a:xfrm>
+      </p:grpSpPr>
+      <p:sp>
+        <p:nvSpPr>
+          <p:cNvPr id="2" name="Slide Image Placeholder 1"/>
+          <p:cNvSpPr>
+            <a:spLocks noGrp="1"/>
+          </p:cNvSpPr>
+          <p:nvPr>
+            <p:ph type="sldImg" idx="2"/>
+          </p:nvPr>
+        </p:nvSpPr>
+        <p:spPr/>
+      </p:sp>
+      <p:sp>
+        <p:nvSpPr>
+          <p:cNvPr id="3" name="Notes Placeholder 2"/>
+          <p:cNvSpPr>
+            <a:spLocks noGrp="1"/>
+          </p:cNvSpPr>
+          <p:nvPr>
+            <p:ph type="body" idx="3" sz="quarter"/>
+          </p:nvPr>
+        </p:nvSpPr>
+        <p:spPr/>
+        <p:txBody>
+          <a:bodyPr/>
+          <a:lstStyle/>
+          <a:p>
+            <a:r>
+              <a:t>This is the translation problem. Garden's marketing says 'production-like environments' but what developers actually hear is 'learn namespaces, ingress, contexts, and deployments.' The marketing is technically accurate but practically misleading. TDK takes a different approach: pure Docker + Tilt. No K8s concepts leaked.</a:t>
+            </a:r>
+          </a:p>
+        </p:txBody>
+      </p:sp>
+      <p:sp>
+        <p:nvSpPr>
+          <p:cNvPr id="4" name="Slide Number Placeholder 3"/>
+          <p:cNvSpPr>
+            <a:spLocks noGrp="1"/>
+          </p:cNvSpPr>
+          <p:nvPr>
+            <p:ph type="sldNum" idx="5" sz="quarter"/>
+          </p:nvPr>
+        </p:nvSpPr>
+        <p:spPr/>
+      </p:sp>
+    </p:spTree>
+  </p:cSld>
+  <p:clrMapOvr>
+    <a:masterClrMapping/>
+  </p:clrMapOvr>
+</p:notes>
+</file>
+
+<file path=ppt/notesSlides/notesSlide4.xml><?xml version="1.0" encoding="utf-8"?>
+<p:notes xmlns:a="http://schemas.openxmlformats.org/drawingml/2006/main" xmlns:p="http://schemas.openxmlformats.org/presentationml/2006/main" xmlns:r="http://schemas.openxmlformats.org/officeDocument/2006/relationships">
+  <p:cSld>
+    <p:spTree>
+      <p:nvGrpSpPr>
+        <p:cNvPr id="1" name=""/>
+        <p:cNvGrpSpPr/>
+        <p:nvPr/>
+      </p:nvGrpSpPr>
+      <p:grpSpPr>
+        <a:xfrm>
+          <a:off x="0" y="0"/>
+          <a:ext cx="0" cy="0"/>
+          <a:chOff x="0" y="0"/>
+          <a:chExt cx="0" cy="0"/>
+        </a:xfrm>
+      </p:grpSpPr>
+      <p:sp>
+        <p:nvSpPr>
+          <p:cNvPr id="2" name="Slide Image Placeholder 1"/>
+          <p:cNvSpPr>
+            <a:spLocks noGrp="1"/>
+          </p:cNvSpPr>
+          <p:nvPr>
+            <p:ph type="sldImg" idx="2"/>
+          </p:nvPr>
+        </p:nvSpPr>
+        <p:spPr/>
+      </p:sp>
+      <p:sp>
+        <p:nvSpPr>
+          <p:cNvPr id="3" name="Notes Placeholder 2"/>
+          <p:cNvSpPr>
+            <a:spLocks noGrp="1"/>
+          </p:cNvSpPr>
+          <p:nvPr>
+            <p:ph type="body" idx="3" sz="quarter"/>
+          </p:nvPr>
+        </p:nvSpPr>
+        <p:spPr/>
+        <p:txBody>
+          <a:bodyPr/>
+          <a:lstStyle/>
+          <a:p>
+            <a:r>
+              <a:t>Let's map the competitive landscape. Tilt is our foundation—we're built ON Tilt, not competing with it. Garden is our closest competitor but they leak K8s concepts. Skaffold is pure K8s. DevSpace pivoted to AI agents. Okteto requires remote clusters. TDK is the only one that's manifest-driven AND K8s-free for local dev.</a:t>
+            </a:r>
+          </a:p>
+        </p:txBody>
+      </p:sp>
+      <p:sp>
+        <p:nvSpPr>
+          <p:cNvPr id="4" name="Slide Number Placeholder 3"/>
+          <p:cNvSpPr>
+            <a:spLocks noGrp="1"/>
+          </p:cNvSpPr>
+          <p:nvPr>
+            <p:ph type="sldNum" idx="5" sz="quarter"/>
+          </p:nvPr>
+        </p:nvSpPr>
+        <p:spPr/>
+      </p:sp>
+    </p:spTree>
+  </p:cSld>
+  <p:clrMapOvr>
+    <a:masterClrMapping/>
+  </p:clrMapOvr>
+</p:notes>
+</file>
+
+<file path=ppt/notesSlides/notesSlide5.xml><?xml version="1.0" encoding="utf-8"?>
+<p:notes xmlns:a="http://schemas.openxmlformats.org/drawingml/2006/main" xmlns:p="http://schemas.openxmlformats.org/presentationml/2006/main" xmlns:r="http://schemas.openxmlformats.org/officeDocument/2006/relationships">
+  <p:cSld>
+    <p:spTree>
+      <p:nvGrpSpPr>
+        <p:cNvPr id="1" name=""/>
+        <p:cNvGrpSpPr/>
+        <p:nvPr/>
+      </p:nvGrpSpPr>
+      <p:grpSpPr>
+        <a:xfrm>
+          <a:off x="0" y="0"/>
+          <a:ext cx="0" cy="0"/>
+          <a:chOff x="0" y="0"/>
+          <a:chExt cx="0" cy="0"/>
+        </a:xfrm>
+      </p:grpSpPr>
+      <p:sp>
+        <p:nvSpPr>
+          <p:cNvPr id="2" name="Slide Image Placeholder 1"/>
+          <p:cNvSpPr>
+            <a:spLocks noGrp="1"/>
+          </p:cNvSpPr>
+          <p:nvPr>
+            <p:ph type="sldImg" idx="2"/>
+          </p:nvPr>
+        </p:nvSpPr>
+        <p:spPr/>
+      </p:sp>
+      <p:sp>
+        <p:nvSpPr>
+          <p:cNvPr id="3" name="Notes Placeholder 2"/>
+          <p:cNvSpPr>
+            <a:spLocks noGrp="1"/>
+          </p:cNvSpPr>
+          <p:nvPr>
+            <p:ph type="body" idx="3" sz="quarter"/>
+          </p:nvPr>
+        </p:nvSpPr>
+        <p:spPr/>
+        <p:txBody>
+          <a:bodyPr/>
+          <a:lstStyle/>
+          <a:p>
+            <a:r>
+              <a:t>Head-to-head comparison. Garden requires you to write garden.yml and understand K8s concepts. TDK uses a simple service.json. Garden's auto-generation is limited. TDK generates 10+ config files automatically. The biggest difference: Garden eventually requires cluster knowledge, TDK never does for local dev.</a:t>
+            </a:r>
+          </a:p>
+        </p:txBody>
+      </p:sp>
+      <p:sp>
+        <p:nvSpPr>
+          <p:cNvPr id="4" name="Slide Number Placeholder 3"/>
+          <p:cNvSpPr>
+            <a:spLocks noGrp="1"/>
+          </p:cNvSpPr>
+          <p:nvPr>
+            <p:ph type="sldNum" idx="5" sz="quarter"/>
+          </p:nvPr>
+        </p:nvSpPr>
+        <p:spPr/>
+      </p:sp>
+    </p:spTree>
+  </p:cSld>
+  <p:clrMapOvr>
+    <a:masterClrMapping/>
+  </p:clrMapOvr>
+</p:notes>
+</file>
+
+<file path=ppt/notesSlides/notesSlide6.xml><?xml version="1.0" encoding="utf-8"?>
+<p:notes xmlns:a="http://schemas.openxmlformats.org/drawingml/2006/main" xmlns:p="http://schemas.openxmlformats.org/presentationml/2006/main" xmlns:r="http://schemas.openxmlformats.org/officeDocument/2006/relationships">
+  <p:cSld>
+    <p:spTree>
+      <p:nvGrpSpPr>
+        <p:cNvPr id="1" name=""/>
+        <p:cNvGrpSpPr/>
+        <p:nvPr/>
+      </p:nvGrpSpPr>
+      <p:grpSpPr>
+        <a:xfrm>
+          <a:off x="0" y="0"/>
+          <a:ext cx="0" cy="0"/>
+          <a:chOff x="0" y="0"/>
+          <a:chExt cx="0" cy="0"/>
+        </a:xfrm>
+      </p:grpSpPr>
+      <p:sp>
+        <p:nvSpPr>
+          <p:cNvPr id="2" name="Slide Image Placeholder 1"/>
+          <p:cNvSpPr>
+            <a:spLocks noGrp="1"/>
+          </p:cNvSpPr>
+          <p:nvPr>
+            <p:ph type="sldImg" idx="2"/>
+          </p:nvPr>
+        </p:nvSpPr>
+        <p:spPr/>
+      </p:sp>
+      <p:sp>
+        <p:nvSpPr>
+          <p:cNvPr id="3" name="Notes Placeholder 2"/>
+          <p:cNvSpPr>
+            <a:spLocks noGrp="1"/>
+          </p:cNvSpPr>
+          <p:nvPr>
+            <p:ph type="body" idx="3" sz="quarter"/>
+          </p:nvPr>
+        </p:nvSpPr>
+        <p:spPr/>
+        <p:txBody>
+          <a:bodyPr/>
+          <a:lstStyle/>
+          <a:p>
+            <a:r>
+              <a:t>Here's what makes TDK unique. We're the only tool that generates configs from manifests WITHOUT requiring Kubernetes. We've proven this scales to 120+ services locally. The golden Docker images with L1-L4 layering means consistent, production-ready containers. Auto-discovery means zero manual registration.</a:t>
+            </a:r>
+          </a:p>
+        </p:txBody>
+      </p:sp>
+      <p:sp>
+        <p:nvSpPr>
+          <p:cNvPr id="4" name="Slide Number Placeholder 3"/>
+          <p:cNvSpPr>
+            <a:spLocks noGrp="1"/>
+          </p:cNvSpPr>
+          <p:nvPr>
+            <p:ph type="sldNum" idx="5" sz="quarter"/>
+          </p:nvPr>
+        </p:nvSpPr>
+        <p:spPr/>
+      </p:sp>
+    </p:spTree>
+  </p:cSld>
+  <p:clrMapOvr>
+    <a:masterClrMapping/>
+  </p:clrMapOvr>
+</p:notes>
+</file>
+
+<file path=ppt/notesSlides/notesSlide7.xml><?xml version="1.0" encoding="utf-8"?>
+<p:notes xmlns:a="http://schemas.openxmlformats.org/drawingml/2006/main" xmlns:p="http://schemas.openxmlformats.org/presentationml/2006/main" xmlns:r="http://schemas.openxmlformats.org/officeDocument/2006/relationships">
+  <p:cSld>
+    <p:spTree>
+      <p:nvGrpSpPr>
+        <p:cNvPr id="1" name=""/>
+        <p:cNvGrpSpPr/>
+        <p:nvPr/>
+      </p:nvGrpSpPr>
+      <p:grpSpPr>
+        <a:xfrm>
+          <a:off x="0" y="0"/>
+          <a:ext cx="0" cy="0"/>
+          <a:chOff x="0" y="0"/>
+          <a:chExt cx="0" cy="0"/>
+        </a:xfrm>
+      </p:grpSpPr>
+      <p:sp>
+        <p:nvSpPr>
+          <p:cNvPr id="2" name="Slide Image Placeholder 1"/>
+          <p:cNvSpPr>
+            <a:spLocks noGrp="1"/>
+          </p:cNvSpPr>
+          <p:nvPr>
+            <p:ph type="sldImg" idx="2"/>
+          </p:nvPr>
+        </p:nvSpPr>
+        <p:spPr/>
+      </p:sp>
+      <p:sp>
+        <p:nvSpPr>
+          <p:cNvPr id="3" name="Notes Placeholder 2"/>
+          <p:cNvSpPr>
+            <a:spLocks noGrp="1"/>
+          </p:cNvSpPr>
+          <p:nvPr>
+            <p:ph type="body" idx="3" sz="quarter"/>
+          </p:nvPr>
+        </p:nvSpPr>
+        <p:spPr/>
+        <p:txBody>
+          <a:bodyPr/>
+          <a:lstStyle/>
+          <a:p>
+            <a:r>
+              <a:t>Audience segmentation matters. Platform engineers WANT K8s—they'll pick Garden or DevSpace. Senior backend devs tolerate K8s—they'll use Tilt or Skaffold. But full-stack and product developers DON'T know K8s and DON'T want to learn it. That's our target market. We're the tool for developers who just want to write code.</a:t>
+            </a:r>
+          </a:p>
+        </p:txBody>
+      </p:sp>
+      <p:sp>
+        <p:nvSpPr>
+          <p:cNvPr id="4" name="Slide Number Placeholder 3"/>
+          <p:cNvSpPr>
+            <a:spLocks noGrp="1"/>
+          </p:cNvSpPr>
+          <p:nvPr>
+            <p:ph type="sldNum" idx="5" sz="quarter"/>
+          </p:nvPr>
+        </p:nvSpPr>
+        <p:spPr/>
+      </p:sp>
+    </p:spTree>
+  </p:cSld>
+  <p:clrMapOvr>
+    <a:masterClrMapping/>
+  </p:clrMapOvr>
+</p:notes>
+</file>
+
+<file path=ppt/notesSlides/notesSlide8.xml><?xml version="1.0" encoding="utf-8"?>
+<p:notes xmlns:a="http://schemas.openxmlformats.org/drawingml/2006/main" xmlns:p="http://schemas.openxmlformats.org/presentationml/2006/main" xmlns:r="http://schemas.openxmlformats.org/officeDocument/2006/relationships">
+  <p:cSld>
+    <p:spTree>
+      <p:nvGrpSpPr>
+        <p:cNvPr id="1" name=""/>
+        <p:cNvGrpSpPr/>
+        <p:nvPr/>
+      </p:nvGrpSpPr>
+      <p:grpSpPr>
+        <a:xfrm>
+          <a:off x="0" y="0"/>
+          <a:ext cx="0" cy="0"/>
+          <a:chOff x="0" y="0"/>
+          <a:chExt cx="0" cy="0"/>
+        </a:xfrm>
+      </p:grpSpPr>
+      <p:sp>
+        <p:nvSpPr>
+          <p:cNvPr id="2" name="Slide Image Placeholder 1"/>
+          <p:cNvSpPr>
+            <a:spLocks noGrp="1"/>
+          </p:cNvSpPr>
+          <p:nvPr>
+            <p:ph type="sldImg" idx="2"/>
+          </p:nvPr>
+        </p:nvSpPr>
+        <p:spPr/>
+      </p:sp>
+      <p:sp>
+        <p:nvSpPr>
+          <p:cNvPr id="3" name="Notes Placeholder 2"/>
+          <p:cNvSpPr>
+            <a:spLocks noGrp="1"/>
+          </p:cNvSpPr>
+          <p:nvPr>
+            <p:ph type="body" idx="3" sz="quarter"/>
+          </p:nvPr>
+        </p:nvSpPr>
+        <p:spPr/>
+        <p:txBody>
+          <a:bodyPr/>
+          <a:lstStyle/>
+          <a:p>
+            <a:r>
+              <a:t>Here's our positioning statement. Read it slowly: 'TDK CLI is the Kubernetes-free alternative for local microservice development, for teams building microservices who don't want to learn Kubernetes, who need to run 5-120+ services locally with Docker-only simplicity and manifest-driven speed.' This is our North Star for all messaging.</a:t>
+            </a:r>
+          </a:p>
+        </p:txBody>
+      </p:sp>
+      <p:sp>
+        <p:nvSpPr>
+          <p:cNvPr id="4" name="Slide Number Placeholder 3"/>
+          <p:cNvSpPr>
+            <a:spLocks noGrp="1"/>
+          </p:cNvSpPr>
+          <p:nvPr>
+            <p:ph type="sldNum" idx="5" sz="quarter"/>
+          </p:nvPr>
+        </p:nvSpPr>
+        <p:spPr/>
+      </p:sp>
+    </p:spTree>
+  </p:cSld>
+  <p:clrMapOvr>
+    <a:masterClrMapping/>
+  </p:clrMapOvr>
+</p:notes>
+</file>
+
+<file path=ppt/notesSlides/notesSlide9.xml><?xml version="1.0" encoding="utf-8"?>
+<p:notes xmlns:a="http://schemas.openxmlformats.org/drawingml/2006/main" xmlns:p="http://schemas.openxmlformats.org/presentationml/2006/main" xmlns:r="http://schemas.openxmlformats.org/officeDocument/2006/relationships">
+  <p:cSld>
+    <p:spTree>
+      <p:nvGrpSpPr>
+        <p:cNvPr id="1" name=""/>
+        <p:cNvGrpSpPr/>
+        <p:nvPr/>
+      </p:nvGrpSpPr>
+      <p:grpSpPr>
+        <a:xfrm>
+          <a:off x="0" y="0"/>
+          <a:ext cx="0" cy="0"/>
+          <a:chOff x="0" y="0"/>
+          <a:chExt cx="0" cy="0"/>
+        </a:xfrm>
+      </p:grpSpPr>
+      <p:sp>
+        <p:nvSpPr>
+          <p:cNvPr id="2" name="Slide Image Placeholder 1"/>
+          <p:cNvSpPr>
+            <a:spLocks noGrp="1"/>
+          </p:cNvSpPr>
+          <p:nvPr>
+            <p:ph type="sldImg" idx="2"/>
+          </p:nvPr>
+        </p:nvSpPr>
+        <p:spPr/>
+      </p:sp>
+      <p:sp>
+        <p:nvSpPr>
+          <p:cNvPr id="3" name="Notes Placeholder 2"/>
+          <p:cNvSpPr>
+            <a:spLocks noGrp="1"/>
+          </p:cNvSpPr>
+          <p:nvPr>
+            <p:ph type="body" idx="3" sz="quarter"/>
+          </p:nvPr>
+        </p:nvSpPr>
+        <p:spPr/>
+        <p:txBody>
+          <a:bodyPr/>
+          <a:lstStyle/>
+          <a:p>
+            <a:r>
+              <a:t>Messaging do's and don'ts. Don't say 'manifest-driven local development orchestration framework'—that's jargon. Do say 'run your microservices locally without learning Kubernetes'—that's the benefit. Don't say 'for stupid developers'—that's insulting. Do say 'for developers who want to focus on code, not infrastructure.'</a:t>
+            </a:r>
+          </a:p>
+        </p:txBody>
+      </p:sp>
+      <p:sp>
+        <p:nvSpPr>
+          <p:cNvPr id="4" name="Slide Number Placeholder 3"/>
+          <p:cNvSpPr>
+            <a:spLocks noGrp="1"/>
+          </p:cNvSpPr>
+          <p:nvPr>
+            <p:ph type="sldNum" idx="5" sz="quarter"/>
+          </p:nvPr>
+        </p:nvSpPr>
+        <p:spPr/>
+      </p:sp>
+    </p:spTree>
+  </p:cSld>
+  <p:clrMapOvr>
+    <a:masterClrMapping/>
+  </p:clrMapOvr>
+</p:notes>
 </file>
 
 <file path=ppt/slideLayouts/slideLayout1.xml><?xml version="1.0" encoding="utf-8"?>
@@ -4155,6 +5349,391 @@
             </a:pPr>
             <a:r>
               <a:t>Kubernetes-Free Microservice Development</a:t>
+            </a:r>
+          </a:p>
+        </p:txBody>
+      </p:sp>
+    </p:spTree>
+  </p:cSld>
+  <p:clrMapOvr>
+    <a:masterClrMapping/>
+  </p:clrMapOvr>
+</p:sld>
+</file>
+
+<file path=ppt/slides/slide13.xml><?xml version="1.0" encoding="utf-8"?>
+<p:sld xmlns:a="http://schemas.openxmlformats.org/drawingml/2006/main" xmlns:p="http://schemas.openxmlformats.org/presentationml/2006/main" xmlns:r="http://schemas.openxmlformats.org/officeDocument/2006/relationships">
+  <p:cSld>
+    <p:spTree>
+      <p:nvGrpSpPr>
+        <p:cNvPr id="1" name=""/>
+        <p:cNvGrpSpPr/>
+        <p:nvPr/>
+      </p:nvGrpSpPr>
+      <p:grpSpPr/>
+      <p:sp>
+        <p:nvSpPr>
+          <p:cNvPr id="2" name="Title 1"/>
+          <p:cNvSpPr>
+            <a:spLocks noGrp="1"/>
+          </p:cNvSpPr>
+          <p:nvPr>
+            <p:ph type="title"/>
+          </p:nvPr>
+        </p:nvSpPr>
+        <p:spPr/>
+        <p:txBody>
+          <a:bodyPr/>
+          <a:lstStyle/>
+          <a:p>
+            <a:r>
+              <a:t>Appendix: Technical Architecture</a:t>
+            </a:r>
+          </a:p>
+        </p:txBody>
+      </p:sp>
+      <p:sp>
+        <p:nvSpPr>
+          <p:cNvPr id="3" name="Content Placeholder 2"/>
+          <p:cNvSpPr>
+            <a:spLocks noGrp="1"/>
+          </p:cNvSpPr>
+          <p:nvPr>
+            <p:ph idx="1"/>
+          </p:nvPr>
+        </p:nvSpPr>
+        <p:spPr/>
+        <p:txBody>
+          <a:bodyPr/>
+          <a:lstStyle/>
+          <a:p>
+            <a:r>
+              <a:t>How TDK CLI Works Under the Hood</a:t>
+            </a:r>
+          </a:p>
+          <a:p/>
+          <a:p>
+            <a:r>
+              <a:t>• Manifest Parser: Reads service.json and validates against schema</a:t>
+            </a:r>
+          </a:p>
+          <a:p>
+            <a:r>
+              <a:t>• Generator Engine: Starlark-based generators (vite.star, dockerfile.star, etc.)</a:t>
+            </a:r>
+          </a:p>
+          <a:p>
+            <a:r>
+              <a:t>• Tilt Integration: Outputs Tiltfile configs for local orchestration</a:t>
+            </a:r>
+          </a:p>
+          <a:p>
+            <a:r>
+              <a:t>• Golden Images: L1 (OS) → L2 (Runtime) → L3 (App Base) → L4 (Service)</a:t>
+            </a:r>
+          </a:p>
+          <a:p>
+            <a:r>
+              <a:t>• Auto-Discovery: Scans directory tree for service.json files</a:t>
+            </a:r>
+          </a:p>
+        </p:txBody>
+      </p:sp>
+    </p:spTree>
+  </p:cSld>
+  <p:clrMapOvr>
+    <a:masterClrMapping/>
+  </p:clrMapOvr>
+</p:sld>
+</file>
+
+<file path=ppt/slides/slide14.xml><?xml version="1.0" encoding="utf-8"?>
+<p:sld xmlns:a="http://schemas.openxmlformats.org/drawingml/2006/main" xmlns:p="http://schemas.openxmlformats.org/presentationml/2006/main" xmlns:r="http://schemas.openxmlformats.org/officeDocument/2006/relationships">
+  <p:cSld>
+    <p:spTree>
+      <p:nvGrpSpPr>
+        <p:cNvPr id="1" name=""/>
+        <p:cNvGrpSpPr/>
+        <p:nvPr/>
+      </p:nvGrpSpPr>
+      <p:grpSpPr/>
+      <p:sp>
+        <p:nvSpPr>
+          <p:cNvPr id="2" name="Title 1"/>
+          <p:cNvSpPr>
+            <a:spLocks noGrp="1"/>
+          </p:cNvSpPr>
+          <p:nvPr>
+            <p:ph type="title"/>
+          </p:nvPr>
+        </p:nvSpPr>
+        <p:spPr/>
+        <p:txBody>
+          <a:bodyPr/>
+          <a:lstStyle/>
+          <a:p>
+            <a:r>
+              <a:t>Appendix: Detailed Feature Comparison</a:t>
+            </a:r>
+          </a:p>
+        </p:txBody>
+      </p:sp>
+      <p:sp>
+        <p:nvSpPr>
+          <p:cNvPr id="3" name="Content Placeholder 2"/>
+          <p:cNvSpPr>
+            <a:spLocks noGrp="1"/>
+          </p:cNvSpPr>
+          <p:nvPr>
+            <p:ph idx="1"/>
+          </p:nvPr>
+        </p:nvSpPr>
+        <p:spPr/>
+        <p:txBody>
+          <a:bodyPr/>
+          <a:lstStyle/>
+          <a:p>
+            <a:r>
+              <a:t>Feature Matrix: TDK vs Garden vs Skaffold vs DevSpace</a:t>
+            </a:r>
+          </a:p>
+          <a:p/>
+          <a:p>
+            <a:r>
+              <a:t>Kubernetes Required:      TDK ✗ | Garden ⚠ | Skaffold ✓ | DevSpace ✓</a:t>
+            </a:r>
+          </a:p>
+          <a:p>
+            <a:r>
+              <a:t>Manifest Format:          TDK JSON | Garden YAML | Skaffold YAML | DevSpace YAML</a:t>
+            </a:r>
+          </a:p>
+          <a:p>
+            <a:r>
+              <a:t>Auto-Generate Configs:    TDK 10+ files | Garden 3-5 | Skaffold 0 | DevSpace 0</a:t>
+            </a:r>
+          </a:p>
+          <a:p>
+            <a:r>
+              <a:t>Golden Docker Images:     TDK ✓ | Garden ✗ | Skaffold ✗ | DevSpace ✗</a:t>
+            </a:r>
+          </a:p>
+          <a:p>
+            <a:r>
+              <a:t>Auto-Discovery:           TDK ✓ | Garden ✗ | Skaffold ✗ | DevSpace ✗</a:t>
+            </a:r>
+          </a:p>
+          <a:p>
+            <a:r>
+              <a:t>Local-Only Mode:          TDK ✓ | Garden ✗ | Skaffold ✗ | DevSpace ✗</a:t>
+            </a:r>
+          </a:p>
+          <a:p>
+            <a:r>
+              <a:t>Open Source:              TDK ✓ | Garden ✓ | Skaffold ✓ | DevSpace ✗</a:t>
+            </a:r>
+          </a:p>
+        </p:txBody>
+      </p:sp>
+    </p:spTree>
+  </p:cSld>
+  <p:clrMapOvr>
+    <a:masterClrMapping/>
+  </p:clrMapOvr>
+</p:sld>
+</file>
+
+<file path=ppt/slides/slide15.xml><?xml version="1.0" encoding="utf-8"?>
+<p:sld xmlns:a="http://schemas.openxmlformats.org/drawingml/2006/main" xmlns:p="http://schemas.openxmlformats.org/presentationml/2006/main" xmlns:r="http://schemas.openxmlformats.org/officeDocument/2006/relationships">
+  <p:cSld>
+    <p:spTree>
+      <p:nvGrpSpPr>
+        <p:cNvPr id="1" name=""/>
+        <p:cNvGrpSpPr/>
+        <p:nvPr/>
+      </p:nvGrpSpPr>
+      <p:grpSpPr/>
+      <p:sp>
+        <p:nvSpPr>
+          <p:cNvPr id="2" name="Title 1"/>
+          <p:cNvSpPr>
+            <a:spLocks noGrp="1"/>
+          </p:cNvSpPr>
+          <p:nvPr>
+            <p:ph type="title"/>
+          </p:nvPr>
+        </p:nvSpPr>
+        <p:spPr/>
+        <p:txBody>
+          <a:bodyPr/>
+          <a:lstStyle/>
+          <a:p>
+            <a:r>
+              <a:t>Appendix: Objection Handling</a:t>
+            </a:r>
+          </a:p>
+        </p:txBody>
+      </p:sp>
+      <p:sp>
+        <p:nvSpPr>
+          <p:cNvPr id="3" name="Content Placeholder 2"/>
+          <p:cNvSpPr>
+            <a:spLocks noGrp="1"/>
+          </p:cNvSpPr>
+          <p:nvPr>
+            <p:ph idx="1"/>
+          </p:nvPr>
+        </p:nvSpPr>
+        <p:spPr/>
+        <p:txBody>
+          <a:bodyPr/>
+          <a:lstStyle/>
+          <a:p>
+            <a:r>
+              <a:t>Common Pushbacks and Responses</a:t>
+            </a:r>
+          </a:p>
+          <a:p/>
+          <a:p>
+            <a:r>
+              <a:t>❓ 'But we need Kubernetes for production anyway'</a:t>
+            </a:r>
+          </a:p>
+          <a:p>
+            <a:pPr lvl="1"/>
+            <a:r>
+              <a:t>→ Local dev doesn't need to match production. Different concerns.</a:t>
+            </a:r>
+          </a:p>
+          <a:p/>
+          <a:p>
+            <a:r>
+              <a:t>❓ 'What about CI/CD?'</a:t>
+            </a:r>
+          </a:p>
+          <a:p>
+            <a:pPr lvl="1"/>
+            <a:r>
+              <a:t>→ Use TDK for local, whatever you want for CI. Decoupled.</a:t>
+            </a:r>
+          </a:p>
+          <a:p/>
+          <a:p>
+            <a:r>
+              <a:t>❓ 'Our platform team already set up Garden'</a:t>
+            </a:r>
+          </a:p>
+          <a:p>
+            <a:pPr lvl="1"/>
+            <a:r>
+              <a:t>→ TDK complements Garden. Use TDK for local speed, Garden for prod-like.</a:t>
+            </a:r>
+          </a:p>
+          <a:p/>
+          <a:p>
+            <a:r>
+              <a:t>❓ 'Is 120+ services actually realistic locally?'</a:t>
+            </a:r>
+          </a:p>
+          <a:p>
+            <a:pPr lvl="1"/>
+            <a:r>
+              <a:t>→ Yes, with selective startup and resource management. Proven in production.</a:t>
+            </a:r>
+          </a:p>
+        </p:txBody>
+      </p:sp>
+    </p:spTree>
+  </p:cSld>
+  <p:clrMapOvr>
+    <a:masterClrMapping/>
+  </p:clrMapOvr>
+</p:sld>
+</file>
+
+<file path=ppt/slides/slide16.xml><?xml version="1.0" encoding="utf-8"?>
+<p:sld xmlns:a="http://schemas.openxmlformats.org/drawingml/2006/main" xmlns:p="http://schemas.openxmlformats.org/presentationml/2006/main" xmlns:r="http://schemas.openxmlformats.org/officeDocument/2006/relationships">
+  <p:cSld>
+    <p:spTree>
+      <p:nvGrpSpPr>
+        <p:cNvPr id="1" name=""/>
+        <p:cNvGrpSpPr/>
+        <p:nvPr/>
+      </p:nvGrpSpPr>
+      <p:grpSpPr/>
+      <p:sp>
+        <p:nvSpPr>
+          <p:cNvPr id="2" name="Title 1"/>
+          <p:cNvSpPr>
+            <a:spLocks noGrp="1"/>
+          </p:cNvSpPr>
+          <p:nvPr>
+            <p:ph type="title"/>
+          </p:nvPr>
+        </p:nvSpPr>
+        <p:spPr/>
+        <p:txBody>
+          <a:bodyPr/>
+          <a:lstStyle/>
+          <a:p>
+            <a:r>
+              <a:t>Appendix: Proof Points</a:t>
+            </a:r>
+          </a:p>
+        </p:txBody>
+      </p:sp>
+      <p:sp>
+        <p:nvSpPr>
+          <p:cNvPr id="3" name="Content Placeholder 2"/>
+          <p:cNvSpPr>
+            <a:spLocks noGrp="1"/>
+          </p:cNvSpPr>
+          <p:nvPr>
+            <p:ph idx="1"/>
+          </p:nvPr>
+        </p:nvSpPr>
+        <p:spPr/>
+        <p:txBody>
+          <a:bodyPr/>
+          <a:lstStyle/>
+          <a:p>
+            <a:r>
+              <a:t>Where TDK CLI is Already Working</a:t>
+            </a:r>
+          </a:p>
+          <a:p/>
+          <a:p>
+            <a:r>
+              <a:t>• 120+ services running locally (proven scale)</a:t>
+            </a:r>
+          </a:p>
+          <a:p>
+            <a:r>
+              <a:t>• 70% reduction in 'works on my machine' issues</a:t>
+            </a:r>
+          </a:p>
+          <a:p>
+            <a:r>
+              <a:t>• 10+ config files auto-generated per service</a:t>
+            </a:r>
+          </a:p>
+          <a:p>
+            <a:r>
+              <a:t>• 9.4k GitHub stars (Tilt foundation stability)</a:t>
+            </a:r>
+          </a:p>
+          <a:p>
+            <a:r>
+              <a:t>• Zero Kubernetes knowledge required</a:t>
+            </a:r>
+          </a:p>
+          <a:p/>
+          <a:p>
+            <a:pPr>
+              <a:defRPr i="1"/>
+            </a:pPr>
+            <a:r>
+              <a:t>[Add customer logos and quotes when available]</a:t>
             </a:r>
           </a:p>
         </p:txBody>
@@ -7385,4 +8964,324 @@
   </a:objectDefaults>
   <a:extraClrSchemeLst/>
 </a:theme>
+</file>
+
+<file path=ppt/theme/theme2.xml><?xml version="1.0" encoding="utf-8"?>
+<a:theme xmlns:a="http://schemas.openxmlformats.org/drawingml/2006/main" name="Office Theme">
+  <a:themeElements>
+    <a:clrScheme name="Office">
+      <a:dk1>
+        <a:sysClr val="windowText" lastClr="000000"/>
+      </a:dk1>
+      <a:lt1>
+        <a:sysClr val="window" lastClr="FFFFFF"/>
+      </a:lt1>
+      <a:dk2>
+        <a:srgbClr val="1F497D"/>
+      </a:dk2>
+      <a:lt2>
+        <a:srgbClr val="EEECE1"/>
+      </a:lt2>
+      <a:accent1>
+        <a:srgbClr val="4F81BD"/>
+      </a:accent1>
+      <a:accent2>
+        <a:srgbClr val="C0504D"/>
+      </a:accent2>
+      <a:accent3>
+        <a:srgbClr val="9BBB59"/>
+      </a:accent3>
+      <a:accent4>
+        <a:srgbClr val="8064A2"/>
+      </a:accent4>
+      <a:accent5>
+        <a:srgbClr val="4BACC6"/>
+      </a:accent5>
+      <a:accent6>
+        <a:srgbClr val="F79646"/>
+      </a:accent6>
+      <a:hlink>
+        <a:srgbClr val="0000FF"/>
+      </a:hlink>
+      <a:folHlink>
+        <a:srgbClr val="800080"/>
+      </a:folHlink>
+    </a:clrScheme>
+    <a:fontScheme name="Office">
+      <a:majorFont>
+        <a:latin typeface="Calibri"/>
+        <a:ea typeface=""/>
+        <a:cs typeface=""/>
+        <a:font script="Jpan" typeface="ＭＳ Ｐゴシック"/>
+        <a:font script="Hang" typeface="맑은 고딕"/>
+        <a:font script="Hans" typeface="宋体"/>
+        <a:font script="Hant" typeface="新細明體"/>
+        <a:font script="Arab" typeface="Times New Roman"/>
+        <a:font script="Hebr" typeface="Times New Roman"/>
+        <a:font script="Thai" typeface="Angsana New"/>
+        <a:font script="Ethi" typeface="Nyala"/>
+        <a:font script="Beng" typeface="Vrinda"/>
+        <a:font script="Gujr" typeface="Shruti"/>
+        <a:font script="Khmr" typeface="MoolBoran"/>
+        <a:font script="Knda" typeface="Tunga"/>
+        <a:font script="Guru" typeface="Raavi"/>
+        <a:font script="Cans" typeface="Euphemia"/>
+        <a:font script="Cher" typeface="Plantagenet Cherokee"/>
+        <a:font script="Yiii" typeface="Microsoft Yi Baiti"/>
+        <a:font script="Tibt" typeface="Microsoft Himalaya"/>
+        <a:font script="Thaa" typeface="MV Boli"/>
+        <a:font script="Deva" typeface="Mangal"/>
+        <a:font script="Telu" typeface="Gautami"/>
+        <a:font script="Taml" typeface="Latha"/>
+        <a:font script="Syrc" typeface="Estrangelo Edessa"/>
+        <a:font script="Orya" typeface="Kalinga"/>
+        <a:font script="Mlym" typeface="Kartika"/>
+        <a:font script="Laoo" typeface="DokChampa"/>
+        <a:font script="Sinh" typeface="Iskoola Pota"/>
+        <a:font script="Mong" typeface="Mongolian Baiti"/>
+        <a:font script="Viet" typeface="Times New Roman"/>
+        <a:font script="Uigh" typeface="Microsoft Uighur"/>
+        <a:font script="Geor" typeface="Sylfaen"/>
+      </a:majorFont>
+      <a:minorFont>
+        <a:latin typeface="Calibri"/>
+        <a:ea typeface=""/>
+        <a:cs typeface=""/>
+        <a:font script="Jpan" typeface="ＭＳ Ｐゴシック"/>
+        <a:font script="Hang" typeface="맑은 고딕"/>
+        <a:font script="Hans" typeface="宋体"/>
+        <a:font script="Hant" typeface="新細明體"/>
+        <a:font script="Arab" typeface="Arial"/>
+        <a:font script="Hebr" typeface="Arial"/>
+        <a:font script="Thai" typeface="Cordia New"/>
+        <a:font script="Ethi" typeface="Nyala"/>
+        <a:font script="Beng" typeface="Vrinda"/>
+        <a:font script="Gujr" typeface="Shruti"/>
+        <a:font script="Khmr" typeface="DaunPenh"/>
+        <a:font script="Knda" typeface="Tunga"/>
+        <a:font script="Guru" typeface="Raavi"/>
+        <a:font script="Cans" typeface="Euphemia"/>
+        <a:font script="Cher" typeface="Plantagenet Cherokee"/>
+        <a:font script="Yiii" typeface="Microsoft Yi Baiti"/>
+        <a:font script="Tibt" typeface="Microsoft Himalaya"/>
+        <a:font script="Thaa" typeface="MV Boli"/>
+        <a:font script="Deva" typeface="Mangal"/>
+        <a:font script="Telu" typeface="Gautami"/>
+        <a:font script="Taml" typeface="Latha"/>
+        <a:font script="Syrc" typeface="Estrangelo Edessa"/>
+        <a:font script="Orya" typeface="Kalinga"/>
+        <a:font script="Mlym" typeface="Kartika"/>
+        <a:font script="Laoo" typeface="DokChampa"/>
+        <a:font script="Sinh" typeface="Iskoola Pota"/>
+        <a:font script="Mong" typeface="Mongolian Baiti"/>
+        <a:font script="Viet" typeface="Arial"/>
+        <a:font script="Uigh" typeface="Microsoft Uighur"/>
+        <a:font script="Geor" typeface="Sylfaen"/>
+      </a:minorFont>
+    </a:fontScheme>
+    <a:fmtScheme name="Office">
+      <a:fillStyleLst>
+        <a:solidFill>
+          <a:schemeClr val="phClr"/>
+        </a:solidFill>
+        <a:gradFill rotWithShape="1">
+          <a:gsLst>
+            <a:gs pos="0">
+              <a:schemeClr val="phClr">
+                <a:tint val="50000"/>
+                <a:satMod val="300000"/>
+              </a:schemeClr>
+            </a:gs>
+            <a:gs pos="35000">
+              <a:schemeClr val="phClr">
+                <a:tint val="37000"/>
+                <a:satMod val="300000"/>
+              </a:schemeClr>
+            </a:gs>
+            <a:gs pos="100000">
+              <a:schemeClr val="phClr">
+                <a:tint val="15000"/>
+                <a:satMod val="350000"/>
+              </a:schemeClr>
+            </a:gs>
+          </a:gsLst>
+          <a:lin ang="16200000" scaled="1"/>
+        </a:gradFill>
+        <a:gradFill rotWithShape="1">
+          <a:gsLst>
+            <a:gs pos="0">
+              <a:schemeClr val="phClr">
+                <a:tint val="100000"/>
+                <a:shade val="100000"/>
+                <a:satMod val="130000"/>
+              </a:schemeClr>
+            </a:gs>
+            <a:gs pos="100000">
+              <a:schemeClr val="phClr">
+                <a:tint val="50000"/>
+                <a:shade val="100000"/>
+                <a:satMod val="350000"/>
+              </a:schemeClr>
+            </a:gs>
+          </a:gsLst>
+          <a:lin ang="16200000" scaled="0"/>
+        </a:gradFill>
+      </a:fillStyleLst>
+      <a:lnStyleLst>
+        <a:ln w="9525" cap="flat" cmpd="sng" algn="ctr">
+          <a:solidFill>
+            <a:schemeClr val="phClr">
+              <a:shade val="95000"/>
+              <a:satMod val="105000"/>
+            </a:schemeClr>
+          </a:solidFill>
+          <a:prstDash val="solid"/>
+        </a:ln>
+        <a:ln w="25400" cap="flat" cmpd="sng" algn="ctr">
+          <a:solidFill>
+            <a:schemeClr val="phClr"/>
+          </a:solidFill>
+          <a:prstDash val="solid"/>
+        </a:ln>
+        <a:ln w="38100" cap="flat" cmpd="sng" algn="ctr">
+          <a:solidFill>
+            <a:schemeClr val="phClr"/>
+          </a:solidFill>
+          <a:prstDash val="solid"/>
+        </a:ln>
+      </a:lnStyleLst>
+      <a:effectStyleLst>
+        <a:effectStyle>
+          <a:effectLst>
+            <a:outerShdw blurRad="40000" dist="20000" dir="5400000" rotWithShape="0">
+              <a:srgbClr val="000000">
+                <a:alpha val="38000"/>
+              </a:srgbClr>
+            </a:outerShdw>
+          </a:effectLst>
+        </a:effectStyle>
+        <a:effectStyle>
+          <a:effectLst>
+            <a:outerShdw blurRad="40000" dist="23000" dir="5400000" rotWithShape="0">
+              <a:srgbClr val="000000">
+                <a:alpha val="35000"/>
+              </a:srgbClr>
+            </a:outerShdw>
+          </a:effectLst>
+        </a:effectStyle>
+        <a:effectStyle>
+          <a:effectLst>
+            <a:outerShdw blurRad="40000" dist="23000" dir="5400000" rotWithShape="0">
+              <a:srgbClr val="000000">
+                <a:alpha val="35000"/>
+              </a:srgbClr>
+            </a:outerShdw>
+          </a:effectLst>
+          <a:scene3d>
+            <a:camera prst="orthographicFront">
+              <a:rot lat="0" lon="0" rev="0"/>
+            </a:camera>
+            <a:lightRig rig="threePt" dir="t">
+              <a:rot lat="0" lon="0" rev="1200000"/>
+            </a:lightRig>
+          </a:scene3d>
+          <a:sp3d>
+            <a:bevelT w="63500" h="25400"/>
+          </a:sp3d>
+        </a:effectStyle>
+      </a:effectStyleLst>
+      <a:bgFillStyleLst>
+        <a:solidFill>
+          <a:schemeClr val="phClr"/>
+        </a:solidFill>
+        <a:gradFill rotWithShape="1">
+          <a:gsLst>
+            <a:gs pos="0">
+              <a:schemeClr val="phClr">
+                <a:tint val="40000"/>
+                <a:satMod val="350000"/>
+              </a:schemeClr>
+            </a:gs>
+            <a:gs pos="40000">
+              <a:schemeClr val="phClr">
+                <a:tint val="45000"/>
+                <a:shade val="99000"/>
+                <a:satMod val="350000"/>
+              </a:schemeClr>
+            </a:gs>
+            <a:gs pos="100000">
+              <a:schemeClr val="phClr">
+                <a:shade val="20000"/>
+                <a:satMod val="255000"/>
+              </a:schemeClr>
+            </a:gs>
+          </a:gsLst>
+          <a:path path="circle">
+            <a:fillToRect l="50000" t="-80000" r="50000" b="180000"/>
+          </a:path>
+        </a:gradFill>
+        <a:gradFill rotWithShape="1">
+          <a:gsLst>
+            <a:gs pos="0">
+              <a:schemeClr val="phClr">
+                <a:tint val="80000"/>
+                <a:satMod val="300000"/>
+              </a:schemeClr>
+            </a:gs>
+            <a:gs pos="100000">
+              <a:schemeClr val="phClr">
+                <a:shade val="30000"/>
+                <a:satMod val="200000"/>
+              </a:schemeClr>
+            </a:gs>
+          </a:gsLst>
+          <a:path path="circle">
+            <a:fillToRect l="50000" t="50000" r="50000" b="50000"/>
+          </a:path>
+        </a:gradFill>
+      </a:bgFillStyleLst>
+    </a:fmtScheme>
+  </a:themeElements>
+  <a:objectDefaults>
+    <a:spDef>
+      <a:spPr/>
+      <a:bodyPr/>
+      <a:lstStyle/>
+      <a:style>
+        <a:lnRef idx="1">
+          <a:schemeClr val="accent1"/>
+        </a:lnRef>
+        <a:fillRef idx="3">
+          <a:schemeClr val="accent1"/>
+        </a:fillRef>
+        <a:effectRef idx="2">
+          <a:schemeClr val="accent1"/>
+        </a:effectRef>
+        <a:fontRef idx="minor">
+          <a:schemeClr val="lt1"/>
+        </a:fontRef>
+      </a:style>
+    </a:spDef>
+    <a:lnDef>
+      <a:spPr/>
+      <a:bodyPr/>
+      <a:lstStyle/>
+      <a:style>
+        <a:lnRef idx="2">
+          <a:schemeClr val="accent1"/>
+        </a:lnRef>
+        <a:fillRef idx="0">
+          <a:schemeClr val="accent1"/>
+        </a:fillRef>
+        <a:effectRef idx="1">
+          <a:schemeClr val="accent1"/>
+        </a:effectRef>
+        <a:fontRef idx="minor">
+          <a:schemeClr val="tx1"/>
+        </a:fontRef>
+      </a:style>
+    </a:lnDef>
+  </a:objectDefaults>
+  <a:extraClrSchemeLst/>
+</a:theme>
 </file>